--- a/DEV-1-16/for_students/DAY-1/ppt/dev1_00.pptx
+++ b/DEV-1-16/for_students/DAY-1/ppt/dev1_00.pptx
@@ -220,7 +220,7 @@
           <a:p>
             <a:fld id="{7A6A0595-55A8-48ED-89D9-94EF8A794717}" type="datetimeFigureOut">
               <a:rPr lang="ru-RU" smtClean="0"/>
-              <a:t>16.01.2025</a:t>
+              <a:t>04.12.2025</a:t>
             </a:fld>
             <a:endParaRPr lang="ru-RU"/>
           </a:p>
@@ -488,7 +488,7 @@
 </file>
 
 <file path=ppt/slideLayouts/slideLayout1.xml><?xml version="1.0" encoding="utf-8"?>
-<p:sldLayout xmlns:a="http://schemas.openxmlformats.org/drawingml/2006/main" xmlns:r="http://schemas.openxmlformats.org/officeDocument/2006/relationships" xmlns:p="http://schemas.openxmlformats.org/presentationml/2006/main" type="blank" preserve="1">
+<p:sldLayout xmlns:a="http://schemas.openxmlformats.org/drawingml/2006/main" xmlns:r="http://schemas.openxmlformats.org/officeDocument/2006/relationships" xmlns:p="http://schemas.openxmlformats.org/presentationml/2006/main" showMasterSp="0" type="blank" preserve="1">
   <p:cSld name="Blank Slide">
     <p:spTree>
       <p:nvGrpSpPr>
@@ -513,7 +513,7 @@
 </file>
 
 <file path=ppt/slideLayouts/slideLayout10.xml><?xml version="1.0" encoding="utf-8"?>
-<p:sldLayout xmlns:a="http://schemas.openxmlformats.org/drawingml/2006/main" xmlns:r="http://schemas.openxmlformats.org/officeDocument/2006/relationships" xmlns:p="http://schemas.openxmlformats.org/presentationml/2006/main" type="objOverTx" preserve="1">
+<p:sldLayout xmlns:a="http://schemas.openxmlformats.org/drawingml/2006/main" xmlns:r="http://schemas.openxmlformats.org/officeDocument/2006/relationships" xmlns:p="http://schemas.openxmlformats.org/presentationml/2006/main" showMasterSp="0" type="objOverTx" preserve="1">
   <p:cSld name="Title, Content over Content">
     <p:spTree>
       <p:nvGrpSpPr>
@@ -640,7 +640,7 @@
 </file>
 
 <file path=ppt/slideLayouts/slideLayout11.xml><?xml version="1.0" encoding="utf-8"?>
-<p:sldLayout xmlns:a="http://schemas.openxmlformats.org/drawingml/2006/main" xmlns:r="http://schemas.openxmlformats.org/officeDocument/2006/relationships" xmlns:p="http://schemas.openxmlformats.org/presentationml/2006/main" type="fourObj" preserve="1">
+<p:sldLayout xmlns:a="http://schemas.openxmlformats.org/drawingml/2006/main" xmlns:r="http://schemas.openxmlformats.org/officeDocument/2006/relationships" xmlns:p="http://schemas.openxmlformats.org/presentationml/2006/main" showMasterSp="0" type="fourObj" preserve="1">
   <p:cSld name="Title, 4 Content">
     <p:spTree>
       <p:nvGrpSpPr>
@@ -835,7 +835,7 @@
 </file>
 
 <file path=ppt/slideLayouts/slideLayout12.xml><?xml version="1.0" encoding="utf-8"?>
-<p:sldLayout xmlns:a="http://schemas.openxmlformats.org/drawingml/2006/main" xmlns:r="http://schemas.openxmlformats.org/officeDocument/2006/relationships" xmlns:p="http://schemas.openxmlformats.org/presentationml/2006/main" type="blank" preserve="1">
+<p:sldLayout xmlns:a="http://schemas.openxmlformats.org/drawingml/2006/main" xmlns:r="http://schemas.openxmlformats.org/officeDocument/2006/relationships" xmlns:p="http://schemas.openxmlformats.org/presentationml/2006/main" showMasterSp="0" type="blank" preserve="1">
   <p:cSld name="Title, 6 Content">
     <p:spTree>
       <p:nvGrpSpPr>
@@ -1223,7 +1223,7 @@
 </file>
 
 <file path=ppt/slideLayouts/slideLayout14.xml><?xml version="1.0" encoding="utf-8"?>
-<p:sldLayout xmlns:a="http://schemas.openxmlformats.org/drawingml/2006/main" xmlns:r="http://schemas.openxmlformats.org/officeDocument/2006/relationships" xmlns:p="http://schemas.openxmlformats.org/presentationml/2006/main" type="title">
+<p:sldLayout xmlns:a="http://schemas.openxmlformats.org/drawingml/2006/main" xmlns:r="http://schemas.openxmlformats.org/officeDocument/2006/relationships" xmlns:p="http://schemas.openxmlformats.org/presentationml/2006/main" showMasterSp="0" type="title">
   <p:cSld name="Титульный слайд">
     <p:spTree>
       <p:nvGrpSpPr>
@@ -1369,7 +1369,7 @@
           <a:p>
             <a:fld id="{EF790F8C-5FB9-4EFE-BCC7-F735A3026FD8}" type="datetimeFigureOut">
               <a:rPr lang="ru-RU" smtClean="0"/>
-              <a:t>16.01.2025</a:t>
+              <a:t>04.12.2025</a:t>
             </a:fld>
             <a:endParaRPr lang="ru-RU"/>
           </a:p>
@@ -1443,7 +1443,7 @@
 </file>
 
 <file path=ppt/slideLayouts/slideLayout2.xml><?xml version="1.0" encoding="utf-8"?>
-<p:sldLayout xmlns:a="http://schemas.openxmlformats.org/drawingml/2006/main" xmlns:r="http://schemas.openxmlformats.org/officeDocument/2006/relationships" xmlns:p="http://schemas.openxmlformats.org/presentationml/2006/main" type="tx" preserve="1">
+<p:sldLayout xmlns:a="http://schemas.openxmlformats.org/drawingml/2006/main" xmlns:r="http://schemas.openxmlformats.org/officeDocument/2006/relationships" xmlns:p="http://schemas.openxmlformats.org/presentationml/2006/main" showMasterSp="0" type="tx" preserve="1">
   <p:cSld name="Title Slide">
     <p:spTree>
       <p:nvGrpSpPr>
@@ -1534,7 +1534,7 @@
 </file>
 
 <file path=ppt/slideLayouts/slideLayout3.xml><?xml version="1.0" encoding="utf-8"?>
-<p:sldLayout xmlns:a="http://schemas.openxmlformats.org/drawingml/2006/main" xmlns:r="http://schemas.openxmlformats.org/officeDocument/2006/relationships" xmlns:p="http://schemas.openxmlformats.org/presentationml/2006/main" type="obj" preserve="1">
+<p:sldLayout xmlns:a="http://schemas.openxmlformats.org/drawingml/2006/main" xmlns:r="http://schemas.openxmlformats.org/officeDocument/2006/relationships" xmlns:p="http://schemas.openxmlformats.org/presentationml/2006/main" showMasterSp="0" type="obj" preserve="1">
   <p:cSld name="Title, Content">
     <p:spTree>
       <p:nvGrpSpPr>
@@ -1627,7 +1627,7 @@
 </file>
 
 <file path=ppt/slideLayouts/slideLayout4.xml><?xml version="1.0" encoding="utf-8"?>
-<p:sldLayout xmlns:a="http://schemas.openxmlformats.org/drawingml/2006/main" xmlns:r="http://schemas.openxmlformats.org/officeDocument/2006/relationships" xmlns:p="http://schemas.openxmlformats.org/presentationml/2006/main" type="twoObj" preserve="1">
+<p:sldLayout xmlns:a="http://schemas.openxmlformats.org/drawingml/2006/main" xmlns:r="http://schemas.openxmlformats.org/officeDocument/2006/relationships" xmlns:p="http://schemas.openxmlformats.org/presentationml/2006/main" showMasterSp="0" type="twoObj" preserve="1">
   <p:cSld name="Title, 2 Content">
     <p:spTree>
       <p:nvGrpSpPr>
@@ -1754,7 +1754,7 @@
 </file>
 
 <file path=ppt/slideLayouts/slideLayout5.xml><?xml version="1.0" encoding="utf-8"?>
-<p:sldLayout xmlns:a="http://schemas.openxmlformats.org/drawingml/2006/main" xmlns:r="http://schemas.openxmlformats.org/officeDocument/2006/relationships" xmlns:p="http://schemas.openxmlformats.org/presentationml/2006/main" type="titleOnly" preserve="1">
+<p:sldLayout xmlns:a="http://schemas.openxmlformats.org/drawingml/2006/main" xmlns:r="http://schemas.openxmlformats.org/officeDocument/2006/relationships" xmlns:p="http://schemas.openxmlformats.org/presentationml/2006/main" showMasterSp="0" type="titleOnly" preserve="1">
   <p:cSld name="Title Only">
     <p:spTree>
       <p:nvGrpSpPr>
@@ -1813,7 +1813,7 @@
 </file>
 
 <file path=ppt/slideLayouts/slideLayout6.xml><?xml version="1.0" encoding="utf-8"?>
-<p:sldLayout xmlns:a="http://schemas.openxmlformats.org/drawingml/2006/main" xmlns:r="http://schemas.openxmlformats.org/officeDocument/2006/relationships" xmlns:p="http://schemas.openxmlformats.org/presentationml/2006/main" type="objOnly" preserve="1">
+<p:sldLayout xmlns:a="http://schemas.openxmlformats.org/drawingml/2006/main" xmlns:r="http://schemas.openxmlformats.org/officeDocument/2006/relationships" xmlns:p="http://schemas.openxmlformats.org/presentationml/2006/main" showMasterSp="0" type="objOnly" preserve="1">
   <p:cSld name="Centered Text">
     <p:spTree>
       <p:nvGrpSpPr>
@@ -1870,7 +1870,7 @@
 </file>
 
 <file path=ppt/slideLayouts/slideLayout7.xml><?xml version="1.0" encoding="utf-8"?>
-<p:sldLayout xmlns:a="http://schemas.openxmlformats.org/drawingml/2006/main" xmlns:r="http://schemas.openxmlformats.org/officeDocument/2006/relationships" xmlns:p="http://schemas.openxmlformats.org/presentationml/2006/main" type="twoObjAndObj" preserve="1">
+<p:sldLayout xmlns:a="http://schemas.openxmlformats.org/drawingml/2006/main" xmlns:r="http://schemas.openxmlformats.org/officeDocument/2006/relationships" xmlns:p="http://schemas.openxmlformats.org/presentationml/2006/main" showMasterSp="0" type="twoObjAndObj" preserve="1">
   <p:cSld name="Title, 2 Content and Content">
     <p:spTree>
       <p:nvGrpSpPr>
@@ -2031,7 +2031,7 @@
 </file>
 
 <file path=ppt/slideLayouts/slideLayout8.xml><?xml version="1.0" encoding="utf-8"?>
-<p:sldLayout xmlns:a="http://schemas.openxmlformats.org/drawingml/2006/main" xmlns:r="http://schemas.openxmlformats.org/officeDocument/2006/relationships" xmlns:p="http://schemas.openxmlformats.org/presentationml/2006/main" type="objAndTwoObj" preserve="1">
+<p:sldLayout xmlns:a="http://schemas.openxmlformats.org/drawingml/2006/main" xmlns:r="http://schemas.openxmlformats.org/officeDocument/2006/relationships" xmlns:p="http://schemas.openxmlformats.org/presentationml/2006/main" showMasterSp="0" type="objAndTwoObj" preserve="1">
   <p:cSld name="Title Content and 2 Content">
     <p:spTree>
       <p:nvGrpSpPr>
@@ -2192,7 +2192,7 @@
 </file>
 
 <file path=ppt/slideLayouts/slideLayout9.xml><?xml version="1.0" encoding="utf-8"?>
-<p:sldLayout xmlns:a="http://schemas.openxmlformats.org/drawingml/2006/main" xmlns:r="http://schemas.openxmlformats.org/officeDocument/2006/relationships" xmlns:p="http://schemas.openxmlformats.org/presentationml/2006/main" type="twoObjOverTx" preserve="1">
+<p:sldLayout xmlns:a="http://schemas.openxmlformats.org/drawingml/2006/main" xmlns:r="http://schemas.openxmlformats.org/officeDocument/2006/relationships" xmlns:p="http://schemas.openxmlformats.org/presentationml/2006/main" showMasterSp="0" type="twoObjOverTx" preserve="1">
   <p:cSld name="Title, 2 Content over Content">
     <p:spTree>
       <p:nvGrpSpPr>
@@ -3106,6 +3106,19 @@
 <file path=ppt/slides/slide1.xml><?xml version="1.0" encoding="utf-8"?>
 <p:sld xmlns:a="http://schemas.openxmlformats.org/drawingml/2006/main" xmlns:r="http://schemas.openxmlformats.org/officeDocument/2006/relationships" xmlns:p="http://schemas.openxmlformats.org/presentationml/2006/main">
   <p:cSld>
+    <p:bg>
+      <p:bgPr>
+        <a:pattFill prst="pct5">
+          <a:fgClr>
+            <a:srgbClr val="FFFFFF"/>
+          </a:fgClr>
+          <a:bgClr>
+            <a:schemeClr val="bg1"/>
+          </a:bgClr>
+        </a:pattFill>
+        <a:effectLst/>
+      </p:bgPr>
+    </p:bg>
     <p:spTree>
       <p:nvGrpSpPr>
         <p:cNvPr id="1" name=""/>
@@ -3259,7 +3272,7 @@
 </file>
 
 <file path=ppt/slides/slide10.xml><?xml version="1.0" encoding="utf-8"?>
-<p:sld xmlns:a="http://schemas.openxmlformats.org/drawingml/2006/main" xmlns:r="http://schemas.openxmlformats.org/officeDocument/2006/relationships" xmlns:p="http://schemas.openxmlformats.org/presentationml/2006/main">
+<p:sld xmlns:a="http://schemas.openxmlformats.org/drawingml/2006/main" xmlns:r="http://schemas.openxmlformats.org/officeDocument/2006/relationships" xmlns:p="http://schemas.openxmlformats.org/presentationml/2006/main" showMasterSp="0">
   <p:cSld>
     <p:spTree>
       <p:nvGrpSpPr>
@@ -3319,7 +3332,7 @@
 </file>
 
 <file path=ppt/slides/slide11.xml><?xml version="1.0" encoding="utf-8"?>
-<p:sld xmlns:a="http://schemas.openxmlformats.org/drawingml/2006/main" xmlns:r="http://schemas.openxmlformats.org/officeDocument/2006/relationships" xmlns:p="http://schemas.openxmlformats.org/presentationml/2006/main">
+<p:sld xmlns:a="http://schemas.openxmlformats.org/drawingml/2006/main" xmlns:r="http://schemas.openxmlformats.org/officeDocument/2006/relationships" xmlns:p="http://schemas.openxmlformats.org/presentationml/2006/main" showMasterSp="0">
   <p:cSld>
     <p:spTree>
       <p:nvGrpSpPr>
@@ -3379,7 +3392,7 @@
 </file>
 
 <file path=ppt/slides/slide12.xml><?xml version="1.0" encoding="utf-8"?>
-<p:sld xmlns:a="http://schemas.openxmlformats.org/drawingml/2006/main" xmlns:r="http://schemas.openxmlformats.org/officeDocument/2006/relationships" xmlns:p="http://schemas.openxmlformats.org/presentationml/2006/main">
+<p:sld xmlns:a="http://schemas.openxmlformats.org/drawingml/2006/main" xmlns:r="http://schemas.openxmlformats.org/officeDocument/2006/relationships" xmlns:p="http://schemas.openxmlformats.org/presentationml/2006/main" showMasterSp="0">
   <p:cSld>
     <p:spTree>
       <p:nvGrpSpPr>
@@ -3439,7 +3452,7 @@
 </file>
 
 <file path=ppt/slides/slide13.xml><?xml version="1.0" encoding="utf-8"?>
-<p:sld xmlns:a="http://schemas.openxmlformats.org/drawingml/2006/main" xmlns:r="http://schemas.openxmlformats.org/officeDocument/2006/relationships" xmlns:p="http://schemas.openxmlformats.org/presentationml/2006/main">
+<p:sld xmlns:a="http://schemas.openxmlformats.org/drawingml/2006/main" xmlns:r="http://schemas.openxmlformats.org/officeDocument/2006/relationships" xmlns:p="http://schemas.openxmlformats.org/presentationml/2006/main" showMasterSp="0">
   <p:cSld>
     <p:spTree>
       <p:nvGrpSpPr>
@@ -3891,7 +3904,7 @@
 </file>
 
 <file path=ppt/slides/slide14.xml><?xml version="1.0" encoding="utf-8"?>
-<p:sld xmlns:a="http://schemas.openxmlformats.org/drawingml/2006/main" xmlns:r="http://schemas.openxmlformats.org/officeDocument/2006/relationships" xmlns:p="http://schemas.openxmlformats.org/presentationml/2006/main">
+<p:sld xmlns:a="http://schemas.openxmlformats.org/drawingml/2006/main" xmlns:r="http://schemas.openxmlformats.org/officeDocument/2006/relationships" xmlns:p="http://schemas.openxmlformats.org/presentationml/2006/main" showMasterSp="0">
   <p:cSld>
     <p:spTree>
       <p:nvGrpSpPr>
@@ -3995,7 +4008,7 @@
 </file>
 
 <file path=ppt/slides/slide15.xml><?xml version="1.0" encoding="utf-8"?>
-<p:sld xmlns:a="http://schemas.openxmlformats.org/drawingml/2006/main" xmlns:r="http://schemas.openxmlformats.org/officeDocument/2006/relationships" xmlns:p="http://schemas.openxmlformats.org/presentationml/2006/main">
+<p:sld xmlns:a="http://schemas.openxmlformats.org/drawingml/2006/main" xmlns:r="http://schemas.openxmlformats.org/officeDocument/2006/relationships" xmlns:p="http://schemas.openxmlformats.org/presentationml/2006/main" showMasterSp="0">
   <p:cSld>
     <p:spTree>
       <p:nvGrpSpPr>
@@ -4295,7 +4308,7 @@
 </file>
 
 <file path=ppt/slides/slide2.xml><?xml version="1.0" encoding="utf-8"?>
-<p:sld xmlns:a="http://schemas.openxmlformats.org/drawingml/2006/main" xmlns:r="http://schemas.openxmlformats.org/officeDocument/2006/relationships" xmlns:p="http://schemas.openxmlformats.org/presentationml/2006/main">
+<p:sld xmlns:a="http://schemas.openxmlformats.org/drawingml/2006/main" xmlns:r="http://schemas.openxmlformats.org/officeDocument/2006/relationships" xmlns:p="http://schemas.openxmlformats.org/presentationml/2006/main" showMasterSp="0">
   <p:cSld>
     <p:spTree>
       <p:nvGrpSpPr>
@@ -4713,8 +4726,8 @@
         </p:nvSpPr>
         <p:spPr>
           <a:xfrm>
-            <a:off x="2371054" y="261051"/>
-            <a:ext cx="3546788" cy="2908920"/>
+            <a:off x="2648235" y="284914"/>
+            <a:ext cx="5457994" cy="2323798"/>
           </a:xfrm>
           <a:prstGeom prst="rect">
             <a:avLst/>
@@ -5193,7 +5206,7 @@
                 <a:ea typeface="Open Sans" pitchFamily="2" charset="0"/>
                 <a:cs typeface="Open Sans" pitchFamily="2" charset="0"/>
               </a:rPr>
-              <a:t> доцент РТУ МИРЭА</a:t>
+              <a:t>доцент РТУ МИРЭА</a:t>
             </a:r>
             <a:r>
               <a:rPr lang="en-US" sz="1600" kern="0" dirty="0">
@@ -5245,26 +5258,21 @@
                 <a:ea typeface="Open Sans" pitchFamily="2" charset="0"/>
                 <a:cs typeface="Open Sans" pitchFamily="2" charset="0"/>
               </a:rPr>
-              <a:t> учебный центр Специалист</a:t>
-            </a:r>
-          </a:p>
-          <a:p>
-            <a:pPr marL="609585" indent="-474121" defTabSz="1219170">
-              <a:spcBef>
-                <a:spcPts val="1067"/>
-              </a:spcBef>
-              <a:buSzPct val="130000"/>
-              <a:buFont typeface="Open Sans"/>
-              <a:buBlip>
-                <a:blip r:embed="rId3">
-                  <a:extLst>
-                    <a:ext uri="{96DAC541-7B7A-43D3-8B79-37D633B846F1}">
-                      <asvg:svgBlip xmlns:asvg="http://schemas.microsoft.com/office/drawing/2016/SVG/main" r:embed="rId4"/>
-                    </a:ext>
-                  </a:extLst>
-                </a:blip>
-              </a:buBlip>
-            </a:pPr>
+              <a:t> учебный </a:t>
+            </a:r>
+            <a:r>
+              <a:rPr lang="ru-RU" sz="1600" kern="0">
+                <a:solidFill>
+                  <a:schemeClr val="accent1">
+                    <a:lumMod val="50000"/>
+                  </a:schemeClr>
+                </a:solidFill>
+                <a:latin typeface="Yandex Sans Text Light" panose="02000000000000000000" pitchFamily="2" charset="-52"/>
+                <a:ea typeface="Open Sans" pitchFamily="2" charset="0"/>
+                <a:cs typeface="Open Sans" pitchFamily="2" charset="0"/>
+              </a:rPr>
+              <a:t>центр Специалист</a:t>
+            </a:r>
             <a:endParaRPr lang="ru-RU" sz="1600" kern="0" dirty="0">
               <a:solidFill>
                 <a:srgbClr val="C00000"/>
@@ -5436,7 +5444,7 @@
         </p:blipFill>
         <p:spPr>
           <a:xfrm>
-            <a:off x="4144448" y="3678357"/>
+            <a:off x="4557486" y="3698532"/>
             <a:ext cx="744221" cy="744221"/>
           </a:xfrm>
           <a:prstGeom prst="rect">
@@ -5593,7 +5601,7 @@
         </p:nvSpPr>
         <p:spPr>
           <a:xfrm>
-            <a:off x="5340698" y="3122754"/>
+            <a:off x="5578714" y="3110014"/>
             <a:ext cx="3244555" cy="379656"/>
           </a:xfrm>
           <a:prstGeom prst="rect">
@@ -5612,16 +5620,23 @@
               </a:buClr>
             </a:pPr>
             <a:r>
-              <a:rPr lang="ru-RU" sz="1867" kern="0" dirty="0">
+              <a:rPr lang="en-US" sz="1867" kern="0" dirty="0">
                 <a:solidFill>
                   <a:srgbClr val="05386C"/>
                 </a:solidFill>
-                <a:latin typeface="Arial"/>
                 <a:cs typeface="Arial"/>
                 <a:sym typeface="Arial"/>
               </a:rPr>
-              <a:t>https://programism.ru/</a:t>
-            </a:r>
+              <a:t>https://neuronis.ru/</a:t>
+            </a:r>
+            <a:endParaRPr lang="ru-RU" sz="1867" kern="0" dirty="0">
+              <a:solidFill>
+                <a:srgbClr val="05386C"/>
+              </a:solidFill>
+              <a:latin typeface="Arial"/>
+              <a:cs typeface="Arial"/>
+              <a:sym typeface="Arial"/>
+            </a:endParaRPr>
           </a:p>
         </p:txBody>
       </p:sp>
@@ -5647,7 +5662,7 @@
         </p:blipFill>
         <p:spPr>
           <a:xfrm>
-            <a:off x="5565724" y="3552714"/>
+            <a:off x="6879267" y="3802343"/>
             <a:ext cx="873033" cy="864169"/>
           </a:xfrm>
           <a:prstGeom prst="rect">
@@ -5969,7 +5984,7 @@
 </file>
 
 <file path=ppt/slides/slide3.xml><?xml version="1.0" encoding="utf-8"?>
-<p:sld xmlns:a="http://schemas.openxmlformats.org/drawingml/2006/main" xmlns:r="http://schemas.openxmlformats.org/officeDocument/2006/relationships" xmlns:p="http://schemas.openxmlformats.org/presentationml/2006/main">
+<p:sld xmlns:a="http://schemas.openxmlformats.org/drawingml/2006/main" xmlns:r="http://schemas.openxmlformats.org/officeDocument/2006/relationships" xmlns:p="http://schemas.openxmlformats.org/presentationml/2006/main" showMasterSp="0">
   <p:cSld>
     <p:spTree>
       <p:nvGrpSpPr>
@@ -6029,7 +6044,7 @@
 </file>
 
 <file path=ppt/slides/slide4.xml><?xml version="1.0" encoding="utf-8"?>
-<p:sld xmlns:a="http://schemas.openxmlformats.org/drawingml/2006/main" xmlns:r="http://schemas.openxmlformats.org/officeDocument/2006/relationships" xmlns:p="http://schemas.openxmlformats.org/presentationml/2006/main">
+<p:sld xmlns:a="http://schemas.openxmlformats.org/drawingml/2006/main" xmlns:r="http://schemas.openxmlformats.org/officeDocument/2006/relationships" xmlns:p="http://schemas.openxmlformats.org/presentationml/2006/main" showMasterSp="0">
   <p:cSld>
     <p:spTree>
       <p:nvGrpSpPr>
@@ -6256,7 +6271,7 @@
 </file>
 
 <file path=ppt/slides/slide5.xml><?xml version="1.0" encoding="utf-8"?>
-<p:sld xmlns:a="http://schemas.openxmlformats.org/drawingml/2006/main" xmlns:r="http://schemas.openxmlformats.org/officeDocument/2006/relationships" xmlns:p="http://schemas.openxmlformats.org/presentationml/2006/main">
+<p:sld xmlns:a="http://schemas.openxmlformats.org/drawingml/2006/main" xmlns:r="http://schemas.openxmlformats.org/officeDocument/2006/relationships" xmlns:p="http://schemas.openxmlformats.org/presentationml/2006/main" showMasterSp="0">
   <p:cSld>
     <p:spTree>
       <p:nvGrpSpPr>
@@ -6316,7 +6331,7 @@
 </file>
 
 <file path=ppt/slides/slide6.xml><?xml version="1.0" encoding="utf-8"?>
-<p:sld xmlns:a="http://schemas.openxmlformats.org/drawingml/2006/main" xmlns:r="http://schemas.openxmlformats.org/officeDocument/2006/relationships" xmlns:p="http://schemas.openxmlformats.org/presentationml/2006/main">
+<p:sld xmlns:a="http://schemas.openxmlformats.org/drawingml/2006/main" xmlns:r="http://schemas.openxmlformats.org/officeDocument/2006/relationships" xmlns:p="http://schemas.openxmlformats.org/presentationml/2006/main" showMasterSp="0">
   <p:cSld>
     <p:spTree>
       <p:nvGrpSpPr>
@@ -6376,7 +6391,7 @@
 </file>
 
 <file path=ppt/slides/slide7.xml><?xml version="1.0" encoding="utf-8"?>
-<p:sld xmlns:a="http://schemas.openxmlformats.org/drawingml/2006/main" xmlns:r="http://schemas.openxmlformats.org/officeDocument/2006/relationships" xmlns:p="http://schemas.openxmlformats.org/presentationml/2006/main">
+<p:sld xmlns:a="http://schemas.openxmlformats.org/drawingml/2006/main" xmlns:r="http://schemas.openxmlformats.org/officeDocument/2006/relationships" xmlns:p="http://schemas.openxmlformats.org/presentationml/2006/main" showMasterSp="0">
   <p:cSld>
     <p:spTree>
       <p:nvGrpSpPr>
@@ -6436,7 +6451,7 @@
 </file>
 
 <file path=ppt/slides/slide8.xml><?xml version="1.0" encoding="utf-8"?>
-<p:sld xmlns:a="http://schemas.openxmlformats.org/drawingml/2006/main" xmlns:r="http://schemas.openxmlformats.org/officeDocument/2006/relationships" xmlns:p="http://schemas.openxmlformats.org/presentationml/2006/main">
+<p:sld xmlns:a="http://schemas.openxmlformats.org/drawingml/2006/main" xmlns:r="http://schemas.openxmlformats.org/officeDocument/2006/relationships" xmlns:p="http://schemas.openxmlformats.org/presentationml/2006/main" showMasterSp="0">
   <p:cSld>
     <p:spTree>
       <p:nvGrpSpPr>
@@ -6496,7 +6511,7 @@
 </file>
 
 <file path=ppt/slides/slide9.xml><?xml version="1.0" encoding="utf-8"?>
-<p:sld xmlns:a="http://schemas.openxmlformats.org/drawingml/2006/main" xmlns:r="http://schemas.openxmlformats.org/officeDocument/2006/relationships" xmlns:p="http://schemas.openxmlformats.org/presentationml/2006/main">
+<p:sld xmlns:a="http://schemas.openxmlformats.org/drawingml/2006/main" xmlns:r="http://schemas.openxmlformats.org/officeDocument/2006/relationships" xmlns:p="http://schemas.openxmlformats.org/presentationml/2006/main" showMasterSp="0">
   <p:cSld>
     <p:spTree>
       <p:nvGrpSpPr>

--- a/DEV-1-16/for_students/DAY-1/ppt/dev1_00.pptx
+++ b/DEV-1-16/for_students/DAY-1/ppt/dev1_00.pptx
@@ -5232,46 +5232,7 @@
                 <a:ea typeface="Open Sans" pitchFamily="2" charset="0"/>
                 <a:cs typeface="Open Sans" pitchFamily="2" charset="0"/>
               </a:rPr>
-              <a:t>Политех, </a:t>
-            </a:r>
-            <a:r>
-              <a:rPr lang="ru-RU" sz="1600" kern="0" dirty="0" err="1">
-                <a:solidFill>
-                  <a:schemeClr val="accent1">
-                    <a:lumMod val="50000"/>
-                  </a:schemeClr>
-                </a:solidFill>
-                <a:latin typeface="Yandex Sans Text Light" panose="02000000000000000000" pitchFamily="2" charset="-52"/>
-                <a:ea typeface="Open Sans" pitchFamily="2" charset="0"/>
-                <a:cs typeface="Open Sans" pitchFamily="2" charset="0"/>
-              </a:rPr>
-              <a:t>Бауманский</a:t>
-            </a:r>
-            <a:r>
-              <a:rPr lang="ru-RU" sz="1600" kern="0" dirty="0">
-                <a:solidFill>
-                  <a:schemeClr val="accent1">
-                    <a:lumMod val="50000"/>
-                  </a:schemeClr>
-                </a:solidFill>
-                <a:latin typeface="Yandex Sans Text Light" panose="02000000000000000000" pitchFamily="2" charset="-52"/>
-                <a:ea typeface="Open Sans" pitchFamily="2" charset="0"/>
-                <a:cs typeface="Open Sans" pitchFamily="2" charset="0"/>
-              </a:rPr>
-              <a:t> учебный </a:t>
-            </a:r>
-            <a:r>
-              <a:rPr lang="ru-RU" sz="1600" kern="0">
-                <a:solidFill>
-                  <a:schemeClr val="accent1">
-                    <a:lumMod val="50000"/>
-                  </a:schemeClr>
-                </a:solidFill>
-                <a:latin typeface="Yandex Sans Text Light" panose="02000000000000000000" pitchFamily="2" charset="-52"/>
-                <a:ea typeface="Open Sans" pitchFamily="2" charset="0"/>
-                <a:cs typeface="Open Sans" pitchFamily="2" charset="0"/>
-              </a:rPr>
-              <a:t>центр Специалист</a:t>
+              <a:t>Политех, Бауманский учебный центр Специалист</a:t>
             </a:r>
             <a:endParaRPr lang="ru-RU" sz="1600" kern="0" dirty="0">
               <a:solidFill>

--- a/DEV-1-16/for_students/DAY-1/ppt/dev1_00.pptx
+++ b/DEV-1-16/for_students/DAY-1/ppt/dev1_00.pptx
@@ -4046,7 +4046,7 @@
         </p:blipFill>
         <p:spPr>
           <a:xfrm>
-            <a:off x="0" y="0"/>
+            <a:off x="1051560" y="0"/>
             <a:ext cx="6835352" cy="5143500"/>
           </a:xfrm>
           <a:prstGeom prst="rect">
@@ -4726,8 +4726,8 @@
         </p:nvSpPr>
         <p:spPr>
           <a:xfrm>
-            <a:off x="2648235" y="284914"/>
-            <a:ext cx="5457994" cy="2323798"/>
+            <a:off x="2648234" y="284914"/>
+            <a:ext cx="5941785" cy="2323798"/>
           </a:xfrm>
           <a:prstGeom prst="rect">
             <a:avLst/>
@@ -5018,25 +5018,8 @@
               </a:rPr>
               <a:t>Бэкенд-разработчик </a:t>
             </a:r>
-          </a:p>
-          <a:p>
-            <a:pPr marL="609585" indent="-474121" defTabSz="1219170">
-              <a:spcBef>
-                <a:spcPts val="1067"/>
-              </a:spcBef>
-              <a:buSzPct val="130000"/>
-              <a:buBlip>
-                <a:blip r:embed="rId3">
-                  <a:extLst>
-                    <a:ext uri="{96DAC541-7B7A-43D3-8B79-37D633B846F1}">
-                      <asvg:svgBlip xmlns:asvg="http://schemas.microsoft.com/office/drawing/2016/SVG/main" r:embed="rId4"/>
-                    </a:ext>
-                  </a:extLst>
-                </a:blip>
-              </a:buBlip>
-            </a:pPr>
-            <a:r>
-              <a:rPr lang="ru-RU" sz="1600" kern="0" dirty="0">
+            <a:r>
+              <a:rPr lang="en-US" sz="1600" kern="0" dirty="0">
                 <a:solidFill>
                   <a:schemeClr val="accent1">
                     <a:lumMod val="50000"/>
@@ -5046,10 +5029,10 @@
                 <a:ea typeface="Open Sans" pitchFamily="2" charset="0"/>
                 <a:cs typeface="Open Sans" pitchFamily="2" charset="0"/>
               </a:rPr>
-              <a:t>Стек</a:t>
-            </a:r>
-            <a:r>
-              <a:rPr lang="en-US" sz="1600" kern="0" dirty="0">
+              <a:t>(Django, </a:t>
+            </a:r>
+            <a:r>
+              <a:rPr lang="en-US" sz="1600" kern="0" dirty="0" err="1">
                 <a:solidFill>
                   <a:schemeClr val="accent1">
                     <a:lumMod val="50000"/>
@@ -5059,10 +5042,10 @@
                 <a:ea typeface="Open Sans" pitchFamily="2" charset="0"/>
                 <a:cs typeface="Open Sans" pitchFamily="2" charset="0"/>
               </a:rPr>
-              <a:t>:</a:t>
-            </a:r>
-            <a:r>
-              <a:rPr lang="ru-RU" sz="1600" kern="0" dirty="0">
+              <a:t>Fastapi</a:t>
+            </a:r>
+            <a:r>
+              <a:rPr lang="en-US" sz="1600" kern="0" dirty="0">
                 <a:solidFill>
                   <a:schemeClr val="accent1">
                     <a:lumMod val="50000"/>
@@ -5072,10 +5055,10 @@
                 <a:ea typeface="Open Sans" pitchFamily="2" charset="0"/>
                 <a:cs typeface="Open Sans" pitchFamily="2" charset="0"/>
               </a:rPr>
-              <a:t> </a:t>
-            </a:r>
-            <a:r>
-              <a:rPr lang="en-US" sz="1600" kern="0" dirty="0">
+              <a:t>, </a:t>
+            </a:r>
+            <a:r>
+              <a:rPr lang="en-US" sz="1600" kern="0" dirty="0" err="1">
                 <a:solidFill>
                   <a:schemeClr val="accent1">
                     <a:lumMod val="50000"/>
@@ -5085,10 +5068,10 @@
                 <a:ea typeface="Open Sans" pitchFamily="2" charset="0"/>
                 <a:cs typeface="Open Sans" pitchFamily="2" charset="0"/>
               </a:rPr>
-              <a:t>Pt, JS, Django, </a:t>
-            </a:r>
-            <a:r>
-              <a:rPr lang="en-US" sz="1600" kern="0" dirty="0" err="1">
+              <a:t>Postgresql</a:t>
+            </a:r>
+            <a:r>
+              <a:rPr lang="en-US" sz="1600" kern="0" dirty="0">
                 <a:solidFill>
                   <a:schemeClr val="accent1">
                     <a:lumMod val="50000"/>
@@ -5098,10 +5081,10 @@
                 <a:ea typeface="Open Sans" pitchFamily="2" charset="0"/>
                 <a:cs typeface="Open Sans" pitchFamily="2" charset="0"/>
               </a:rPr>
-              <a:t>Fastapi</a:t>
-            </a:r>
-            <a:r>
-              <a:rPr lang="en-US" sz="1600" kern="0" dirty="0">
+              <a:t>, </a:t>
+            </a:r>
+            <a:r>
+              <a:rPr lang="en-US" sz="1600" kern="0" dirty="0" err="1">
                 <a:solidFill>
                   <a:schemeClr val="accent1">
                     <a:lumMod val="50000"/>
@@ -5111,10 +5094,10 @@
                 <a:ea typeface="Open Sans" pitchFamily="2" charset="0"/>
                 <a:cs typeface="Open Sans" pitchFamily="2" charset="0"/>
               </a:rPr>
-              <a:t>, </a:t>
-            </a:r>
-            <a:r>
-              <a:rPr lang="en-US" sz="1600" kern="0" dirty="0" err="1">
+              <a:t>Nosql</a:t>
+            </a:r>
+            <a:r>
+              <a:rPr lang="en-US" sz="1600" kern="0" dirty="0">
                 <a:solidFill>
                   <a:schemeClr val="accent1">
                     <a:lumMod val="50000"/>
@@ -5124,18 +5107,8 @@
                 <a:ea typeface="Open Sans" pitchFamily="2" charset="0"/>
                 <a:cs typeface="Open Sans" pitchFamily="2" charset="0"/>
               </a:rPr>
-              <a:t>Postgresql</a:t>
-            </a:r>
-            <a:endParaRPr lang="en-US" sz="1600" kern="0" dirty="0">
-              <a:solidFill>
-                <a:schemeClr val="accent1">
-                  <a:lumMod val="50000"/>
-                </a:schemeClr>
-              </a:solidFill>
-              <a:latin typeface="Yandex Sans Text Light" panose="02000000000000000000" pitchFamily="2" charset="-52"/>
-              <a:ea typeface="Open Sans" pitchFamily="2" charset="0"/>
-              <a:cs typeface="Open Sans" pitchFamily="2" charset="0"/>
-            </a:endParaRPr>
+              <a:t>)</a:t>
+            </a:r>
           </a:p>
           <a:p>
             <a:pPr marL="609585" indent="-474121" defTabSz="1219170">

--- a/DEV-1-16/for_students/DAY-1/ppt/dev1_00.pptx
+++ b/DEV-1-16/for_students/DAY-1/ppt/dev1_00.pptx
@@ -5,33 +5,34 @@
     <p:sldMasterId id="2147483648" r:id="rId1"/>
   </p:sldMasterIdLst>
   <p:notesMasterIdLst>
-    <p:notesMasterId r:id="rId26"/>
+    <p:notesMasterId r:id="rId27"/>
   </p:notesMasterIdLst>
   <p:sldIdLst>
     <p:sldId id="263" r:id="rId2"/>
     <p:sldId id="502" r:id="rId3"/>
-    <p:sldId id="507" r:id="rId4"/>
-    <p:sldId id="514" r:id="rId5"/>
-    <p:sldId id="506" r:id="rId6"/>
-    <p:sldId id="257" r:id="rId7"/>
-    <p:sldId id="508" r:id="rId8"/>
-    <p:sldId id="510" r:id="rId9"/>
-    <p:sldId id="511" r:id="rId10"/>
-    <p:sldId id="512" r:id="rId11"/>
-    <p:sldId id="513" r:id="rId12"/>
-    <p:sldId id="509" r:id="rId13"/>
-    <p:sldId id="501" r:id="rId14"/>
+    <p:sldId id="501" r:id="rId4"/>
+    <p:sldId id="507" r:id="rId5"/>
+    <p:sldId id="514" r:id="rId6"/>
+    <p:sldId id="506" r:id="rId7"/>
+    <p:sldId id="257" r:id="rId8"/>
+    <p:sldId id="508" r:id="rId9"/>
+    <p:sldId id="510" r:id="rId10"/>
+    <p:sldId id="511" r:id="rId11"/>
+    <p:sldId id="512" r:id="rId12"/>
+    <p:sldId id="513" r:id="rId13"/>
+    <p:sldId id="509" r:id="rId14"/>
     <p:sldId id="256" r:id="rId15"/>
     <p:sldId id="504" r:id="rId16"/>
     <p:sldId id="258" r:id="rId17"/>
-    <p:sldId id="259" r:id="rId18"/>
-    <p:sldId id="260" r:id="rId19"/>
-    <p:sldId id="261" r:id="rId20"/>
-    <p:sldId id="262" r:id="rId21"/>
-    <p:sldId id="505" r:id="rId22"/>
-    <p:sldId id="264" r:id="rId23"/>
-    <p:sldId id="265" r:id="rId24"/>
-    <p:sldId id="266" r:id="rId25"/>
+    <p:sldId id="515" r:id="rId18"/>
+    <p:sldId id="259" r:id="rId19"/>
+    <p:sldId id="260" r:id="rId20"/>
+    <p:sldId id="261" r:id="rId21"/>
+    <p:sldId id="262" r:id="rId22"/>
+    <p:sldId id="505" r:id="rId23"/>
+    <p:sldId id="264" r:id="rId24"/>
+    <p:sldId id="265" r:id="rId25"/>
+    <p:sldId id="266" r:id="rId26"/>
   </p:sldIdLst>
   <p:sldSz cx="9144000" cy="5143500" type="screen16x9"/>
   <p:notesSz cx="7559675" cy="10691813"/>
@@ -3293,6 +3294,66 @@
           <p:cNvPr id="2" name="Рисунок 1">
             <a:extLst>
               <a:ext uri="{FF2B5EF4-FFF2-40B4-BE49-F238E27FC236}">
+                <a16:creationId xmlns:a16="http://schemas.microsoft.com/office/drawing/2014/main" id="{E2649E39-CD40-409B-9500-7EFDD1A1939D}"/>
+              </a:ext>
+            </a:extLst>
+          </p:cNvPr>
+          <p:cNvPicPr>
+            <a:picLocks noChangeAspect="1"/>
+          </p:cNvPicPr>
+          <p:nvPr/>
+        </p:nvPicPr>
+        <p:blipFill>
+          <a:blip r:embed="rId2"/>
+          <a:stretch>
+            <a:fillRect/>
+          </a:stretch>
+        </p:blipFill>
+        <p:spPr>
+          <a:xfrm>
+            <a:off x="1169100" y="0"/>
+            <a:ext cx="6805802" cy="5143500"/>
+          </a:xfrm>
+          <a:prstGeom prst="rect">
+            <a:avLst/>
+          </a:prstGeom>
+        </p:spPr>
+      </p:pic>
+    </p:spTree>
+    <p:extLst>
+      <p:ext uri="{BB962C8B-B14F-4D97-AF65-F5344CB8AC3E}">
+        <p14:creationId xmlns:p14="http://schemas.microsoft.com/office/powerpoint/2010/main" val="1449623869"/>
+      </p:ext>
+    </p:extLst>
+  </p:cSld>
+  <p:clrMapOvr>
+    <a:masterClrMapping/>
+  </p:clrMapOvr>
+</p:sld>
+</file>
+
+<file path=ppt/slides/slide11.xml><?xml version="1.0" encoding="utf-8"?>
+<p:sld xmlns:a="http://schemas.openxmlformats.org/drawingml/2006/main" xmlns:r="http://schemas.openxmlformats.org/officeDocument/2006/relationships" xmlns:p="http://schemas.openxmlformats.org/presentationml/2006/main" showMasterSp="0">
+  <p:cSld>
+    <p:spTree>
+      <p:nvGrpSpPr>
+        <p:cNvPr id="1" name=""/>
+        <p:cNvGrpSpPr/>
+        <p:nvPr/>
+      </p:nvGrpSpPr>
+      <p:grpSpPr>
+        <a:xfrm>
+          <a:off x="0" y="0"/>
+          <a:ext cx="0" cy="0"/>
+          <a:chOff x="0" y="0"/>
+          <a:chExt cx="0" cy="0"/>
+        </a:xfrm>
+      </p:grpSpPr>
+      <p:pic>
+        <p:nvPicPr>
+          <p:cNvPr id="2" name="Рисунок 1">
+            <a:extLst>
+              <a:ext uri="{FF2B5EF4-FFF2-40B4-BE49-F238E27FC236}">
                 <a16:creationId xmlns:a16="http://schemas.microsoft.com/office/drawing/2014/main" id="{070C68FE-B977-4D3C-BF7D-7BFC35CC4C83}"/>
               </a:ext>
             </a:extLst>
@@ -3331,7 +3392,7 @@
 </p:sld>
 </file>
 
-<file path=ppt/slides/slide11.xml><?xml version="1.0" encoding="utf-8"?>
+<file path=ppt/slides/slide12.xml><?xml version="1.0" encoding="utf-8"?>
 <p:sld xmlns:a="http://schemas.openxmlformats.org/drawingml/2006/main" xmlns:r="http://schemas.openxmlformats.org/officeDocument/2006/relationships" xmlns:p="http://schemas.openxmlformats.org/presentationml/2006/main" showMasterSp="0">
   <p:cSld>
     <p:spTree>
@@ -3391,7 +3452,7 @@
 </p:sld>
 </file>
 
-<file path=ppt/slides/slide12.xml><?xml version="1.0" encoding="utf-8"?>
+<file path=ppt/slides/slide13.xml><?xml version="1.0" encoding="utf-8"?>
 <p:sld xmlns:a="http://schemas.openxmlformats.org/drawingml/2006/main" xmlns:r="http://schemas.openxmlformats.org/officeDocument/2006/relationships" xmlns:p="http://schemas.openxmlformats.org/presentationml/2006/main" showMasterSp="0">
   <p:cSld>
     <p:spTree>
@@ -3442,458 +3503,6 @@
     <p:extLst>
       <p:ext uri="{BB962C8B-B14F-4D97-AF65-F5344CB8AC3E}">
         <p14:creationId xmlns:p14="http://schemas.microsoft.com/office/powerpoint/2010/main" val="2674826598"/>
-      </p:ext>
-    </p:extLst>
-  </p:cSld>
-  <p:clrMapOvr>
-    <a:masterClrMapping/>
-  </p:clrMapOvr>
-</p:sld>
-</file>
-
-<file path=ppt/slides/slide13.xml><?xml version="1.0" encoding="utf-8"?>
-<p:sld xmlns:a="http://schemas.openxmlformats.org/drawingml/2006/main" xmlns:r="http://schemas.openxmlformats.org/officeDocument/2006/relationships" xmlns:p="http://schemas.openxmlformats.org/presentationml/2006/main" showMasterSp="0">
-  <p:cSld>
-    <p:spTree>
-      <p:nvGrpSpPr>
-        <p:cNvPr id="1" name=""/>
-        <p:cNvGrpSpPr/>
-        <p:nvPr/>
-      </p:nvGrpSpPr>
-      <p:grpSpPr>
-        <a:xfrm>
-          <a:off x="0" y="0"/>
-          <a:ext cx="0" cy="0"/>
-          <a:chOff x="0" y="0"/>
-          <a:chExt cx="0" cy="0"/>
-        </a:xfrm>
-      </p:grpSpPr>
-      <p:sp>
-        <p:nvSpPr>
-          <p:cNvPr id="2" name="Заголовок 1"/>
-          <p:cNvSpPr>
-            <a:spLocks noGrp="1"/>
-          </p:cNvSpPr>
-          <p:nvPr>
-            <p:ph type="title"/>
-          </p:nvPr>
-        </p:nvSpPr>
-        <p:spPr/>
-        <p:txBody>
-          <a:bodyPr>
-            <a:normAutofit fontScale="90000"/>
-          </a:bodyPr>
-          <a:lstStyle/>
-          <a:p>
-            <a:r>
-              <a:rPr lang="ru-RU" dirty="0">
-                <a:latin typeface="Segoe UI Light" panose="020B0502040204020203" pitchFamily="34" charset="0"/>
-                <a:cs typeface="Segoe UI Light" panose="020B0502040204020203" pitchFamily="34" charset="0"/>
-              </a:rPr>
-              <a:t>Организационные </a:t>
-            </a:r>
-            <a:br>
-              <a:rPr lang="en-US" dirty="0">
-                <a:latin typeface="Segoe UI Light" panose="020B0502040204020203" pitchFamily="34" charset="0"/>
-                <a:cs typeface="Segoe UI Light" panose="020B0502040204020203" pitchFamily="34" charset="0"/>
-              </a:rPr>
-            </a:br>
-            <a:r>
-              <a:rPr lang="ru-RU" dirty="0">
-                <a:latin typeface="Segoe UI Light" panose="020B0502040204020203" pitchFamily="34" charset="0"/>
-                <a:cs typeface="Segoe UI Light" panose="020B0502040204020203" pitchFamily="34" charset="0"/>
-              </a:rPr>
-              <a:t>моменты</a:t>
-            </a:r>
-          </a:p>
-        </p:txBody>
-      </p:sp>
-      <p:sp>
-        <p:nvSpPr>
-          <p:cNvPr id="3" name="Объект 2"/>
-          <p:cNvSpPr>
-            <a:spLocks noGrp="1"/>
-          </p:cNvSpPr>
-          <p:nvPr>
-            <p:ph type="subTitle"/>
-          </p:nvPr>
-        </p:nvSpPr>
-        <p:spPr>
-          <a:xfrm>
-            <a:off x="628560" y="1400830"/>
-            <a:ext cx="7886520" cy="3263040"/>
-          </a:xfrm>
-        </p:spPr>
-        <p:txBody>
-          <a:bodyPr numCol="2">
-            <a:noAutofit/>
-          </a:bodyPr>
-          <a:lstStyle/>
-          <a:p>
-            <a:pPr marL="0" indent="0">
-              <a:buNone/>
-            </a:pPr>
-            <a:r>
-              <a:rPr lang="ru-RU" sz="2000" i="1" u="sng" dirty="0">
-                <a:latin typeface="Segoe UI Light" panose="020B0502040204020203" pitchFamily="34" charset="0"/>
-                <a:cs typeface="Segoe UI Light" panose="020B0502040204020203" pitchFamily="34" charset="0"/>
-              </a:rPr>
-              <a:t>Правила совместной работы:</a:t>
-            </a:r>
-            <a:endParaRPr lang="ru-RU" sz="2000" dirty="0">
-              <a:solidFill>
-                <a:srgbClr val="0070C0"/>
-              </a:solidFill>
-              <a:latin typeface="Segoe UI Light" panose="020B0502040204020203" pitchFamily="34" charset="0"/>
-              <a:cs typeface="Segoe UI Light" panose="020B0502040204020203" pitchFamily="34" charset="0"/>
-            </a:endParaRPr>
-          </a:p>
-          <a:p>
-            <a:pPr marL="0" indent="0">
-              <a:buNone/>
-            </a:pPr>
-            <a:r>
-              <a:rPr lang="ru-RU" sz="2000" dirty="0">
-                <a:solidFill>
-                  <a:srgbClr val="86AA00"/>
-                </a:solidFill>
-                <a:latin typeface="Segoe UI Light" panose="020B0502040204020203" pitchFamily="34" charset="0"/>
-                <a:cs typeface="Segoe UI Light" panose="020B0502040204020203" pitchFamily="34" charset="0"/>
-              </a:rPr>
-              <a:t> </a:t>
-            </a:r>
-            <a:r>
-              <a:rPr lang="ru-RU" sz="2000" dirty="0">
-                <a:solidFill>
-                  <a:srgbClr val="2D2D2A"/>
-                </a:solidFill>
-                <a:latin typeface="Segoe UI Light" panose="020B0502040204020203" pitchFamily="34" charset="0"/>
-                <a:cs typeface="Segoe UI Light" panose="020B0502040204020203" pitchFamily="34" charset="0"/>
-              </a:rPr>
-              <a:t>Вопросы преподавателю</a:t>
-            </a:r>
-            <a:br>
-              <a:rPr lang="ru-RU" sz="2000" dirty="0">
-                <a:solidFill>
-                  <a:srgbClr val="2D2D2A"/>
-                </a:solidFill>
-                <a:latin typeface="Segoe UI Light" panose="020B0502040204020203" pitchFamily="34" charset="0"/>
-                <a:cs typeface="Segoe UI Light" panose="020B0502040204020203" pitchFamily="34" charset="0"/>
-              </a:rPr>
-            </a:br>
-            <a:r>
-              <a:rPr lang="ru-RU" sz="2000" dirty="0">
-                <a:solidFill>
-                  <a:srgbClr val="86AA00"/>
-                </a:solidFill>
-                <a:latin typeface="Segoe UI Light" panose="020B0502040204020203" pitchFamily="34" charset="0"/>
-                <a:cs typeface="Segoe UI Light" panose="020B0502040204020203" pitchFamily="34" charset="0"/>
-              </a:rPr>
-              <a:t> </a:t>
-            </a:r>
-            <a:r>
-              <a:rPr lang="ru-RU" sz="2000" dirty="0">
-                <a:solidFill>
-                  <a:srgbClr val="2D2D2A"/>
-                </a:solidFill>
-                <a:latin typeface="Segoe UI Light" panose="020B0502040204020203" pitchFamily="34" charset="0"/>
-                <a:cs typeface="Segoe UI Light" panose="020B0502040204020203" pitchFamily="34" charset="0"/>
-              </a:rPr>
-              <a:t>Правило поднятой руки</a:t>
-            </a:r>
-            <a:br>
-              <a:rPr lang="ru-RU" sz="2000" dirty="0">
-                <a:solidFill>
-                  <a:srgbClr val="2D2D2A"/>
-                </a:solidFill>
-                <a:latin typeface="Segoe UI Light" panose="020B0502040204020203" pitchFamily="34" charset="0"/>
-                <a:cs typeface="Segoe UI Light" panose="020B0502040204020203" pitchFamily="34" charset="0"/>
-              </a:rPr>
-            </a:br>
-            <a:r>
-              <a:rPr lang="ru-RU" sz="2000" dirty="0">
-                <a:solidFill>
-                  <a:srgbClr val="86AA00"/>
-                </a:solidFill>
-                <a:latin typeface="Segoe UI Light" panose="020B0502040204020203" pitchFamily="34" charset="0"/>
-                <a:cs typeface="Segoe UI Light" panose="020B0502040204020203" pitchFamily="34" charset="0"/>
-              </a:rPr>
-              <a:t> </a:t>
-            </a:r>
-            <a:r>
-              <a:rPr lang="ru-RU" sz="2000" dirty="0">
-                <a:solidFill>
-                  <a:srgbClr val="2D2D2A"/>
-                </a:solidFill>
-                <a:latin typeface="Segoe UI Light" panose="020B0502040204020203" pitchFamily="34" charset="0"/>
-                <a:cs typeface="Segoe UI Light" panose="020B0502040204020203" pitchFamily="34" charset="0"/>
-              </a:rPr>
-              <a:t>Уважение к мнению других участников</a:t>
-            </a:r>
-            <a:br>
-              <a:rPr lang="ru-RU" sz="2000" dirty="0">
-                <a:solidFill>
-                  <a:srgbClr val="2D2D2A"/>
-                </a:solidFill>
-                <a:latin typeface="Segoe UI Light" panose="020B0502040204020203" pitchFamily="34" charset="0"/>
-                <a:cs typeface="Segoe UI Light" panose="020B0502040204020203" pitchFamily="34" charset="0"/>
-              </a:rPr>
-            </a:br>
-            <a:endParaRPr lang="ru-RU" sz="2000" dirty="0">
-              <a:solidFill>
-                <a:srgbClr val="2D2D2A"/>
-              </a:solidFill>
-              <a:latin typeface="Segoe UI Light" panose="020B0502040204020203" pitchFamily="34" charset="0"/>
-              <a:cs typeface="Segoe UI Light" panose="020B0502040204020203" pitchFamily="34" charset="0"/>
-            </a:endParaRPr>
-          </a:p>
-          <a:p>
-            <a:pPr marL="0" indent="0">
-              <a:buNone/>
-            </a:pPr>
-            <a:r>
-              <a:rPr lang="ru-RU" sz="1400" i="1" u="sng" dirty="0">
-                <a:latin typeface="Segoe UI Light" panose="020B0502040204020203" pitchFamily="34" charset="0"/>
-                <a:cs typeface="Segoe UI Light" panose="020B0502040204020203" pitchFamily="34" charset="0"/>
-              </a:rPr>
-              <a:t>Давайте знакомиться</a:t>
-            </a:r>
-          </a:p>
-          <a:p>
-            <a:pPr>
-              <a:buFont typeface="Wingdings" panose="05000000000000000000" pitchFamily="2" charset="2"/>
-              <a:buChar char="q"/>
-            </a:pPr>
-            <a:r>
-              <a:rPr lang="ru-RU" sz="2000" dirty="0">
-                <a:solidFill>
-                  <a:srgbClr val="2D2D2A"/>
-                </a:solidFill>
-                <a:latin typeface="Segoe UI Light" panose="020B0502040204020203" pitchFamily="34" charset="0"/>
-                <a:cs typeface="Segoe UI Light" panose="020B0502040204020203" pitchFamily="34" charset="0"/>
-              </a:rPr>
-              <a:t> Имя</a:t>
-            </a:r>
-          </a:p>
-          <a:p>
-            <a:pPr>
-              <a:buFont typeface="Wingdings" panose="05000000000000000000" pitchFamily="2" charset="2"/>
-              <a:buChar char="q"/>
-            </a:pPr>
-            <a:r>
-              <a:rPr lang="ru-RU" sz="2000" dirty="0">
-                <a:solidFill>
-                  <a:srgbClr val="2D2D2A"/>
-                </a:solidFill>
-                <a:latin typeface="Segoe UI Light" panose="020B0502040204020203" pitchFamily="34" charset="0"/>
-                <a:cs typeface="Segoe UI Light" panose="020B0502040204020203" pitchFamily="34" charset="0"/>
-              </a:rPr>
-              <a:t> Компания</a:t>
-            </a:r>
-          </a:p>
-          <a:p>
-            <a:pPr>
-              <a:buFont typeface="Wingdings" panose="05000000000000000000" pitchFamily="2" charset="2"/>
-              <a:buChar char="q"/>
-            </a:pPr>
-            <a:r>
-              <a:rPr lang="ru-RU" sz="2000" dirty="0">
-                <a:solidFill>
-                  <a:srgbClr val="2D2D2A"/>
-                </a:solidFill>
-                <a:latin typeface="Segoe UI Light" panose="020B0502040204020203" pitchFamily="34" charset="0"/>
-                <a:cs typeface="Segoe UI Light" panose="020B0502040204020203" pitchFamily="34" charset="0"/>
-              </a:rPr>
-              <a:t> Должность, роль</a:t>
-            </a:r>
-          </a:p>
-          <a:p>
-            <a:pPr>
-              <a:buFont typeface="Wingdings" panose="05000000000000000000" pitchFamily="2" charset="2"/>
-              <a:buChar char="q"/>
-            </a:pPr>
-            <a:r>
-              <a:rPr lang="ru-RU" sz="2000" dirty="0">
-                <a:solidFill>
-                  <a:srgbClr val="2D2D2A"/>
-                </a:solidFill>
-                <a:latin typeface="Segoe UI Light" panose="020B0502040204020203" pitchFamily="34" charset="0"/>
-                <a:cs typeface="Segoe UI Light" panose="020B0502040204020203" pitchFamily="34" charset="0"/>
-              </a:rPr>
-              <a:t> Ожидания от курса</a:t>
-            </a:r>
-            <a:br>
-              <a:rPr lang="ru-RU" sz="2000" dirty="0">
-                <a:solidFill>
-                  <a:srgbClr val="2D2D2A"/>
-                </a:solidFill>
-                <a:latin typeface="Segoe UI Light" panose="020B0502040204020203" pitchFamily="34" charset="0"/>
-                <a:cs typeface="Segoe UI Light" panose="020B0502040204020203" pitchFamily="34" charset="0"/>
-              </a:rPr>
-            </a:br>
-            <a:endParaRPr lang="ru-RU" sz="2000" dirty="0">
-              <a:solidFill>
-                <a:srgbClr val="2D2D2A"/>
-              </a:solidFill>
-              <a:latin typeface="Segoe UI Light" panose="020B0502040204020203" pitchFamily="34" charset="0"/>
-              <a:cs typeface="Segoe UI Light" panose="020B0502040204020203" pitchFamily="34" charset="0"/>
-            </a:endParaRPr>
-          </a:p>
-          <a:p>
-            <a:pPr marL="0" indent="0">
-              <a:buNone/>
-            </a:pPr>
-            <a:endParaRPr lang="ru-RU" sz="2000" dirty="0">
-              <a:solidFill>
-                <a:srgbClr val="2D2D2A"/>
-              </a:solidFill>
-              <a:latin typeface="Segoe UI Light" panose="020B0502040204020203" pitchFamily="34" charset="0"/>
-              <a:cs typeface="Segoe UI Light" panose="020B0502040204020203" pitchFamily="34" charset="0"/>
-            </a:endParaRPr>
-          </a:p>
-          <a:p>
-            <a:pPr marL="0" indent="0">
-              <a:buNone/>
-            </a:pPr>
-            <a:endParaRPr lang="ru-RU" sz="2000" dirty="0">
-              <a:solidFill>
-                <a:srgbClr val="2D2D2A"/>
-              </a:solidFill>
-              <a:latin typeface="Segoe UI Light" panose="020B0502040204020203" pitchFamily="34" charset="0"/>
-              <a:cs typeface="Segoe UI Light" panose="020B0502040204020203" pitchFamily="34" charset="0"/>
-            </a:endParaRPr>
-          </a:p>
-          <a:p>
-            <a:pPr marL="0" indent="0">
-              <a:buNone/>
-            </a:pPr>
-            <a:endParaRPr lang="ru-RU" sz="2000" dirty="0">
-              <a:solidFill>
-                <a:srgbClr val="2D2D2A"/>
-              </a:solidFill>
-              <a:latin typeface="Segoe UI Light" panose="020B0502040204020203" pitchFamily="34" charset="0"/>
-              <a:cs typeface="Segoe UI Light" panose="020B0502040204020203" pitchFamily="34" charset="0"/>
-            </a:endParaRPr>
-          </a:p>
-          <a:p>
-            <a:pPr marL="0" indent="0">
-              <a:buNone/>
-            </a:pPr>
-            <a:endParaRPr lang="ru-RU" sz="2000" dirty="0">
-              <a:solidFill>
-                <a:srgbClr val="2D2D2A"/>
-              </a:solidFill>
-              <a:latin typeface="Segoe UI Light" panose="020B0502040204020203" pitchFamily="34" charset="0"/>
-              <a:cs typeface="Segoe UI Light" panose="020B0502040204020203" pitchFamily="34" charset="0"/>
-            </a:endParaRPr>
-          </a:p>
-          <a:p>
-            <a:pPr marL="136922" indent="0">
-              <a:buNone/>
-            </a:pPr>
-            <a:endParaRPr lang="ru-RU" sz="2000" dirty="0">
-              <a:solidFill>
-                <a:srgbClr val="FF0000"/>
-              </a:solidFill>
-              <a:latin typeface="Segoe UI Light" panose="020B0502040204020203" pitchFamily="34" charset="0"/>
-              <a:cs typeface="Segoe UI Light" panose="020B0502040204020203" pitchFamily="34" charset="0"/>
-            </a:endParaRPr>
-          </a:p>
-          <a:p>
-            <a:pPr marL="136922" indent="0">
-              <a:buNone/>
-            </a:pPr>
-            <a:r>
-              <a:rPr lang="ru-RU" sz="2000" dirty="0">
-                <a:solidFill>
-                  <a:srgbClr val="FF0000"/>
-                </a:solidFill>
-                <a:latin typeface="Segoe UI Light" panose="020B0502040204020203" pitchFamily="34" charset="0"/>
-                <a:cs typeface="Segoe UI Light" panose="020B0502040204020203" pitchFamily="34" charset="0"/>
-              </a:rPr>
-              <a:t> </a:t>
-            </a:r>
-            <a:r>
-              <a:rPr lang="ru-RU" sz="2000" dirty="0">
-                <a:latin typeface="Segoe UI Light" panose="020B0502040204020203" pitchFamily="34" charset="0"/>
-                <a:cs typeface="Segoe UI Light" panose="020B0502040204020203" pitchFamily="34" charset="0"/>
-              </a:rPr>
-              <a:t>Мобильные телефоны</a:t>
-            </a:r>
-            <a:br>
-              <a:rPr lang="ru-RU" sz="2000" dirty="0">
-                <a:solidFill>
-                  <a:srgbClr val="2D2D2A"/>
-                </a:solidFill>
-                <a:latin typeface="Segoe UI Light" panose="020B0502040204020203" pitchFamily="34" charset="0"/>
-                <a:cs typeface="Segoe UI Light" panose="020B0502040204020203" pitchFamily="34" charset="0"/>
-              </a:rPr>
-            </a:br>
-            <a:r>
-              <a:rPr lang="ru-RU" sz="2000" dirty="0">
-                <a:solidFill>
-                  <a:srgbClr val="FF0000"/>
-                </a:solidFill>
-                <a:latin typeface="Segoe UI Light" panose="020B0502040204020203" pitchFamily="34" charset="0"/>
-                <a:cs typeface="Segoe UI Light" panose="020B0502040204020203" pitchFamily="34" charset="0"/>
-              </a:rPr>
-              <a:t> </a:t>
-            </a:r>
-            <a:r>
-              <a:rPr lang="ru-RU" sz="2000" dirty="0">
-                <a:solidFill>
-                  <a:srgbClr val="2D2D2A"/>
-                </a:solidFill>
-                <a:latin typeface="Segoe UI Light" panose="020B0502040204020203" pitchFamily="34" charset="0"/>
-                <a:cs typeface="Segoe UI Light" panose="020B0502040204020203" pitchFamily="34" charset="0"/>
-              </a:rPr>
-              <a:t>Опоздания</a:t>
-            </a:r>
-            <a:br>
-              <a:rPr lang="ru-RU" sz="2000" dirty="0">
-                <a:solidFill>
-                  <a:srgbClr val="2D2D2A"/>
-                </a:solidFill>
-                <a:latin typeface="Segoe UI Light" panose="020B0502040204020203" pitchFamily="34" charset="0"/>
-                <a:cs typeface="Segoe UI Light" panose="020B0502040204020203" pitchFamily="34" charset="0"/>
-              </a:rPr>
-            </a:br>
-            <a:r>
-              <a:rPr lang="ru-RU" sz="2000" dirty="0">
-                <a:solidFill>
-                  <a:srgbClr val="FF0000"/>
-                </a:solidFill>
-                <a:latin typeface="Segoe UI Light" panose="020B0502040204020203" pitchFamily="34" charset="0"/>
-                <a:cs typeface="Segoe UI Light" panose="020B0502040204020203" pitchFamily="34" charset="0"/>
-              </a:rPr>
-              <a:t> </a:t>
-            </a:r>
-            <a:r>
-              <a:rPr lang="ru-RU" sz="2000" dirty="0">
-                <a:solidFill>
-                  <a:srgbClr val="2D2D2A"/>
-                </a:solidFill>
-                <a:latin typeface="Segoe UI Light" panose="020B0502040204020203" pitchFamily="34" charset="0"/>
-                <a:cs typeface="Segoe UI Light" panose="020B0502040204020203" pitchFamily="34" charset="0"/>
-              </a:rPr>
-              <a:t>Приватные обсуждения</a:t>
-            </a:r>
-          </a:p>
-          <a:p>
-            <a:pPr marL="136922" indent="0">
-              <a:buNone/>
-            </a:pPr>
-            <a:endParaRPr lang="ru-RU" sz="2000" dirty="0">
-              <a:latin typeface="Segoe UI Light" panose="020B0502040204020203" pitchFamily="34" charset="0"/>
-              <a:cs typeface="Segoe UI Light" panose="020B0502040204020203" pitchFamily="34" charset="0"/>
-            </a:endParaRPr>
-          </a:p>
-        </p:txBody>
-      </p:sp>
-    </p:spTree>
-    <p:extLst>
-      <p:ext uri="{BB962C8B-B14F-4D97-AF65-F5344CB8AC3E}">
-        <p14:creationId xmlns:p14="http://schemas.microsoft.com/office/powerpoint/2010/main" val="2783297049"/>
       </p:ext>
     </p:extLst>
   </p:cSld>
@@ -4128,6 +3737,564 @@
 </file>
 
 <file path=ppt/slides/slide17.xml><?xml version="1.0" encoding="utf-8"?>
+<p:sld xmlns:a="http://schemas.openxmlformats.org/drawingml/2006/main" xmlns:r="http://schemas.openxmlformats.org/officeDocument/2006/relationships" xmlns:p="http://schemas.openxmlformats.org/presentationml/2006/main">
+  <p:cSld>
+    <p:spTree>
+      <p:nvGrpSpPr>
+        <p:cNvPr id="1" name=""/>
+        <p:cNvGrpSpPr/>
+        <p:nvPr/>
+      </p:nvGrpSpPr>
+      <p:grpSpPr>
+        <a:xfrm>
+          <a:off x="0" y="0"/>
+          <a:ext cx="0" cy="0"/>
+          <a:chOff x="0" y="0"/>
+          <a:chExt cx="0" cy="0"/>
+        </a:xfrm>
+      </p:grpSpPr>
+      <p:sp>
+        <p:nvSpPr>
+          <p:cNvPr id="6" name="Прямоугольник 5">
+            <a:extLst>
+              <a:ext uri="{FF2B5EF4-FFF2-40B4-BE49-F238E27FC236}">
+                <a16:creationId xmlns:a16="http://schemas.microsoft.com/office/drawing/2014/main" id="{27A1E340-B8FF-4664-8F88-B119CEF178BD}"/>
+              </a:ext>
+            </a:extLst>
+          </p:cNvPr>
+          <p:cNvSpPr/>
+          <p:nvPr/>
+        </p:nvSpPr>
+        <p:spPr>
+          <a:xfrm>
+            <a:off x="87630" y="840968"/>
+            <a:ext cx="3939540" cy="3754874"/>
+          </a:xfrm>
+          <a:prstGeom prst="rect">
+            <a:avLst/>
+          </a:prstGeom>
+        </p:spPr>
+        <p:txBody>
+          <a:bodyPr wrap="square">
+            <a:spAutoFit/>
+          </a:bodyPr>
+          <a:lstStyle/>
+          <a:p>
+            <a:pPr marL="266700" indent="-266700">
+              <a:spcAft>
+                <a:spcPts val="600"/>
+              </a:spcAft>
+            </a:pPr>
+            <a:r>
+              <a:rPr lang="ru-RU" sz="1600" dirty="0">
+                <a:solidFill>
+                  <a:srgbClr val="000099"/>
+                </a:solidFill>
+              </a:rPr>
+              <a:t>🚀 </a:t>
+            </a:r>
+            <a:r>
+              <a:rPr lang="ru-RU" sz="1600" cap="all" dirty="0">
+                <a:solidFill>
+                  <a:srgbClr val="000099"/>
+                </a:solidFill>
+              </a:rPr>
+              <a:t>Производительность</a:t>
+            </a:r>
+          </a:p>
+          <a:p>
+            <a:pPr marL="266700" indent="-266700">
+              <a:spcAft>
+                <a:spcPts val="600"/>
+              </a:spcAft>
+            </a:pPr>
+            <a:endParaRPr lang="ru-RU" sz="1600" dirty="0">
+              <a:solidFill>
+                <a:srgbClr val="000099"/>
+              </a:solidFill>
+            </a:endParaRPr>
+          </a:p>
+          <a:p>
+            <a:pPr marL="266700" indent="-266700">
+              <a:spcAft>
+                <a:spcPts val="600"/>
+              </a:spcAft>
+              <a:buFont typeface="Wingdings" panose="05000000000000000000" pitchFamily="2" charset="2"/>
+              <a:buChar char="q"/>
+            </a:pPr>
+            <a:r>
+              <a:rPr lang="ru-RU" sz="1600" dirty="0"/>
+              <a:t>Оптимизация JOIN операций с большими таблицами</a:t>
+            </a:r>
+          </a:p>
+          <a:p>
+            <a:pPr marL="266700" indent="-266700">
+              <a:spcAft>
+                <a:spcPts val="600"/>
+              </a:spcAft>
+              <a:buFont typeface="Wingdings" panose="05000000000000000000" pitchFamily="2" charset="2"/>
+              <a:buChar char="q"/>
+            </a:pPr>
+            <a:r>
+              <a:rPr lang="ru-RU" sz="1600" dirty="0"/>
+              <a:t>Улучшенная статистика для более точных планов выполнения</a:t>
+            </a:r>
+          </a:p>
+          <a:p>
+            <a:pPr marL="266700" indent="-266700">
+              <a:spcAft>
+                <a:spcPts val="600"/>
+              </a:spcAft>
+              <a:buFont typeface="Wingdings" panose="05000000000000000000" pitchFamily="2" charset="2"/>
+              <a:buChar char="q"/>
+            </a:pPr>
+            <a:r>
+              <a:rPr lang="ru-RU" sz="1600" dirty="0"/>
+              <a:t>Новые алгоритмы сортировки для больших наборов данных</a:t>
+            </a:r>
+          </a:p>
+          <a:p>
+            <a:pPr marL="266700" indent="-266700">
+              <a:spcAft>
+                <a:spcPts val="600"/>
+              </a:spcAft>
+              <a:buFont typeface="Wingdings" panose="05000000000000000000" pitchFamily="2" charset="2"/>
+              <a:buChar char="q"/>
+            </a:pPr>
+            <a:r>
+              <a:rPr lang="ru-RU" sz="1600" dirty="0"/>
+              <a:t>Расширенная поддержка параллельных операций для VACUUM и CREATE INDEX</a:t>
+            </a:r>
+          </a:p>
+          <a:p>
+            <a:pPr marL="266700" indent="-266700">
+              <a:spcAft>
+                <a:spcPts val="600"/>
+              </a:spcAft>
+              <a:buFont typeface="Wingdings" panose="05000000000000000000" pitchFamily="2" charset="2"/>
+              <a:buChar char="q"/>
+            </a:pPr>
+            <a:r>
+              <a:rPr lang="ru-RU" sz="1600" dirty="0"/>
+              <a:t>Улучшенное распределение нагрузки между </a:t>
+            </a:r>
+            <a:r>
+              <a:rPr lang="ru-RU" sz="1600" dirty="0" err="1"/>
+              <a:t>воркерами</a:t>
+            </a:r>
+            <a:endParaRPr lang="ru-RU" sz="1600" dirty="0"/>
+          </a:p>
+        </p:txBody>
+      </p:sp>
+      <p:sp>
+        <p:nvSpPr>
+          <p:cNvPr id="7" name="Прямоугольник 6">
+            <a:extLst>
+              <a:ext uri="{FF2B5EF4-FFF2-40B4-BE49-F238E27FC236}">
+                <a16:creationId xmlns:a16="http://schemas.microsoft.com/office/drawing/2014/main" id="{AB79BB65-E41B-40F6-93D4-729578AF8C14}"/>
+              </a:ext>
+            </a:extLst>
+          </p:cNvPr>
+          <p:cNvSpPr/>
+          <p:nvPr/>
+        </p:nvSpPr>
+        <p:spPr>
+          <a:xfrm>
+            <a:off x="617220" y="122605"/>
+            <a:ext cx="8122920" cy="400110"/>
+          </a:xfrm>
+          <a:prstGeom prst="rect">
+            <a:avLst/>
+          </a:prstGeom>
+        </p:spPr>
+        <p:txBody>
+          <a:bodyPr wrap="square">
+            <a:spAutoFit/>
+          </a:bodyPr>
+          <a:lstStyle/>
+          <a:p>
+            <a:r>
+              <a:rPr lang="ru-RU" sz="2000" dirty="0">
+                <a:latin typeface="Consolas" panose="020B0609020204030204" pitchFamily="49" charset="0"/>
+              </a:rPr>
+              <a:t>Основные новшества </a:t>
+            </a:r>
+            <a:r>
+              <a:rPr lang="ru-RU" sz="2000" dirty="0" err="1">
+                <a:latin typeface="Consolas" panose="020B0609020204030204" pitchFamily="49" charset="0"/>
+              </a:rPr>
+              <a:t>PostgreSQL</a:t>
+            </a:r>
+            <a:r>
+              <a:rPr lang="ru-RU" sz="2000" dirty="0">
+                <a:latin typeface="Consolas" panose="020B0609020204030204" pitchFamily="49" charset="0"/>
+              </a:rPr>
+              <a:t> 18 по сравнению с 16</a:t>
+            </a:r>
+          </a:p>
+        </p:txBody>
+      </p:sp>
+      <p:sp>
+        <p:nvSpPr>
+          <p:cNvPr id="8" name="Прямоугольник 7">
+            <a:extLst>
+              <a:ext uri="{FF2B5EF4-FFF2-40B4-BE49-F238E27FC236}">
+                <a16:creationId xmlns:a16="http://schemas.microsoft.com/office/drawing/2014/main" id="{52CB843C-F380-44E5-B914-3B80380D79A5}"/>
+              </a:ext>
+            </a:extLst>
+          </p:cNvPr>
+          <p:cNvSpPr/>
+          <p:nvPr/>
+        </p:nvSpPr>
+        <p:spPr>
+          <a:xfrm>
+            <a:off x="4179570" y="685413"/>
+            <a:ext cx="4876800" cy="2877711"/>
+          </a:xfrm>
+          <a:prstGeom prst="rect">
+            <a:avLst/>
+          </a:prstGeom>
+        </p:spPr>
+        <p:txBody>
+          <a:bodyPr wrap="square">
+            <a:spAutoFit/>
+          </a:bodyPr>
+          <a:lstStyle/>
+          <a:p>
+            <a:r>
+              <a:rPr lang="ru-RU" sz="1600" cap="all" dirty="0">
+                <a:solidFill>
+                  <a:srgbClr val="C00000"/>
+                </a:solidFill>
+              </a:rPr>
+              <a:t>🔧 Новые функции и возможности</a:t>
+            </a:r>
+          </a:p>
+          <a:p>
+            <a:endParaRPr lang="ru-RU" sz="1600" cap="all" dirty="0">
+              <a:solidFill>
+                <a:srgbClr val="C00000"/>
+              </a:solidFill>
+            </a:endParaRPr>
+          </a:p>
+          <a:p>
+            <a:pPr marL="285750" indent="-285750">
+              <a:buFont typeface="Wingdings" panose="05000000000000000000" pitchFamily="2" charset="2"/>
+              <a:buChar char="q"/>
+            </a:pPr>
+            <a:r>
+              <a:rPr lang="ru-RU" sz="1600" dirty="0"/>
+              <a:t>Полная поддержка стандарта SQL/JSON</a:t>
+            </a:r>
+          </a:p>
+          <a:p>
+            <a:pPr marL="285750" indent="-285750">
+              <a:buFont typeface="Wingdings" panose="05000000000000000000" pitchFamily="2" charset="2"/>
+              <a:buChar char="q"/>
+            </a:pPr>
+            <a:r>
+              <a:rPr lang="ru-RU" sz="1600" dirty="0"/>
+              <a:t>Новые функции для работы с JSON: JSON_ARRAY(), JSON_OBJECT()</a:t>
+            </a:r>
+          </a:p>
+          <a:p>
+            <a:pPr marL="285750" indent="-285750">
+              <a:buFont typeface="Wingdings" panose="05000000000000000000" pitchFamily="2" charset="2"/>
+              <a:buChar char="q"/>
+            </a:pPr>
+            <a:r>
+              <a:rPr lang="ru-RU" sz="1600" dirty="0"/>
+              <a:t>Улучшенная производительность JSON операций</a:t>
+            </a:r>
+          </a:p>
+          <a:p>
+            <a:pPr marL="285750" indent="-285750">
+              <a:spcAft>
+                <a:spcPts val="600"/>
+              </a:spcAft>
+              <a:buFont typeface="Wingdings" panose="05000000000000000000" pitchFamily="2" charset="2"/>
+              <a:buChar char="q"/>
+            </a:pPr>
+            <a:r>
+              <a:rPr lang="ru-RU" sz="1600" dirty="0"/>
+              <a:t>Новые операторы для работы с массивами</a:t>
+            </a:r>
+          </a:p>
+          <a:p>
+            <a:pPr marL="285750" indent="-285750">
+              <a:buFont typeface="Wingdings" panose="05000000000000000000" pitchFamily="2" charset="2"/>
+              <a:buChar char="q"/>
+            </a:pPr>
+            <a:r>
+              <a:rPr lang="ru-RU" sz="1600" dirty="0"/>
+              <a:t>Улучшенная поддержка временных зон</a:t>
+            </a:r>
+          </a:p>
+          <a:p>
+            <a:pPr marL="285750" indent="-285750">
+              <a:buFont typeface="Wingdings" panose="05000000000000000000" pitchFamily="2" charset="2"/>
+              <a:buChar char="q"/>
+            </a:pPr>
+            <a:r>
+              <a:rPr lang="ru-RU" sz="1600" dirty="0"/>
+              <a:t>Расширенные возможности для пользовательских типов</a:t>
+            </a:r>
+          </a:p>
+        </p:txBody>
+      </p:sp>
+      <p:sp>
+        <p:nvSpPr>
+          <p:cNvPr id="9" name="Прямоугольник 8">
+            <a:extLst>
+              <a:ext uri="{FF2B5EF4-FFF2-40B4-BE49-F238E27FC236}">
+                <a16:creationId xmlns:a16="http://schemas.microsoft.com/office/drawing/2014/main" id="{F0C42A3C-2EC9-4A8B-B927-7A3F74DF1955}"/>
+              </a:ext>
+            </a:extLst>
+          </p:cNvPr>
+          <p:cNvSpPr/>
+          <p:nvPr/>
+        </p:nvSpPr>
+        <p:spPr>
+          <a:xfrm>
+            <a:off x="4168140" y="3912394"/>
+            <a:ext cx="4572000" cy="1231106"/>
+          </a:xfrm>
+          <a:prstGeom prst="rect">
+            <a:avLst/>
+          </a:prstGeom>
+        </p:spPr>
+        <p:txBody>
+          <a:bodyPr>
+            <a:spAutoFit/>
+          </a:bodyPr>
+          <a:lstStyle/>
+          <a:p>
+            <a:pPr>
+              <a:spcAft>
+                <a:spcPts val="600"/>
+              </a:spcAft>
+            </a:pPr>
+            <a:r>
+              <a:rPr lang="ru-RU" sz="1600" cap="all" dirty="0">
+                <a:solidFill>
+                  <a:srgbClr val="003300"/>
+                </a:solidFill>
+              </a:rPr>
+              <a:t>🛡️ Безопасность</a:t>
+            </a:r>
+          </a:p>
+          <a:p>
+            <a:pPr marL="285750" indent="-285750">
+              <a:spcAft>
+                <a:spcPts val="600"/>
+              </a:spcAft>
+              <a:buFont typeface="Wingdings" panose="05000000000000000000" pitchFamily="2" charset="2"/>
+              <a:buChar char="q"/>
+            </a:pPr>
+            <a:r>
+              <a:rPr lang="ru-RU" sz="1600" dirty="0"/>
+              <a:t>Улучшенная поддержка SCRAM-SHA-256</a:t>
+            </a:r>
+          </a:p>
+          <a:p>
+            <a:pPr marL="285750" indent="-285750">
+              <a:spcAft>
+                <a:spcPts val="600"/>
+              </a:spcAft>
+              <a:buFont typeface="Wingdings" panose="05000000000000000000" pitchFamily="2" charset="2"/>
+              <a:buChar char="q"/>
+            </a:pPr>
+            <a:r>
+              <a:rPr lang="ru-RU" sz="1600" dirty="0"/>
+              <a:t>Новые опции для настройки SSL/TLS соединений</a:t>
+            </a:r>
+          </a:p>
+        </p:txBody>
+      </p:sp>
+    </p:spTree>
+    <p:extLst>
+      <p:ext uri="{BB962C8B-B14F-4D97-AF65-F5344CB8AC3E}">
+        <p14:creationId xmlns:p14="http://schemas.microsoft.com/office/powerpoint/2010/main" val="2118452709"/>
+      </p:ext>
+    </p:extLst>
+  </p:cSld>
+  <p:clrMapOvr>
+    <a:masterClrMapping/>
+  </p:clrMapOvr>
+  <p:timing>
+    <p:tnLst>
+      <p:par>
+        <p:cTn id="1" dur="indefinite" restart="never" nodeType="tmRoot">
+          <p:childTnLst>
+            <p:seq concurrent="1" nextAc="seek">
+              <p:cTn id="2" dur="indefinite" nodeType="mainSeq">
+                <p:childTnLst>
+                  <p:par>
+                    <p:cTn id="3" fill="hold">
+                      <p:stCondLst>
+                        <p:cond delay="indefinite"/>
+                      </p:stCondLst>
+                      <p:childTnLst>
+                        <p:par>
+                          <p:cTn id="4" fill="hold">
+                            <p:stCondLst>
+                              <p:cond delay="0"/>
+                            </p:stCondLst>
+                            <p:childTnLst>
+                              <p:par>
+                                <p:cTn id="5" presetID="1" presetClass="entr" presetSubtype="0" fill="hold" grpId="0" nodeType="clickEffect">
+                                  <p:stCondLst>
+                                    <p:cond delay="0"/>
+                                  </p:stCondLst>
+                                  <p:childTnLst>
+                                    <p:set>
+                                      <p:cBhvr>
+                                        <p:cTn id="6" dur="1" fill="hold">
+                                          <p:stCondLst>
+                                            <p:cond delay="0"/>
+                                          </p:stCondLst>
+                                        </p:cTn>
+                                        <p:tgtEl>
+                                          <p:spTgt spid="6"/>
+                                        </p:tgtEl>
+                                        <p:attrNameLst>
+                                          <p:attrName>style.visibility</p:attrName>
+                                        </p:attrNameLst>
+                                      </p:cBhvr>
+                                      <p:to>
+                                        <p:strVal val="visible"/>
+                                      </p:to>
+                                    </p:set>
+                                  </p:childTnLst>
+                                </p:cTn>
+                              </p:par>
+                            </p:childTnLst>
+                          </p:cTn>
+                        </p:par>
+                      </p:childTnLst>
+                    </p:cTn>
+                  </p:par>
+                  <p:par>
+                    <p:cTn id="7" fill="hold">
+                      <p:stCondLst>
+                        <p:cond delay="indefinite"/>
+                      </p:stCondLst>
+                      <p:childTnLst>
+                        <p:par>
+                          <p:cTn id="8" fill="hold">
+                            <p:stCondLst>
+                              <p:cond delay="0"/>
+                            </p:stCondLst>
+                            <p:childTnLst>
+                              <p:par>
+                                <p:cTn id="9" presetID="1" presetClass="entr" presetSubtype="0" fill="hold" grpId="0" nodeType="clickEffect">
+                                  <p:stCondLst>
+                                    <p:cond delay="0"/>
+                                  </p:stCondLst>
+                                  <p:childTnLst>
+                                    <p:set>
+                                      <p:cBhvr>
+                                        <p:cTn id="10" dur="1" fill="hold">
+                                          <p:stCondLst>
+                                            <p:cond delay="0"/>
+                                          </p:stCondLst>
+                                        </p:cTn>
+                                        <p:tgtEl>
+                                          <p:spTgt spid="8"/>
+                                        </p:tgtEl>
+                                        <p:attrNameLst>
+                                          <p:attrName>style.visibility</p:attrName>
+                                        </p:attrNameLst>
+                                      </p:cBhvr>
+                                      <p:to>
+                                        <p:strVal val="visible"/>
+                                      </p:to>
+                                    </p:set>
+                                  </p:childTnLst>
+                                </p:cTn>
+                              </p:par>
+                            </p:childTnLst>
+                          </p:cTn>
+                        </p:par>
+                      </p:childTnLst>
+                    </p:cTn>
+                  </p:par>
+                  <p:par>
+                    <p:cTn id="11" fill="hold">
+                      <p:stCondLst>
+                        <p:cond delay="indefinite"/>
+                      </p:stCondLst>
+                      <p:childTnLst>
+                        <p:par>
+                          <p:cTn id="12" fill="hold">
+                            <p:stCondLst>
+                              <p:cond delay="0"/>
+                            </p:stCondLst>
+                            <p:childTnLst>
+                              <p:par>
+                                <p:cTn id="13" presetID="1" presetClass="entr" presetSubtype="0" fill="hold" grpId="0" nodeType="clickEffect">
+                                  <p:stCondLst>
+                                    <p:cond delay="0"/>
+                                  </p:stCondLst>
+                                  <p:childTnLst>
+                                    <p:set>
+                                      <p:cBhvr>
+                                        <p:cTn id="14" dur="1" fill="hold">
+                                          <p:stCondLst>
+                                            <p:cond delay="0"/>
+                                          </p:stCondLst>
+                                        </p:cTn>
+                                        <p:tgtEl>
+                                          <p:spTgt spid="9"/>
+                                        </p:tgtEl>
+                                        <p:attrNameLst>
+                                          <p:attrName>style.visibility</p:attrName>
+                                        </p:attrNameLst>
+                                      </p:cBhvr>
+                                      <p:to>
+                                        <p:strVal val="visible"/>
+                                      </p:to>
+                                    </p:set>
+                                  </p:childTnLst>
+                                </p:cTn>
+                              </p:par>
+                            </p:childTnLst>
+                          </p:cTn>
+                        </p:par>
+                      </p:childTnLst>
+                    </p:cTn>
+                  </p:par>
+                </p:childTnLst>
+              </p:cTn>
+              <p:prevCondLst>
+                <p:cond evt="onPrev" delay="0">
+                  <p:tgtEl>
+                    <p:sldTgt/>
+                  </p:tgtEl>
+                </p:cond>
+              </p:prevCondLst>
+              <p:nextCondLst>
+                <p:cond evt="onNext" delay="0">
+                  <p:tgtEl>
+                    <p:sldTgt/>
+                  </p:tgtEl>
+                </p:cond>
+              </p:nextCondLst>
+            </p:seq>
+          </p:childTnLst>
+        </p:cTn>
+      </p:par>
+    </p:tnLst>
+    <p:bldLst>
+      <p:bldP spid="6" grpId="0"/>
+      <p:bldP spid="8" grpId="0"/>
+      <p:bldP spid="9" grpId="0"/>
+    </p:bldLst>
+  </p:timing>
+</p:sld>
+</file>
+
+<file path=ppt/slides/slide18.xml><?xml version="1.0" encoding="utf-8"?>
 <p:sld xmlns:a="http://schemas.openxmlformats.org/drawingml/2006/main" xmlns:r="http://schemas.openxmlformats.org/officeDocument/2006/relationships" xmlns:p="http://schemas.openxmlformats.org/presentationml/2006/main" showMasterSp="0">
   <p:cSld>
     <p:spTree>
@@ -4187,7 +4354,7 @@
 </p:sld>
 </file>
 
-<file path=ppt/slides/slide18.xml><?xml version="1.0" encoding="utf-8"?>
+<file path=ppt/slides/slide19.xml><?xml version="1.0" encoding="utf-8"?>
 <p:sld xmlns:a="http://schemas.openxmlformats.org/drawingml/2006/main" xmlns:r="http://schemas.openxmlformats.org/officeDocument/2006/relationships" xmlns:p="http://schemas.openxmlformats.org/presentationml/2006/main" showMasterSp="0">
   <p:cSld>
     <p:spTree>
@@ -4238,66 +4405,6 @@
     <p:extLst>
       <p:ext uri="{BB962C8B-B14F-4D97-AF65-F5344CB8AC3E}">
         <p14:creationId xmlns:p14="http://schemas.microsoft.com/office/powerpoint/2010/main" val="1500482341"/>
-      </p:ext>
-    </p:extLst>
-  </p:cSld>
-  <p:clrMapOvr>
-    <a:masterClrMapping/>
-  </p:clrMapOvr>
-</p:sld>
-</file>
-
-<file path=ppt/slides/slide19.xml><?xml version="1.0" encoding="utf-8"?>
-<p:sld xmlns:a="http://schemas.openxmlformats.org/drawingml/2006/main" xmlns:r="http://schemas.openxmlformats.org/officeDocument/2006/relationships" xmlns:p="http://schemas.openxmlformats.org/presentationml/2006/main" showMasterSp="0">
-  <p:cSld>
-    <p:spTree>
-      <p:nvGrpSpPr>
-        <p:cNvPr id="1" name=""/>
-        <p:cNvGrpSpPr/>
-        <p:nvPr/>
-      </p:nvGrpSpPr>
-      <p:grpSpPr>
-        <a:xfrm>
-          <a:off x="0" y="0"/>
-          <a:ext cx="0" cy="0"/>
-          <a:chOff x="0" y="0"/>
-          <a:chExt cx="0" cy="0"/>
-        </a:xfrm>
-      </p:grpSpPr>
-      <p:pic>
-        <p:nvPicPr>
-          <p:cNvPr id="2" name="Рисунок 1">
-            <a:extLst>
-              <a:ext uri="{FF2B5EF4-FFF2-40B4-BE49-F238E27FC236}">
-                <a16:creationId xmlns:a16="http://schemas.microsoft.com/office/drawing/2014/main" id="{DA2B98E0-77E6-468D-87C2-CC3E3CFE00DC}"/>
-              </a:ext>
-            </a:extLst>
-          </p:cNvPr>
-          <p:cNvPicPr>
-            <a:picLocks noChangeAspect="1"/>
-          </p:cNvPicPr>
-          <p:nvPr/>
-        </p:nvPicPr>
-        <p:blipFill>
-          <a:blip r:embed="rId2"/>
-          <a:stretch>
-            <a:fillRect/>
-          </a:stretch>
-        </p:blipFill>
-        <p:spPr>
-          <a:xfrm>
-            <a:off x="1170869" y="0"/>
-            <a:ext cx="6802262" cy="5143500"/>
-          </a:xfrm>
-          <a:prstGeom prst="rect">
-            <a:avLst/>
-          </a:prstGeom>
-        </p:spPr>
-      </p:pic>
-    </p:spTree>
-    <p:extLst>
-      <p:ext uri="{BB962C8B-B14F-4D97-AF65-F5344CB8AC3E}">
-        <p14:creationId xmlns:p14="http://schemas.microsoft.com/office/powerpoint/2010/main" val="1101945448"/>
       </p:ext>
     </p:extLst>
   </p:cSld>
@@ -5639,6 +5746,66 @@
           <p:cNvPr id="2" name="Рисунок 1">
             <a:extLst>
               <a:ext uri="{FF2B5EF4-FFF2-40B4-BE49-F238E27FC236}">
+                <a16:creationId xmlns:a16="http://schemas.microsoft.com/office/drawing/2014/main" id="{DA2B98E0-77E6-468D-87C2-CC3E3CFE00DC}"/>
+              </a:ext>
+            </a:extLst>
+          </p:cNvPr>
+          <p:cNvPicPr>
+            <a:picLocks noChangeAspect="1"/>
+          </p:cNvPicPr>
+          <p:nvPr/>
+        </p:nvPicPr>
+        <p:blipFill>
+          <a:blip r:embed="rId2"/>
+          <a:stretch>
+            <a:fillRect/>
+          </a:stretch>
+        </p:blipFill>
+        <p:spPr>
+          <a:xfrm>
+            <a:off x="1170869" y="0"/>
+            <a:ext cx="6802262" cy="5143500"/>
+          </a:xfrm>
+          <a:prstGeom prst="rect">
+            <a:avLst/>
+          </a:prstGeom>
+        </p:spPr>
+      </p:pic>
+    </p:spTree>
+    <p:extLst>
+      <p:ext uri="{BB962C8B-B14F-4D97-AF65-F5344CB8AC3E}">
+        <p14:creationId xmlns:p14="http://schemas.microsoft.com/office/powerpoint/2010/main" val="1101945448"/>
+      </p:ext>
+    </p:extLst>
+  </p:cSld>
+  <p:clrMapOvr>
+    <a:masterClrMapping/>
+  </p:clrMapOvr>
+</p:sld>
+</file>
+
+<file path=ppt/slides/slide21.xml><?xml version="1.0" encoding="utf-8"?>
+<p:sld xmlns:a="http://schemas.openxmlformats.org/drawingml/2006/main" xmlns:r="http://schemas.openxmlformats.org/officeDocument/2006/relationships" xmlns:p="http://schemas.openxmlformats.org/presentationml/2006/main" showMasterSp="0">
+  <p:cSld>
+    <p:spTree>
+      <p:nvGrpSpPr>
+        <p:cNvPr id="1" name=""/>
+        <p:cNvGrpSpPr/>
+        <p:nvPr/>
+      </p:nvGrpSpPr>
+      <p:grpSpPr>
+        <a:xfrm>
+          <a:off x="0" y="0"/>
+          <a:ext cx="0" cy="0"/>
+          <a:chOff x="0" y="0"/>
+          <a:chExt cx="0" cy="0"/>
+        </a:xfrm>
+      </p:grpSpPr>
+      <p:pic>
+        <p:nvPicPr>
+          <p:cNvPr id="2" name="Рисунок 1">
+            <a:extLst>
+              <a:ext uri="{FF2B5EF4-FFF2-40B4-BE49-F238E27FC236}">
                 <a16:creationId xmlns:a16="http://schemas.microsoft.com/office/drawing/2014/main" id="{4FDFB331-622D-4CE7-A83E-F6AB907E5CA7}"/>
               </a:ext>
             </a:extLst>
@@ -5677,7 +5844,7 @@
 </p:sld>
 </file>
 
-<file path=ppt/slides/slide21.xml><?xml version="1.0" encoding="utf-8"?>
+<file path=ppt/slides/slide22.xml><?xml version="1.0" encoding="utf-8"?>
 <p:sld xmlns:a="http://schemas.openxmlformats.org/drawingml/2006/main" xmlns:r="http://schemas.openxmlformats.org/officeDocument/2006/relationships" xmlns:p="http://schemas.openxmlformats.org/presentationml/2006/main" showMasterSp="0">
   <p:cSld>
     <p:spTree>
@@ -5737,7 +5904,7 @@
 </p:sld>
 </file>
 
-<file path=ppt/slides/slide22.xml><?xml version="1.0" encoding="utf-8"?>
+<file path=ppt/slides/slide23.xml><?xml version="1.0" encoding="utf-8"?>
 <p:sld xmlns:a="http://schemas.openxmlformats.org/drawingml/2006/main" xmlns:r="http://schemas.openxmlformats.org/officeDocument/2006/relationships" xmlns:p="http://schemas.openxmlformats.org/presentationml/2006/main" showMasterSp="0">
   <p:cSld>
     <p:spTree>
@@ -5797,7 +5964,7 @@
 </p:sld>
 </file>
 
-<file path=ppt/slides/slide23.xml><?xml version="1.0" encoding="utf-8"?>
+<file path=ppt/slides/slide24.xml><?xml version="1.0" encoding="utf-8"?>
 <p:sld xmlns:a="http://schemas.openxmlformats.org/drawingml/2006/main" xmlns:r="http://schemas.openxmlformats.org/officeDocument/2006/relationships" xmlns:p="http://schemas.openxmlformats.org/presentationml/2006/main" showMasterSp="0">
   <p:cSld>
     <p:spTree>
@@ -5857,7 +6024,7 @@
 </p:sld>
 </file>
 
-<file path=ppt/slides/slide24.xml><?xml version="1.0" encoding="utf-8"?>
+<file path=ppt/slides/slide25.xml><?xml version="1.0" encoding="utf-8"?>
 <p:sld xmlns:a="http://schemas.openxmlformats.org/drawingml/2006/main" xmlns:r="http://schemas.openxmlformats.org/officeDocument/2006/relationships" xmlns:p="http://schemas.openxmlformats.org/presentationml/2006/main" showMasterSp="0">
   <p:cSld>
     <p:spTree>
@@ -5934,36 +6101,587 @@
           <a:chExt cx="0" cy="0"/>
         </a:xfrm>
       </p:grpSpPr>
-      <p:pic>
-        <p:nvPicPr>
-          <p:cNvPr id="3" name="Рисунок 2">
+      <p:sp>
+        <p:nvSpPr>
+          <p:cNvPr id="2" name="Заголовок 1"/>
+          <p:cNvSpPr>
+            <a:spLocks noGrp="1"/>
+          </p:cNvSpPr>
+          <p:nvPr>
+            <p:ph type="title"/>
+          </p:nvPr>
+        </p:nvSpPr>
+        <p:spPr/>
+        <p:txBody>
+          <a:bodyPr>
+            <a:normAutofit fontScale="90000"/>
+          </a:bodyPr>
+          <a:lstStyle/>
+          <a:p>
+            <a:r>
+              <a:rPr lang="ru-RU" dirty="0">
+                <a:latin typeface="Segoe UI Light" panose="020B0502040204020203" pitchFamily="34" charset="0"/>
+                <a:cs typeface="Segoe UI Light" panose="020B0502040204020203" pitchFamily="34" charset="0"/>
+              </a:rPr>
+              <a:t>Организационные </a:t>
+            </a:r>
+            <a:br>
+              <a:rPr lang="en-US" dirty="0">
+                <a:latin typeface="Segoe UI Light" panose="020B0502040204020203" pitchFamily="34" charset="0"/>
+                <a:cs typeface="Segoe UI Light" panose="020B0502040204020203" pitchFamily="34" charset="0"/>
+              </a:rPr>
+            </a:br>
+            <a:r>
+              <a:rPr lang="ru-RU" dirty="0">
+                <a:latin typeface="Segoe UI Light" panose="020B0502040204020203" pitchFamily="34" charset="0"/>
+                <a:cs typeface="Segoe UI Light" panose="020B0502040204020203" pitchFamily="34" charset="0"/>
+              </a:rPr>
+              <a:t>моменты</a:t>
+            </a:r>
+          </a:p>
+        </p:txBody>
+      </p:sp>
+      <p:sp>
+        <p:nvSpPr>
+          <p:cNvPr id="3" name="Объект 2"/>
+          <p:cNvSpPr>
+            <a:spLocks noGrp="1"/>
+          </p:cNvSpPr>
+          <p:nvPr>
+            <p:ph type="subTitle"/>
+          </p:nvPr>
+        </p:nvSpPr>
+        <p:spPr>
+          <a:xfrm>
+            <a:off x="5029200" y="1374705"/>
+            <a:ext cx="6080760" cy="3263040"/>
+          </a:xfrm>
+        </p:spPr>
+        <p:txBody>
+          <a:bodyPr numCol="2">
+            <a:noAutofit/>
+          </a:bodyPr>
+          <a:lstStyle/>
+          <a:p>
+            <a:pPr marL="0" indent="0">
+              <a:buNone/>
+            </a:pPr>
+            <a:r>
+              <a:rPr lang="ru-RU" sz="2000" i="1" u="sng" dirty="0">
+                <a:latin typeface="Segoe UI Light" panose="020B0502040204020203" pitchFamily="34" charset="0"/>
+                <a:cs typeface="Segoe UI Light" panose="020B0502040204020203" pitchFamily="34" charset="0"/>
+              </a:rPr>
+              <a:t>Правила совместной работы:</a:t>
+            </a:r>
+            <a:endParaRPr lang="ru-RU" sz="2000" dirty="0">
+              <a:solidFill>
+                <a:srgbClr val="0070C0"/>
+              </a:solidFill>
+              <a:latin typeface="Segoe UI Light" panose="020B0502040204020203" pitchFamily="34" charset="0"/>
+              <a:cs typeface="Segoe UI Light" panose="020B0502040204020203" pitchFamily="34" charset="0"/>
+            </a:endParaRPr>
+          </a:p>
+          <a:p>
+            <a:pPr marL="0" indent="0">
+              <a:buNone/>
+            </a:pPr>
+            <a:r>
+              <a:rPr lang="ru-RU" sz="2000" dirty="0">
+                <a:solidFill>
+                  <a:srgbClr val="86AA00"/>
+                </a:solidFill>
+                <a:latin typeface="Segoe UI Light" panose="020B0502040204020203" pitchFamily="34" charset="0"/>
+                <a:cs typeface="Segoe UI Light" panose="020B0502040204020203" pitchFamily="34" charset="0"/>
+              </a:rPr>
+              <a:t> </a:t>
+            </a:r>
+            <a:r>
+              <a:rPr lang="ru-RU" sz="2000" dirty="0">
+                <a:solidFill>
+                  <a:srgbClr val="2D2D2A"/>
+                </a:solidFill>
+                <a:latin typeface="Segoe UI Light" panose="020B0502040204020203" pitchFamily="34" charset="0"/>
+                <a:cs typeface="Segoe UI Light" panose="020B0502040204020203" pitchFamily="34" charset="0"/>
+              </a:rPr>
+              <a:t>Вопросы преподавателю</a:t>
+            </a:r>
+            <a:br>
+              <a:rPr lang="ru-RU" sz="2000" dirty="0">
+                <a:solidFill>
+                  <a:srgbClr val="2D2D2A"/>
+                </a:solidFill>
+                <a:latin typeface="Segoe UI Light" panose="020B0502040204020203" pitchFamily="34" charset="0"/>
+                <a:cs typeface="Segoe UI Light" panose="020B0502040204020203" pitchFamily="34" charset="0"/>
+              </a:rPr>
+            </a:br>
+            <a:r>
+              <a:rPr lang="ru-RU" sz="2000" dirty="0">
+                <a:solidFill>
+                  <a:srgbClr val="86AA00"/>
+                </a:solidFill>
+                <a:latin typeface="Segoe UI Light" panose="020B0502040204020203" pitchFamily="34" charset="0"/>
+                <a:cs typeface="Segoe UI Light" panose="020B0502040204020203" pitchFamily="34" charset="0"/>
+              </a:rPr>
+              <a:t> </a:t>
+            </a:r>
+            <a:r>
+              <a:rPr lang="ru-RU" sz="2000" dirty="0">
+                <a:solidFill>
+                  <a:srgbClr val="2D2D2A"/>
+                </a:solidFill>
+                <a:latin typeface="Segoe UI Light" panose="020B0502040204020203" pitchFamily="34" charset="0"/>
+                <a:cs typeface="Segoe UI Light" panose="020B0502040204020203" pitchFamily="34" charset="0"/>
+              </a:rPr>
+              <a:t>Правило поднятой руки</a:t>
+            </a:r>
+            <a:br>
+              <a:rPr lang="ru-RU" sz="2000" dirty="0">
+                <a:solidFill>
+                  <a:srgbClr val="2D2D2A"/>
+                </a:solidFill>
+                <a:latin typeface="Segoe UI Light" panose="020B0502040204020203" pitchFamily="34" charset="0"/>
+                <a:cs typeface="Segoe UI Light" panose="020B0502040204020203" pitchFamily="34" charset="0"/>
+              </a:rPr>
+            </a:br>
+            <a:r>
+              <a:rPr lang="ru-RU" sz="2000" dirty="0">
+                <a:solidFill>
+                  <a:srgbClr val="86AA00"/>
+                </a:solidFill>
+                <a:latin typeface="Segoe UI Light" panose="020B0502040204020203" pitchFamily="34" charset="0"/>
+                <a:cs typeface="Segoe UI Light" panose="020B0502040204020203" pitchFamily="34" charset="0"/>
+              </a:rPr>
+              <a:t> </a:t>
+            </a:r>
+            <a:r>
+              <a:rPr lang="ru-RU" sz="2000" dirty="0">
+                <a:solidFill>
+                  <a:srgbClr val="2D2D2A"/>
+                </a:solidFill>
+                <a:latin typeface="Segoe UI Light" panose="020B0502040204020203" pitchFamily="34" charset="0"/>
+                <a:cs typeface="Segoe UI Light" panose="020B0502040204020203" pitchFamily="34" charset="0"/>
+              </a:rPr>
+              <a:t>Уважение к мнению других участников</a:t>
+            </a:r>
+            <a:br>
+              <a:rPr lang="ru-RU" sz="2000" dirty="0">
+                <a:solidFill>
+                  <a:srgbClr val="2D2D2A"/>
+                </a:solidFill>
+                <a:latin typeface="Segoe UI Light" panose="020B0502040204020203" pitchFamily="34" charset="0"/>
+                <a:cs typeface="Segoe UI Light" panose="020B0502040204020203" pitchFamily="34" charset="0"/>
+              </a:rPr>
+            </a:br>
+            <a:endParaRPr lang="en-US" sz="2000" dirty="0">
+              <a:solidFill>
+                <a:srgbClr val="2D2D2A"/>
+              </a:solidFill>
+              <a:latin typeface="Segoe UI Light" panose="020B0502040204020203" pitchFamily="34" charset="0"/>
+              <a:cs typeface="Segoe UI Light" panose="020B0502040204020203" pitchFamily="34" charset="0"/>
+            </a:endParaRPr>
+          </a:p>
+          <a:p>
+            <a:pPr marL="0" indent="0">
+              <a:buNone/>
+            </a:pPr>
+            <a:r>
+              <a:rPr lang="ru-RU" sz="2000" dirty="0">
+                <a:solidFill>
+                  <a:srgbClr val="FF0000"/>
+                </a:solidFill>
+                <a:latin typeface="Segoe UI Light" panose="020B0502040204020203" pitchFamily="34" charset="0"/>
+                <a:cs typeface="Segoe UI Light" panose="020B0502040204020203" pitchFamily="34" charset="0"/>
+              </a:rPr>
+              <a:t> </a:t>
+            </a:r>
+            <a:r>
+              <a:rPr lang="ru-RU" sz="2000" dirty="0">
+                <a:latin typeface="Segoe UI Light" panose="020B0502040204020203" pitchFamily="34" charset="0"/>
+                <a:cs typeface="Segoe UI Light" panose="020B0502040204020203" pitchFamily="34" charset="0"/>
+              </a:rPr>
+              <a:t>Мобильные телефоны</a:t>
+            </a:r>
+            <a:br>
+              <a:rPr lang="ru-RU" sz="2000" dirty="0">
+                <a:solidFill>
+                  <a:srgbClr val="2D2D2A"/>
+                </a:solidFill>
+                <a:latin typeface="Segoe UI Light" panose="020B0502040204020203" pitchFamily="34" charset="0"/>
+                <a:cs typeface="Segoe UI Light" panose="020B0502040204020203" pitchFamily="34" charset="0"/>
+              </a:rPr>
+            </a:br>
+            <a:r>
+              <a:rPr lang="ru-RU" sz="2000" dirty="0">
+                <a:solidFill>
+                  <a:srgbClr val="FF0000"/>
+                </a:solidFill>
+                <a:latin typeface="Segoe UI Light" panose="020B0502040204020203" pitchFamily="34" charset="0"/>
+                <a:cs typeface="Segoe UI Light" panose="020B0502040204020203" pitchFamily="34" charset="0"/>
+              </a:rPr>
+              <a:t> </a:t>
+            </a:r>
+            <a:r>
+              <a:rPr lang="ru-RU" sz="2000" dirty="0">
+                <a:solidFill>
+                  <a:srgbClr val="2D2D2A"/>
+                </a:solidFill>
+                <a:latin typeface="Segoe UI Light" panose="020B0502040204020203" pitchFamily="34" charset="0"/>
+                <a:cs typeface="Segoe UI Light" panose="020B0502040204020203" pitchFamily="34" charset="0"/>
+              </a:rPr>
+              <a:t>Опоздания</a:t>
+            </a:r>
+            <a:br>
+              <a:rPr lang="ru-RU" sz="2000" dirty="0">
+                <a:solidFill>
+                  <a:srgbClr val="2D2D2A"/>
+                </a:solidFill>
+                <a:latin typeface="Segoe UI Light" panose="020B0502040204020203" pitchFamily="34" charset="0"/>
+                <a:cs typeface="Segoe UI Light" panose="020B0502040204020203" pitchFamily="34" charset="0"/>
+              </a:rPr>
+            </a:br>
+            <a:r>
+              <a:rPr lang="ru-RU" sz="2000" dirty="0">
+                <a:solidFill>
+                  <a:srgbClr val="FF0000"/>
+                </a:solidFill>
+                <a:latin typeface="Segoe UI Light" panose="020B0502040204020203" pitchFamily="34" charset="0"/>
+                <a:cs typeface="Segoe UI Light" panose="020B0502040204020203" pitchFamily="34" charset="0"/>
+              </a:rPr>
+              <a:t> </a:t>
+            </a:r>
+            <a:r>
+              <a:rPr lang="ru-RU" sz="2000" dirty="0">
+                <a:solidFill>
+                  <a:srgbClr val="2D2D2A"/>
+                </a:solidFill>
+                <a:latin typeface="Segoe UI Light" panose="020B0502040204020203" pitchFamily="34" charset="0"/>
+                <a:cs typeface="Segoe UI Light" panose="020B0502040204020203" pitchFamily="34" charset="0"/>
+              </a:rPr>
+              <a:t>Приватные обсуждения</a:t>
+            </a:r>
+          </a:p>
+          <a:p>
+            <a:pPr marL="136922" indent="0">
+              <a:buNone/>
+            </a:pPr>
+            <a:endParaRPr lang="ru-RU" sz="2000" dirty="0">
+              <a:latin typeface="Segoe UI Light" panose="020B0502040204020203" pitchFamily="34" charset="0"/>
+              <a:cs typeface="Segoe UI Light" panose="020B0502040204020203" pitchFamily="34" charset="0"/>
+            </a:endParaRPr>
+          </a:p>
+        </p:txBody>
+      </p:sp>
+      <p:sp>
+        <p:nvSpPr>
+          <p:cNvPr id="5" name="Прямоугольник 4">
             <a:extLst>
               <a:ext uri="{FF2B5EF4-FFF2-40B4-BE49-F238E27FC236}">
-                <a16:creationId xmlns:a16="http://schemas.microsoft.com/office/drawing/2014/main" id="{D6830452-0358-4C7F-A61E-079E370F1AB8}"/>
+                <a16:creationId xmlns:a16="http://schemas.microsoft.com/office/drawing/2014/main" id="{FF7E1ABB-9D45-4065-9DE9-D3FCF076D342}"/>
               </a:ext>
             </a:extLst>
           </p:cNvPr>
-          <p:cNvPicPr>
-            <a:picLocks noChangeAspect="1"/>
-          </p:cNvPicPr>
+          <p:cNvSpPr/>
           <p:nvPr/>
-        </p:nvPicPr>
-        <p:blipFill>
-          <a:blip r:embed="rId2"/>
-          <a:stretch>
-            <a:fillRect/>
-          </a:stretch>
-        </p:blipFill>
-        <p:spPr>
-          <a:xfrm>
-            <a:off x="52483" y="0"/>
+        </p:nvSpPr>
+        <p:spPr>
+          <a:xfrm>
+            <a:off x="628560" y="1802820"/>
+            <a:ext cx="3684360" cy="2225225"/>
+          </a:xfrm>
+          <a:prstGeom prst="rect">
+            <a:avLst/>
+          </a:prstGeom>
+        </p:spPr>
+        <p:txBody>
+          <a:bodyPr wrap="square">
+            <a:spAutoFit/>
+          </a:bodyPr>
+          <a:lstStyle/>
+          <a:p>
+            <a:pPr lvl="0">
+              <a:lnSpc>
+                <a:spcPct val="90000"/>
+              </a:lnSpc>
+              <a:spcBef>
+                <a:spcPct val="0"/>
+              </a:spcBef>
+            </a:pPr>
+            <a:r>
+              <a:rPr lang="ru-RU" sz="1400" i="1" u="sng" dirty="0">
+                <a:solidFill>
+                  <a:prstClr val="black"/>
+                </a:solidFill>
+                <a:latin typeface="Segoe UI Light" panose="020B0502040204020203" pitchFamily="34" charset="0"/>
+                <a:cs typeface="Segoe UI Light" panose="020B0502040204020203" pitchFamily="34" charset="0"/>
+              </a:rPr>
+              <a:t>Давайте знакомиться</a:t>
+            </a:r>
+          </a:p>
+          <a:p>
+            <a:pPr lvl="0">
+              <a:lnSpc>
+                <a:spcPct val="90000"/>
+              </a:lnSpc>
+              <a:spcBef>
+                <a:spcPct val="0"/>
+              </a:spcBef>
+              <a:buFont typeface="Wingdings" panose="05000000000000000000" pitchFamily="2" charset="2"/>
+              <a:buChar char="q"/>
+            </a:pPr>
+            <a:r>
+              <a:rPr lang="ru-RU" sz="2000" dirty="0">
+                <a:solidFill>
+                  <a:srgbClr val="2D2D2A"/>
+                </a:solidFill>
+                <a:latin typeface="Segoe UI Light" panose="020B0502040204020203" pitchFamily="34" charset="0"/>
+                <a:cs typeface="Segoe UI Light" panose="020B0502040204020203" pitchFamily="34" charset="0"/>
+              </a:rPr>
+              <a:t> из какой Вы организации</a:t>
+            </a:r>
+          </a:p>
+          <a:p>
+            <a:pPr lvl="0">
+              <a:lnSpc>
+                <a:spcPct val="90000"/>
+              </a:lnSpc>
+              <a:spcBef>
+                <a:spcPct val="0"/>
+              </a:spcBef>
+              <a:buFont typeface="Wingdings" panose="05000000000000000000" pitchFamily="2" charset="2"/>
+              <a:buChar char="q"/>
+            </a:pPr>
+            <a:r>
+              <a:rPr lang="en-US" sz="2000" dirty="0">
+                <a:solidFill>
+                  <a:srgbClr val="2D2D2A"/>
+                </a:solidFill>
+                <a:latin typeface="Segoe UI Light" panose="020B0502040204020203" pitchFamily="34" charset="0"/>
+                <a:cs typeface="Segoe UI Light" panose="020B0502040204020203" pitchFamily="34" charset="0"/>
+              </a:rPr>
+              <a:t> </a:t>
+            </a:r>
+            <a:r>
+              <a:rPr lang="ru-RU" sz="2000" dirty="0">
+                <a:solidFill>
+                  <a:srgbClr val="2D2D2A"/>
+                </a:solidFill>
+                <a:latin typeface="Segoe UI Light" panose="020B0502040204020203" pitchFamily="34" charset="0"/>
+                <a:cs typeface="Segoe UI Light" panose="020B0502040204020203" pitchFamily="34" charset="0"/>
+              </a:rPr>
+              <a:t>каков Ваш опыт работы в сфере ИТ</a:t>
+            </a:r>
+          </a:p>
+          <a:p>
+            <a:pPr lvl="0">
+              <a:lnSpc>
+                <a:spcPct val="90000"/>
+              </a:lnSpc>
+              <a:spcBef>
+                <a:spcPct val="0"/>
+              </a:spcBef>
+              <a:buFont typeface="Wingdings" panose="05000000000000000000" pitchFamily="2" charset="2"/>
+              <a:buChar char="q"/>
+            </a:pPr>
+            <a:r>
+              <a:rPr lang="en-US" sz="2000" dirty="0">
+                <a:solidFill>
+                  <a:srgbClr val="2D2D2A"/>
+                </a:solidFill>
+                <a:latin typeface="Segoe UI Light" panose="020B0502040204020203" pitchFamily="34" charset="0"/>
+                <a:cs typeface="Segoe UI Light" panose="020B0502040204020203" pitchFamily="34" charset="0"/>
+              </a:rPr>
+              <a:t> </a:t>
+            </a:r>
+            <a:r>
+              <a:rPr lang="ru-RU" sz="2000" dirty="0">
+                <a:solidFill>
+                  <a:srgbClr val="2D2D2A"/>
+                </a:solidFill>
+                <a:latin typeface="Segoe UI Light" panose="020B0502040204020203" pitchFamily="34" charset="0"/>
+                <a:cs typeface="Segoe UI Light" panose="020B0502040204020203" pitchFamily="34" charset="0"/>
+              </a:rPr>
+              <a:t>опыт работы с продуктом, рассматриваемым на курсе</a:t>
+            </a:r>
+          </a:p>
+          <a:p>
+            <a:pPr lvl="0">
+              <a:lnSpc>
+                <a:spcPct val="90000"/>
+              </a:lnSpc>
+              <a:spcBef>
+                <a:spcPct val="0"/>
+              </a:spcBef>
+              <a:buFont typeface="Wingdings" panose="05000000000000000000" pitchFamily="2" charset="2"/>
+              <a:buChar char="q"/>
+            </a:pPr>
+            <a:r>
+              <a:rPr lang="en-US" sz="2000" dirty="0">
+                <a:solidFill>
+                  <a:srgbClr val="2D2D2A"/>
+                </a:solidFill>
+                <a:latin typeface="Segoe UI Light" panose="020B0502040204020203" pitchFamily="34" charset="0"/>
+                <a:cs typeface="Segoe UI Light" panose="020B0502040204020203" pitchFamily="34" charset="0"/>
+              </a:rPr>
+              <a:t> </a:t>
+            </a:r>
+            <a:r>
+              <a:rPr lang="ru-RU" sz="2000" dirty="0">
+                <a:solidFill>
+                  <a:srgbClr val="2D2D2A"/>
+                </a:solidFill>
+                <a:latin typeface="Segoe UI Light" panose="020B0502040204020203" pitchFamily="34" charset="0"/>
+                <a:cs typeface="Segoe UI Light" panose="020B0502040204020203" pitchFamily="34" charset="0"/>
+              </a:rPr>
+              <a:t>какие Ваши цели/задачи перед прохождением курса</a:t>
+            </a:r>
+            <a:endParaRPr lang="ru-RU" dirty="0"/>
+          </a:p>
+        </p:txBody>
+      </p:sp>
+    </p:spTree>
+    <p:extLst>
+      <p:ext uri="{BB962C8B-B14F-4D97-AF65-F5344CB8AC3E}">
+        <p14:creationId xmlns:p14="http://schemas.microsoft.com/office/powerpoint/2010/main" val="2783297049"/>
+      </p:ext>
+    </p:extLst>
+  </p:cSld>
+  <p:clrMapOvr>
+    <a:masterClrMapping/>
+  </p:clrMapOvr>
+</p:sld>
+</file>
+
+<file path=ppt/slides/slide4.xml><?xml version="1.0" encoding="utf-8"?>
+<p:sld xmlns:a="http://schemas.openxmlformats.org/drawingml/2006/main" xmlns:r="http://schemas.openxmlformats.org/officeDocument/2006/relationships" xmlns:p="http://schemas.openxmlformats.org/presentationml/2006/main" showMasterSp="0">
+  <p:cSld>
+    <p:spTree>
+      <p:nvGrpSpPr>
+        <p:cNvPr id="1" name=""/>
+        <p:cNvGrpSpPr/>
+        <p:nvPr/>
+      </p:nvGrpSpPr>
+      <p:grpSpPr>
+        <a:xfrm>
+          <a:off x="0" y="0"/>
+          <a:ext cx="0" cy="0"/>
+          <a:chOff x="0" y="0"/>
+          <a:chExt cx="0" cy="0"/>
+        </a:xfrm>
+      </p:grpSpPr>
+      <p:grpSp>
+        <p:nvGrpSpPr>
+          <p:cNvPr id="4" name="Группа 3">
+            <a:extLst>
+              <a:ext uri="{FF2B5EF4-FFF2-40B4-BE49-F238E27FC236}">
+                <a16:creationId xmlns:a16="http://schemas.microsoft.com/office/drawing/2014/main" id="{D0DAEB26-55A7-43E8-9890-9CD4C80EB229}"/>
+              </a:ext>
+            </a:extLst>
+          </p:cNvPr>
+          <p:cNvGrpSpPr/>
+          <p:nvPr/>
+        </p:nvGrpSpPr>
+        <p:grpSpPr>
+          <a:xfrm>
+            <a:off x="52483" y="22860"/>
             <a:ext cx="6823871" cy="5143500"/>
-          </a:xfrm>
-          <a:prstGeom prst="rect">
-            <a:avLst/>
-          </a:prstGeom>
-        </p:spPr>
-      </p:pic>
+            <a:chOff x="52483" y="22860"/>
+            <a:chExt cx="6823871" cy="5143500"/>
+          </a:xfrm>
+        </p:grpSpPr>
+        <p:pic>
+          <p:nvPicPr>
+            <p:cNvPr id="3" name="Рисунок 2">
+              <a:extLst>
+                <a:ext uri="{FF2B5EF4-FFF2-40B4-BE49-F238E27FC236}">
+                  <a16:creationId xmlns:a16="http://schemas.microsoft.com/office/drawing/2014/main" id="{D6830452-0358-4C7F-A61E-079E370F1AB8}"/>
+                </a:ext>
+              </a:extLst>
+            </p:cNvPr>
+            <p:cNvPicPr>
+              <a:picLocks noChangeAspect="1"/>
+            </p:cNvPicPr>
+            <p:nvPr/>
+          </p:nvPicPr>
+          <p:blipFill>
+            <a:blip r:embed="rId2"/>
+            <a:stretch>
+              <a:fillRect/>
+            </a:stretch>
+          </p:blipFill>
+          <p:spPr>
+            <a:xfrm>
+              <a:off x="52483" y="22860"/>
+              <a:ext cx="6823871" cy="5143500"/>
+            </a:xfrm>
+            <a:prstGeom prst="rect">
+              <a:avLst/>
+            </a:prstGeom>
+          </p:spPr>
+        </p:pic>
+        <p:sp>
+          <p:nvSpPr>
+            <p:cNvPr id="2" name="Прямоугольник 1">
+              <a:extLst>
+                <a:ext uri="{FF2B5EF4-FFF2-40B4-BE49-F238E27FC236}">
+                  <a16:creationId xmlns:a16="http://schemas.microsoft.com/office/drawing/2014/main" id="{5E6FB45B-0EA8-43F1-8F04-7DD6C18841FF}"/>
+                </a:ext>
+              </a:extLst>
+            </p:cNvPr>
+            <p:cNvSpPr/>
+            <p:nvPr/>
+          </p:nvSpPr>
+          <p:spPr>
+            <a:xfrm flipH="1">
+              <a:off x="2560320" y="1104899"/>
+              <a:ext cx="106680" cy="461665"/>
+            </a:xfrm>
+            <a:prstGeom prst="rect">
+              <a:avLst/>
+            </a:prstGeom>
+            <a:solidFill>
+              <a:schemeClr val="bg1"/>
+            </a:solidFill>
+          </p:spPr>
+          <p:txBody>
+            <a:bodyPr wrap="square" lIns="91440" tIns="45720" rIns="91440" bIns="45720">
+              <a:spAutoFit/>
+            </a:bodyPr>
+            <a:lstStyle/>
+            <a:p>
+              <a:pPr algn="ctr"/>
+              <a:r>
+                <a:rPr lang="en-US" sz="2400" b="0" cap="none" spc="0" dirty="0">
+                  <a:ln w="0"/>
+                  <a:solidFill>
+                    <a:schemeClr val="tx1"/>
+                  </a:solidFill>
+                  <a:effectLst>
+                    <a:outerShdw blurRad="38100" dist="19050" dir="2700000" algn="tl" rotWithShape="0">
+                      <a:schemeClr val="dk1">
+                        <a:alpha val="40000"/>
+                      </a:schemeClr>
+                    </a:outerShdw>
+                  </a:effectLst>
+                </a:rPr>
+                <a:t>3</a:t>
+              </a:r>
+              <a:endParaRPr lang="ru-RU" sz="2400" b="0" cap="none" spc="0" dirty="0">
+                <a:ln w="0"/>
+                <a:solidFill>
+                  <a:schemeClr val="tx1"/>
+                </a:solidFill>
+                <a:effectLst>
+                  <a:outerShdw blurRad="38100" dist="19050" dir="2700000" algn="tl" rotWithShape="0">
+                    <a:schemeClr val="dk1">
+                      <a:alpha val="40000"/>
+                    </a:schemeClr>
+                  </a:outerShdw>
+                </a:effectLst>
+              </a:endParaRPr>
+            </a:p>
+          </p:txBody>
+        </p:sp>
+      </p:grpSp>
     </p:spTree>
     <p:extLst>
       <p:ext uri="{BB962C8B-B14F-4D97-AF65-F5344CB8AC3E}">
@@ -5977,7 +6695,7 @@
 </p:sld>
 </file>
 
-<file path=ppt/slides/slide4.xml><?xml version="1.0" encoding="utf-8"?>
+<file path=ppt/slides/slide5.xml><?xml version="1.0" encoding="utf-8"?>
 <p:sld xmlns:a="http://schemas.openxmlformats.org/drawingml/2006/main" xmlns:r="http://schemas.openxmlformats.org/officeDocument/2006/relationships" xmlns:p="http://schemas.openxmlformats.org/presentationml/2006/main" showMasterSp="0">
   <p:cSld>
     <p:spTree>
@@ -6008,8 +6726,8 @@
         </p:nvSpPr>
         <p:spPr>
           <a:xfrm>
-            <a:off x="325027" y="1132441"/>
-            <a:ext cx="7617571" cy="2616101"/>
+            <a:off x="523147" y="858121"/>
+            <a:ext cx="7617571" cy="2923877"/>
           </a:xfrm>
           <a:prstGeom prst="rect">
             <a:avLst/>
@@ -6026,8 +6744,8 @@
                 <a:solidFill>
                   <a:srgbClr val="000000"/>
                 </a:solidFill>
-                <a:latin typeface="Calibri" panose="020F0502020204030204" pitchFamily="34" charset="0"/>
-                <a:cs typeface="Calibri" panose="020F0502020204030204" pitchFamily="34" charset="0"/>
+                <a:latin typeface="Consolas" panose="020B0609020204030204" pitchFamily="49" charset="0"/>
+                <a:cs typeface="Arial" panose="020B0604020202020204" pitchFamily="34" charset="0"/>
               </a:rPr>
               <a:t>Курс будет полезен:</a:t>
             </a:r>
@@ -6037,8 +6755,8 @@
               <a:solidFill>
                 <a:srgbClr val="000000"/>
               </a:solidFill>
-              <a:latin typeface="Calibri" panose="020F0502020204030204" pitchFamily="34" charset="0"/>
-              <a:cs typeface="Calibri" panose="020F0502020204030204" pitchFamily="34" charset="0"/>
+              <a:latin typeface="Consolas" panose="020B0609020204030204" pitchFamily="49" charset="0"/>
+              <a:cs typeface="Arial" panose="020B0604020202020204" pitchFamily="34" charset="0"/>
             </a:endParaRPr>
           </a:p>
           <a:p>
@@ -6051,8 +6769,8 @@
                 <a:solidFill>
                   <a:srgbClr val="000000"/>
                 </a:solidFill>
-                <a:latin typeface="Calibri" panose="020F0502020204030204" pitchFamily="34" charset="0"/>
-                <a:cs typeface="Calibri" panose="020F0502020204030204" pitchFamily="34" charset="0"/>
+                <a:latin typeface="Consolas" panose="020B0609020204030204" pitchFamily="49" charset="0"/>
+                <a:cs typeface="Arial" panose="020B0604020202020204" pitchFamily="34" charset="0"/>
               </a:rPr>
               <a:t>Разработчикам СУБД </a:t>
             </a:r>
@@ -6061,8 +6779,8 @@
                 <a:solidFill>
                   <a:srgbClr val="000000"/>
                 </a:solidFill>
-                <a:latin typeface="Calibri" panose="020F0502020204030204" pitchFamily="34" charset="0"/>
-                <a:cs typeface="Calibri" panose="020F0502020204030204" pitchFamily="34" charset="0"/>
+                <a:latin typeface="Consolas" panose="020B0609020204030204" pitchFamily="49" charset="0"/>
+                <a:cs typeface="Arial" panose="020B0604020202020204" pitchFamily="34" charset="0"/>
               </a:rPr>
               <a:t>PostgreSQL</a:t>
             </a:r>
@@ -6071,8 +6789,8 @@
                 <a:solidFill>
                   <a:srgbClr val="000000"/>
                 </a:solidFill>
-                <a:latin typeface="Calibri" panose="020F0502020204030204" pitchFamily="34" charset="0"/>
-                <a:cs typeface="Calibri" panose="020F0502020204030204" pitchFamily="34" charset="0"/>
+                <a:latin typeface="Consolas" panose="020B0609020204030204" pitchFamily="49" charset="0"/>
+                <a:cs typeface="Arial" panose="020B0604020202020204" pitchFamily="34" charset="0"/>
               </a:rPr>
               <a:t>;</a:t>
             </a:r>
@@ -6087,8 +6805,8 @@
                 <a:solidFill>
                   <a:srgbClr val="000000"/>
                 </a:solidFill>
-                <a:latin typeface="Calibri" panose="020F0502020204030204" pitchFamily="34" charset="0"/>
-                <a:cs typeface="Calibri" panose="020F0502020204030204" pitchFamily="34" charset="0"/>
+                <a:latin typeface="Consolas" panose="020B0609020204030204" pitchFamily="49" charset="0"/>
+                <a:cs typeface="Arial" panose="020B0604020202020204" pitchFamily="34" charset="0"/>
               </a:rPr>
               <a:t>Разработчикам серверной части приложений СУБД </a:t>
             </a:r>
@@ -6097,8 +6815,8 @@
                 <a:solidFill>
                   <a:srgbClr val="000000"/>
                 </a:solidFill>
-                <a:latin typeface="Calibri" panose="020F0502020204030204" pitchFamily="34" charset="0"/>
-                <a:cs typeface="Calibri" panose="020F0502020204030204" pitchFamily="34" charset="0"/>
+                <a:latin typeface="Consolas" panose="020B0609020204030204" pitchFamily="49" charset="0"/>
+                <a:cs typeface="Arial" panose="020B0604020202020204" pitchFamily="34" charset="0"/>
               </a:rPr>
               <a:t>PostgreSQL</a:t>
             </a:r>
@@ -6107,8 +6825,8 @@
                 <a:solidFill>
                   <a:srgbClr val="000000"/>
                 </a:solidFill>
-                <a:latin typeface="Calibri" panose="020F0502020204030204" pitchFamily="34" charset="0"/>
-                <a:cs typeface="Calibri" panose="020F0502020204030204" pitchFamily="34" charset="0"/>
+                <a:latin typeface="Consolas" panose="020B0609020204030204" pitchFamily="49" charset="0"/>
+                <a:cs typeface="Arial" panose="020B0604020202020204" pitchFamily="34" charset="0"/>
               </a:rPr>
               <a:t>;</a:t>
             </a:r>
@@ -6123,8 +6841,8 @@
                 <a:solidFill>
                   <a:srgbClr val="000000"/>
                 </a:solidFill>
-                <a:latin typeface="Calibri" panose="020F0502020204030204" pitchFamily="34" charset="0"/>
-                <a:cs typeface="Calibri" panose="020F0502020204030204" pitchFamily="34" charset="0"/>
+                <a:latin typeface="Consolas" panose="020B0609020204030204" pitchFamily="49" charset="0"/>
+                <a:cs typeface="Arial" panose="020B0604020202020204" pitchFamily="34" charset="0"/>
               </a:rPr>
               <a:t>Администраторам СУБД </a:t>
             </a:r>
@@ -6133,8 +6851,8 @@
                 <a:solidFill>
                   <a:srgbClr val="000000"/>
                 </a:solidFill>
-                <a:latin typeface="Calibri" panose="020F0502020204030204" pitchFamily="34" charset="0"/>
-                <a:cs typeface="Calibri" panose="020F0502020204030204" pitchFamily="34" charset="0"/>
+                <a:latin typeface="Consolas" panose="020B0609020204030204" pitchFamily="49" charset="0"/>
+                <a:cs typeface="Arial" panose="020B0604020202020204" pitchFamily="34" charset="0"/>
               </a:rPr>
               <a:t>PostgreSQL</a:t>
             </a:r>
@@ -6143,8 +6861,8 @@
                 <a:solidFill>
                   <a:srgbClr val="000000"/>
                 </a:solidFill>
-                <a:latin typeface="Calibri" panose="020F0502020204030204" pitchFamily="34" charset="0"/>
-                <a:cs typeface="Calibri" panose="020F0502020204030204" pitchFamily="34" charset="0"/>
+                <a:latin typeface="Consolas" panose="020B0609020204030204" pitchFamily="49" charset="0"/>
+                <a:cs typeface="Arial" panose="020B0604020202020204" pitchFamily="34" charset="0"/>
               </a:rPr>
               <a:t>;</a:t>
             </a:r>
@@ -6159,8 +6877,8 @@
                 <a:solidFill>
                   <a:srgbClr val="000000"/>
                 </a:solidFill>
-                <a:latin typeface="Calibri" panose="020F0502020204030204" pitchFamily="34" charset="0"/>
-                <a:cs typeface="Calibri" panose="020F0502020204030204" pitchFamily="34" charset="0"/>
+                <a:latin typeface="Consolas" panose="020B0609020204030204" pitchFamily="49" charset="0"/>
+                <a:cs typeface="Arial" panose="020B0604020202020204" pitchFamily="34" charset="0"/>
               </a:rPr>
               <a:t>Разработчикам приложений;</a:t>
             </a:r>
@@ -6175,8 +6893,8 @@
                 <a:solidFill>
                   <a:srgbClr val="000000"/>
                 </a:solidFill>
-                <a:latin typeface="Calibri" panose="020F0502020204030204" pitchFamily="34" charset="0"/>
-                <a:cs typeface="Calibri" panose="020F0502020204030204" pitchFamily="34" charset="0"/>
+                <a:latin typeface="Consolas" panose="020B0609020204030204" pitchFamily="49" charset="0"/>
+                <a:cs typeface="Arial" panose="020B0604020202020204" pitchFamily="34" charset="0"/>
               </a:rPr>
               <a:t>Слушателям, обучающимся по направлению «Системы управления базами данных».</a:t>
             </a:r>
@@ -6185,8 +6903,8 @@
                 <a:srgbClr val="000000"/>
               </a:solidFill>
               <a:effectLst/>
-              <a:latin typeface="Calibri" panose="020F0502020204030204" pitchFamily="34" charset="0"/>
-              <a:cs typeface="Calibri" panose="020F0502020204030204" pitchFamily="34" charset="0"/>
+              <a:latin typeface="Consolas" panose="020B0609020204030204" pitchFamily="49" charset="0"/>
+              <a:cs typeface="Arial" panose="020B0604020202020204" pitchFamily="34" charset="0"/>
             </a:endParaRPr>
           </a:p>
         </p:txBody>
@@ -6204,7 +6922,7 @@
 </p:sld>
 </file>
 
-<file path=ppt/slides/slide5.xml><?xml version="1.0" encoding="utf-8"?>
+<file path=ppt/slides/slide6.xml><?xml version="1.0" encoding="utf-8"?>
 <p:sld xmlns:a="http://schemas.openxmlformats.org/drawingml/2006/main" xmlns:r="http://schemas.openxmlformats.org/officeDocument/2006/relationships" xmlns:p="http://schemas.openxmlformats.org/presentationml/2006/main" showMasterSp="0">
   <p:cSld>
     <p:spTree>
@@ -6264,7 +6982,7 @@
 </p:sld>
 </file>
 
-<file path=ppt/slides/slide6.xml><?xml version="1.0" encoding="utf-8"?>
+<file path=ppt/slides/slide7.xml><?xml version="1.0" encoding="utf-8"?>
 <p:sld xmlns:a="http://schemas.openxmlformats.org/drawingml/2006/main" xmlns:r="http://schemas.openxmlformats.org/officeDocument/2006/relationships" xmlns:p="http://schemas.openxmlformats.org/presentationml/2006/main" showMasterSp="0">
   <p:cSld>
     <p:spTree>
@@ -6324,7 +7042,7 @@
 </p:sld>
 </file>
 
-<file path=ppt/slides/slide7.xml><?xml version="1.0" encoding="utf-8"?>
+<file path=ppt/slides/slide8.xml><?xml version="1.0" encoding="utf-8"?>
 <p:sld xmlns:a="http://schemas.openxmlformats.org/drawingml/2006/main" xmlns:r="http://schemas.openxmlformats.org/officeDocument/2006/relationships" xmlns:p="http://schemas.openxmlformats.org/presentationml/2006/main" showMasterSp="0">
   <p:cSld>
     <p:spTree>
@@ -6384,7 +7102,7 @@
 </p:sld>
 </file>
 
-<file path=ppt/slides/slide8.xml><?xml version="1.0" encoding="utf-8"?>
+<file path=ppt/slides/slide9.xml><?xml version="1.0" encoding="utf-8"?>
 <p:sld xmlns:a="http://schemas.openxmlformats.org/drawingml/2006/main" xmlns:r="http://schemas.openxmlformats.org/officeDocument/2006/relationships" xmlns:p="http://schemas.openxmlformats.org/presentationml/2006/main" showMasterSp="0">
   <p:cSld>
     <p:spTree>
@@ -6435,66 +7153,6 @@
     <p:extLst>
       <p:ext uri="{BB962C8B-B14F-4D97-AF65-F5344CB8AC3E}">
         <p14:creationId xmlns:p14="http://schemas.microsoft.com/office/powerpoint/2010/main" val="2334871199"/>
-      </p:ext>
-    </p:extLst>
-  </p:cSld>
-  <p:clrMapOvr>
-    <a:masterClrMapping/>
-  </p:clrMapOvr>
-</p:sld>
-</file>
-
-<file path=ppt/slides/slide9.xml><?xml version="1.0" encoding="utf-8"?>
-<p:sld xmlns:a="http://schemas.openxmlformats.org/drawingml/2006/main" xmlns:r="http://schemas.openxmlformats.org/officeDocument/2006/relationships" xmlns:p="http://schemas.openxmlformats.org/presentationml/2006/main" showMasterSp="0">
-  <p:cSld>
-    <p:spTree>
-      <p:nvGrpSpPr>
-        <p:cNvPr id="1" name=""/>
-        <p:cNvGrpSpPr/>
-        <p:nvPr/>
-      </p:nvGrpSpPr>
-      <p:grpSpPr>
-        <a:xfrm>
-          <a:off x="0" y="0"/>
-          <a:ext cx="0" cy="0"/>
-          <a:chOff x="0" y="0"/>
-          <a:chExt cx="0" cy="0"/>
-        </a:xfrm>
-      </p:grpSpPr>
-      <p:pic>
-        <p:nvPicPr>
-          <p:cNvPr id="2" name="Рисунок 1">
-            <a:extLst>
-              <a:ext uri="{FF2B5EF4-FFF2-40B4-BE49-F238E27FC236}">
-                <a16:creationId xmlns:a16="http://schemas.microsoft.com/office/drawing/2014/main" id="{E2649E39-CD40-409B-9500-7EFDD1A1939D}"/>
-              </a:ext>
-            </a:extLst>
-          </p:cNvPr>
-          <p:cNvPicPr>
-            <a:picLocks noChangeAspect="1"/>
-          </p:cNvPicPr>
-          <p:nvPr/>
-        </p:nvPicPr>
-        <p:blipFill>
-          <a:blip r:embed="rId2"/>
-          <a:stretch>
-            <a:fillRect/>
-          </a:stretch>
-        </p:blipFill>
-        <p:spPr>
-          <a:xfrm>
-            <a:off x="1169100" y="0"/>
-            <a:ext cx="6805802" cy="5143500"/>
-          </a:xfrm>
-          <a:prstGeom prst="rect">
-            <a:avLst/>
-          </a:prstGeom>
-        </p:spPr>
-      </p:pic>
-    </p:spTree>
-    <p:extLst>
-      <p:ext uri="{BB962C8B-B14F-4D97-AF65-F5344CB8AC3E}">
-        <p14:creationId xmlns:p14="http://schemas.microsoft.com/office/powerpoint/2010/main" val="1449623869"/>
       </p:ext>
     </p:extLst>
   </p:cSld>

--- a/DEV-1-16/for_students/DAY-1/ppt/dev1_00.pptx
+++ b/DEV-1-16/for_students/DAY-1/ppt/dev1_00.pptx
@@ -21,8 +21,8 @@
     <p:sldId id="512" r:id="rId12"/>
     <p:sldId id="513" r:id="rId13"/>
     <p:sldId id="509" r:id="rId14"/>
-    <p:sldId id="256" r:id="rId15"/>
-    <p:sldId id="504" r:id="rId16"/>
+    <p:sldId id="504" r:id="rId15"/>
+    <p:sldId id="516" r:id="rId16"/>
     <p:sldId id="258" r:id="rId17"/>
     <p:sldId id="515" r:id="rId18"/>
     <p:sldId id="259" r:id="rId19"/>
@@ -221,7 +221,7 @@
           <a:p>
             <a:fld id="{7A6A0595-55A8-48ED-89D9-94EF8A794717}" type="datetimeFigureOut">
               <a:rPr lang="ru-RU" smtClean="0"/>
-              <a:t>04.12.2025</a:t>
+              <a:t>05.12.2025</a:t>
             </a:fld>
             <a:endParaRPr lang="ru-RU"/>
           </a:p>
@@ -1370,7 +1370,7 @@
           <a:p>
             <a:fld id="{EF790F8C-5FB9-4EFE-BCC7-F735A3026FD8}" type="datetimeFigureOut">
               <a:rPr lang="ru-RU" smtClean="0"/>
-              <a:t>04.12.2025</a:t>
+              <a:t>05.12.2025</a:t>
             </a:fld>
             <a:endParaRPr lang="ru-RU"/>
           </a:p>
@@ -3529,110 +3529,6 @@
           <a:chExt cx="0" cy="0"/>
         </a:xfrm>
       </p:grpSpPr>
-      <p:sp>
-        <p:nvSpPr>
-          <p:cNvPr id="86" name="TextShape 1"/>
-          <p:cNvSpPr txBox="1"/>
-          <p:nvPr/>
-        </p:nvSpPr>
-        <p:spPr>
-          <a:xfrm>
-            <a:off x="824994" y="1912937"/>
-            <a:ext cx="7886520" cy="993960"/>
-          </a:xfrm>
-          <a:prstGeom prst="rect">
-            <a:avLst/>
-          </a:prstGeom>
-          <a:noFill/>
-          <a:ln w="0">
-            <a:noFill/>
-          </a:ln>
-        </p:spPr>
-        <p:txBody>
-          <a:bodyPr anchor="ctr">
-            <a:noAutofit/>
-          </a:bodyPr>
-          <a:lstStyle/>
-          <a:p>
-            <a:pPr>
-              <a:lnSpc>
-                <a:spcPct val="90000"/>
-              </a:lnSpc>
-            </a:pPr>
-            <a:r>
-              <a:rPr lang="ru-RU" sz="3300" b="1" spc="-1" dirty="0">
-                <a:solidFill>
-                  <a:srgbClr val="000000"/>
-                </a:solidFill>
-                <a:latin typeface="Segoe UI Light" panose="020B0502040204020203" pitchFamily="34" charset="0"/>
-                <a:cs typeface="Segoe UI Light" panose="020B0502040204020203" pitchFamily="34" charset="0"/>
-              </a:rPr>
-              <a:t>Модуль</a:t>
-            </a:r>
-            <a:r>
-              <a:rPr lang="ru-RU" dirty="0">
-                <a:solidFill>
-                  <a:srgbClr val="333333"/>
-                </a:solidFill>
-                <a:latin typeface="Segoe UI Light" panose="020B0502040204020203" pitchFamily="34" charset="0"/>
-                <a:cs typeface="Segoe UI Light" panose="020B0502040204020203" pitchFamily="34" charset="0"/>
-              </a:rPr>
-              <a:t> </a:t>
-            </a:r>
-            <a:r>
-              <a:rPr lang="ru-RU" sz="3300" b="1" spc="-1" dirty="0">
-                <a:solidFill>
-                  <a:srgbClr val="000000"/>
-                </a:solidFill>
-                <a:latin typeface="Segoe UI Light" panose="020B0502040204020203" pitchFamily="34" charset="0"/>
-                <a:cs typeface="Segoe UI Light" panose="020B0502040204020203" pitchFamily="34" charset="0"/>
-              </a:rPr>
-              <a:t>1. Базовый инструментарий</a:t>
-            </a:r>
-            <a:br>
-              <a:rPr lang="ru-RU" sz="3300" b="1" spc="-1" dirty="0">
-                <a:solidFill>
-                  <a:srgbClr val="000000"/>
-                </a:solidFill>
-                <a:latin typeface="Segoe UI Light" panose="020B0502040204020203" pitchFamily="34" charset="0"/>
-                <a:cs typeface="Segoe UI Light" panose="020B0502040204020203" pitchFamily="34" charset="0"/>
-              </a:rPr>
-            </a:br>
-            <a:endParaRPr lang="ru-RU" sz="3300" b="1" spc="-1" dirty="0">
-              <a:solidFill>
-                <a:srgbClr val="000000"/>
-              </a:solidFill>
-              <a:latin typeface="Segoe UI Light" panose="020B0502040204020203" pitchFamily="34" charset="0"/>
-              <a:cs typeface="Segoe UI Light" panose="020B0502040204020203" pitchFamily="34" charset="0"/>
-            </a:endParaRPr>
-          </a:p>
-        </p:txBody>
-      </p:sp>
-    </p:spTree>
-  </p:cSld>
-  <p:clrMapOvr>
-    <a:masterClrMapping/>
-  </p:clrMapOvr>
-</p:sld>
-</file>
-
-<file path=ppt/slides/slide15.xml><?xml version="1.0" encoding="utf-8"?>
-<p:sld xmlns:a="http://schemas.openxmlformats.org/drawingml/2006/main" xmlns:r="http://schemas.openxmlformats.org/officeDocument/2006/relationships" xmlns:p="http://schemas.openxmlformats.org/presentationml/2006/main" showMasterSp="0">
-  <p:cSld>
-    <p:spTree>
-      <p:nvGrpSpPr>
-        <p:cNvPr id="1" name=""/>
-        <p:cNvGrpSpPr/>
-        <p:nvPr/>
-      </p:nvGrpSpPr>
-      <p:grpSpPr>
-        <a:xfrm>
-          <a:off x="0" y="0"/>
-          <a:ext cx="0" cy="0"/>
-          <a:chOff x="0" y="0"/>
-          <a:chExt cx="0" cy="0"/>
-        </a:xfrm>
-      </p:grpSpPr>
       <p:pic>
         <p:nvPicPr>
           <p:cNvPr id="5" name="Рисунок 4">
@@ -3667,6 +3563,2032 @@
     <p:extLst>
       <p:ext uri="{BB962C8B-B14F-4D97-AF65-F5344CB8AC3E}">
         <p14:creationId xmlns:p14="http://schemas.microsoft.com/office/powerpoint/2010/main" val="2968183750"/>
+      </p:ext>
+    </p:extLst>
+  </p:cSld>
+  <p:clrMapOvr>
+    <a:masterClrMapping/>
+  </p:clrMapOvr>
+</p:sld>
+</file>
+
+<file path=ppt/slides/slide15.xml><?xml version="1.0" encoding="utf-8"?>
+<p:sld xmlns:a="http://schemas.openxmlformats.org/drawingml/2006/main" xmlns:r="http://schemas.openxmlformats.org/officeDocument/2006/relationships" xmlns:p="http://schemas.openxmlformats.org/presentationml/2006/main">
+  <p:cSld>
+    <p:spTree>
+      <p:nvGrpSpPr>
+        <p:cNvPr id="1" name=""/>
+        <p:cNvGrpSpPr/>
+        <p:nvPr/>
+      </p:nvGrpSpPr>
+      <p:grpSpPr>
+        <a:xfrm>
+          <a:off x="0" y="0"/>
+          <a:ext cx="0" cy="0"/>
+          <a:chOff x="0" y="0"/>
+          <a:chExt cx="0" cy="0"/>
+        </a:xfrm>
+      </p:grpSpPr>
+      <p:graphicFrame>
+        <p:nvGraphicFramePr>
+          <p:cNvPr id="9" name="Таблица 8">
+            <a:extLst>
+              <a:ext uri="{FF2B5EF4-FFF2-40B4-BE49-F238E27FC236}">
+                <a16:creationId xmlns:a16="http://schemas.microsoft.com/office/drawing/2014/main" id="{E277A0EF-4BB0-46B9-ADD7-F1D306935930}"/>
+              </a:ext>
+            </a:extLst>
+          </p:cNvPr>
+          <p:cNvGraphicFramePr>
+            <a:graphicFrameLocks noGrp="1"/>
+          </p:cNvGraphicFramePr>
+          <p:nvPr>
+            <p:extLst>
+              <p:ext uri="{D42A27DB-BD31-4B8C-83A1-F6EECF244321}">
+                <p14:modId xmlns:p14="http://schemas.microsoft.com/office/powerpoint/2010/main" val="2075141441"/>
+              </p:ext>
+            </p:extLst>
+          </p:nvPr>
+        </p:nvGraphicFramePr>
+        <p:xfrm>
+          <a:off x="370114" y="1124493"/>
+          <a:ext cx="8302171" cy="3482404"/>
+        </p:xfrm>
+        <a:graphic>
+          <a:graphicData uri="http://schemas.openxmlformats.org/drawingml/2006/table">
+            <a:tbl>
+              <a:tblPr/>
+              <a:tblGrid>
+                <a:gridCol w="1584729">
+                  <a:extLst>
+                    <a:ext uri="{9D8B030D-6E8A-4147-A177-3AD203B41FA5}">
+                      <a16:colId xmlns:a16="http://schemas.microsoft.com/office/drawing/2014/main" val="2631200093"/>
+                    </a:ext>
+                  </a:extLst>
+                </a:gridCol>
+                <a:gridCol w="2001003">
+                  <a:extLst>
+                    <a:ext uri="{9D8B030D-6E8A-4147-A177-3AD203B41FA5}">
+                      <a16:colId xmlns:a16="http://schemas.microsoft.com/office/drawing/2014/main" val="3327276249"/>
+                    </a:ext>
+                  </a:extLst>
+                </a:gridCol>
+                <a:gridCol w="1812227">
+                  <a:extLst>
+                    <a:ext uri="{9D8B030D-6E8A-4147-A177-3AD203B41FA5}">
+                      <a16:colId xmlns:a16="http://schemas.microsoft.com/office/drawing/2014/main" val="3537933714"/>
+                    </a:ext>
+                  </a:extLst>
+                </a:gridCol>
+                <a:gridCol w="2904212">
+                  <a:extLst>
+                    <a:ext uri="{9D8B030D-6E8A-4147-A177-3AD203B41FA5}">
+                      <a16:colId xmlns:a16="http://schemas.microsoft.com/office/drawing/2014/main" val="126285442"/>
+                    </a:ext>
+                  </a:extLst>
+                </a:gridCol>
+              </a:tblGrid>
+              <a:tr h="590702">
+                <a:tc>
+                  <a:txBody>
+                    <a:bodyPr/>
+                    <a:lstStyle/>
+                    <a:p>
+                      <a:pPr algn="ctr" fontAlgn="b"/>
+                      <a:r>
+                        <a:rPr lang="ru-RU" sz="1800" b="0" i="0" u="none" strike="noStrike" dirty="0">
+                          <a:solidFill>
+                            <a:srgbClr val="000000"/>
+                          </a:solidFill>
+                          <a:effectLst/>
+                          <a:latin typeface="Calibri" panose="020F0502020204030204" pitchFamily="34" charset="0"/>
+                        </a:rPr>
+                        <a:t>Хранилище</a:t>
+                      </a:r>
+                    </a:p>
+                  </a:txBody>
+                  <a:tcPr marL="8059" marR="8059" marT="8059" marB="0" anchor="ctr">
+                    <a:lnL w="6350" cap="flat" cmpd="sng" algn="ctr">
+                      <a:solidFill>
+                        <a:srgbClr val="000000"/>
+                      </a:solidFill>
+                      <a:prstDash val="solid"/>
+                      <a:round/>
+                      <a:headEnd type="none" w="med" len="med"/>
+                      <a:tailEnd type="none" w="med" len="med"/>
+                    </a:lnL>
+                    <a:lnR w="6350" cap="flat" cmpd="sng" algn="ctr">
+                      <a:solidFill>
+                        <a:srgbClr val="000000"/>
+                      </a:solidFill>
+                      <a:prstDash val="solid"/>
+                      <a:round/>
+                      <a:headEnd type="none" w="med" len="med"/>
+                      <a:tailEnd type="none" w="med" len="med"/>
+                    </a:lnR>
+                    <a:lnT w="6350" cap="flat" cmpd="sng" algn="ctr">
+                      <a:solidFill>
+                        <a:srgbClr val="000000"/>
+                      </a:solidFill>
+                      <a:prstDash val="solid"/>
+                      <a:round/>
+                      <a:headEnd type="none" w="med" len="med"/>
+                      <a:tailEnd type="none" w="med" len="med"/>
+                    </a:lnT>
+                    <a:lnB w="6350" cap="flat" cmpd="sng" algn="ctr">
+                      <a:solidFill>
+                        <a:srgbClr val="000000"/>
+                      </a:solidFill>
+                      <a:prstDash val="solid"/>
+                      <a:round/>
+                      <a:headEnd type="none" w="med" len="med"/>
+                      <a:tailEnd type="none" w="med" len="med"/>
+                    </a:lnB>
+                  </a:tcPr>
+                </a:tc>
+                <a:tc>
+                  <a:txBody>
+                    <a:bodyPr/>
+                    <a:lstStyle/>
+                    <a:p>
+                      <a:pPr algn="ctr" fontAlgn="b"/>
+                      <a:r>
+                        <a:rPr lang="ru-RU" sz="1800" b="0" i="0" u="none" strike="noStrike">
+                          <a:solidFill>
+                            <a:srgbClr val="000000"/>
+                          </a:solidFill>
+                          <a:effectLst/>
+                          <a:latin typeface="Calibri" panose="020F0502020204030204" pitchFamily="34" charset="0"/>
+                        </a:rPr>
+                        <a:t>Записей/сек</a:t>
+                      </a:r>
+                    </a:p>
+                  </a:txBody>
+                  <a:tcPr marL="8059" marR="8059" marT="8059" marB="0" anchor="ctr">
+                    <a:lnL w="6350" cap="flat" cmpd="sng" algn="ctr">
+                      <a:solidFill>
+                        <a:srgbClr val="000000"/>
+                      </a:solidFill>
+                      <a:prstDash val="solid"/>
+                      <a:round/>
+                      <a:headEnd type="none" w="med" len="med"/>
+                      <a:tailEnd type="none" w="med" len="med"/>
+                    </a:lnL>
+                    <a:lnR w="6350" cap="flat" cmpd="sng" algn="ctr">
+                      <a:solidFill>
+                        <a:srgbClr val="000000"/>
+                      </a:solidFill>
+                      <a:prstDash val="solid"/>
+                      <a:round/>
+                      <a:headEnd type="none" w="med" len="med"/>
+                      <a:tailEnd type="none" w="med" len="med"/>
+                    </a:lnR>
+                    <a:lnT w="6350" cap="flat" cmpd="sng" algn="ctr">
+                      <a:solidFill>
+                        <a:srgbClr val="000000"/>
+                      </a:solidFill>
+                      <a:prstDash val="solid"/>
+                      <a:round/>
+                      <a:headEnd type="none" w="med" len="med"/>
+                      <a:tailEnd type="none" w="med" len="med"/>
+                    </a:lnT>
+                    <a:lnB w="6350" cap="flat" cmpd="sng" algn="ctr">
+                      <a:solidFill>
+                        <a:srgbClr val="000000"/>
+                      </a:solidFill>
+                      <a:prstDash val="solid"/>
+                      <a:round/>
+                      <a:headEnd type="none" w="med" len="med"/>
+                      <a:tailEnd type="none" w="med" len="med"/>
+                    </a:lnB>
+                  </a:tcPr>
+                </a:tc>
+                <a:tc>
+                  <a:txBody>
+                    <a:bodyPr/>
+                    <a:lstStyle/>
+                    <a:p>
+                      <a:pPr algn="ctr" fontAlgn="b"/>
+                      <a:r>
+                        <a:rPr lang="ru-RU" sz="1800" b="0" i="0" u="none" strike="noStrike">
+                          <a:solidFill>
+                            <a:srgbClr val="000000"/>
+                          </a:solidFill>
+                          <a:effectLst/>
+                          <a:latin typeface="Calibri" panose="020F0502020204030204" pitchFamily="34" charset="0"/>
+                        </a:rPr>
+                        <a:t>Задержка</a:t>
+                      </a:r>
+                    </a:p>
+                  </a:txBody>
+                  <a:tcPr marL="8059" marR="8059" marT="8059" marB="0" anchor="ctr">
+                    <a:lnL w="6350" cap="flat" cmpd="sng" algn="ctr">
+                      <a:solidFill>
+                        <a:srgbClr val="000000"/>
+                      </a:solidFill>
+                      <a:prstDash val="solid"/>
+                      <a:round/>
+                      <a:headEnd type="none" w="med" len="med"/>
+                      <a:tailEnd type="none" w="med" len="med"/>
+                    </a:lnL>
+                    <a:lnR w="6350" cap="flat" cmpd="sng" algn="ctr">
+                      <a:solidFill>
+                        <a:srgbClr val="000000"/>
+                      </a:solidFill>
+                      <a:prstDash val="solid"/>
+                      <a:round/>
+                      <a:headEnd type="none" w="med" len="med"/>
+                      <a:tailEnd type="none" w="med" len="med"/>
+                    </a:lnR>
+                    <a:lnT w="6350" cap="flat" cmpd="sng" algn="ctr">
+                      <a:solidFill>
+                        <a:srgbClr val="000000"/>
+                      </a:solidFill>
+                      <a:prstDash val="solid"/>
+                      <a:round/>
+                      <a:headEnd type="none" w="med" len="med"/>
+                      <a:tailEnd type="none" w="med" len="med"/>
+                    </a:lnT>
+                    <a:lnB w="6350" cap="flat" cmpd="sng" algn="ctr">
+                      <a:solidFill>
+                        <a:srgbClr val="000000"/>
+                      </a:solidFill>
+                      <a:prstDash val="solid"/>
+                      <a:round/>
+                      <a:headEnd type="none" w="med" len="med"/>
+                      <a:tailEnd type="none" w="med" len="med"/>
+                    </a:lnB>
+                  </a:tcPr>
+                </a:tc>
+                <a:tc>
+                  <a:txBody>
+                    <a:bodyPr/>
+                    <a:lstStyle/>
+                    <a:p>
+                      <a:pPr algn="ctr" fontAlgn="b"/>
+                      <a:r>
+                        <a:rPr lang="ru-RU" sz="1800" b="0" i="0" u="none" strike="noStrike">
+                          <a:solidFill>
+                            <a:srgbClr val="000000"/>
+                          </a:solidFill>
+                          <a:effectLst/>
+                          <a:latin typeface="Calibri" panose="020F0502020204030204" pitchFamily="34" charset="0"/>
+                        </a:rPr>
+                        <a:t>Особенности</a:t>
+                      </a:r>
+                    </a:p>
+                  </a:txBody>
+                  <a:tcPr marL="8059" marR="8059" marT="8059" marB="0" anchor="ctr">
+                    <a:lnL w="6350" cap="flat" cmpd="sng" algn="ctr">
+                      <a:solidFill>
+                        <a:srgbClr val="000000"/>
+                      </a:solidFill>
+                      <a:prstDash val="solid"/>
+                      <a:round/>
+                      <a:headEnd type="none" w="med" len="med"/>
+                      <a:tailEnd type="none" w="med" len="med"/>
+                    </a:lnL>
+                    <a:lnR w="6350" cap="flat" cmpd="sng" algn="ctr">
+                      <a:solidFill>
+                        <a:srgbClr val="000000"/>
+                      </a:solidFill>
+                      <a:prstDash val="solid"/>
+                      <a:round/>
+                      <a:headEnd type="none" w="med" len="med"/>
+                      <a:tailEnd type="none" w="med" len="med"/>
+                    </a:lnR>
+                    <a:lnT w="6350" cap="flat" cmpd="sng" algn="ctr">
+                      <a:solidFill>
+                        <a:srgbClr val="000000"/>
+                      </a:solidFill>
+                      <a:prstDash val="solid"/>
+                      <a:round/>
+                      <a:headEnd type="none" w="med" len="med"/>
+                      <a:tailEnd type="none" w="med" len="med"/>
+                    </a:lnT>
+                    <a:lnB w="6350" cap="flat" cmpd="sng" algn="ctr">
+                      <a:solidFill>
+                        <a:srgbClr val="000000"/>
+                      </a:solidFill>
+                      <a:prstDash val="solid"/>
+                      <a:round/>
+                      <a:headEnd type="none" w="med" len="med"/>
+                      <a:tailEnd type="none" w="med" len="med"/>
+                    </a:lnB>
+                  </a:tcPr>
+                </a:tc>
+                <a:extLst>
+                  <a:ext uri="{0D108BD9-81ED-4DB2-BD59-A6C34878D82A}">
+                    <a16:rowId xmlns:a16="http://schemas.microsoft.com/office/drawing/2014/main" val="311835477"/>
+                  </a:ext>
+                </a:extLst>
+              </a:tr>
+              <a:tr h="585319">
+                <a:tc>
+                  <a:txBody>
+                    <a:bodyPr/>
+                    <a:lstStyle/>
+                    <a:p>
+                      <a:pPr algn="ctr" fontAlgn="b">
+                        <a:spcAft>
+                          <a:spcPts val="600"/>
+                        </a:spcAft>
+                      </a:pPr>
+                      <a:r>
+                        <a:rPr lang="en-US" sz="1800" b="0" i="0" u="none" strike="noStrike" dirty="0">
+                          <a:solidFill>
+                            <a:srgbClr val="000099"/>
+                          </a:solidFill>
+                          <a:effectLst/>
+                          <a:latin typeface="Calibri" panose="020F0502020204030204" pitchFamily="34" charset="0"/>
+                        </a:rPr>
+                        <a:t>PostgreSQL</a:t>
+                      </a:r>
+                    </a:p>
+                  </a:txBody>
+                  <a:tcPr marL="8059" marR="8059" marT="8059" marB="0" anchor="ctr">
+                    <a:lnL w="6350" cap="flat" cmpd="sng" algn="ctr">
+                      <a:solidFill>
+                        <a:srgbClr val="000000"/>
+                      </a:solidFill>
+                      <a:prstDash val="solid"/>
+                      <a:round/>
+                      <a:headEnd type="none" w="med" len="med"/>
+                      <a:tailEnd type="none" w="med" len="med"/>
+                    </a:lnL>
+                    <a:lnR w="6350" cap="flat" cmpd="sng" algn="ctr">
+                      <a:solidFill>
+                        <a:srgbClr val="000000"/>
+                      </a:solidFill>
+                      <a:prstDash val="solid"/>
+                      <a:round/>
+                      <a:headEnd type="none" w="med" len="med"/>
+                      <a:tailEnd type="none" w="med" len="med"/>
+                    </a:lnR>
+                    <a:lnT w="6350" cap="flat" cmpd="sng" algn="ctr">
+                      <a:solidFill>
+                        <a:srgbClr val="000000"/>
+                      </a:solidFill>
+                      <a:prstDash val="solid"/>
+                      <a:round/>
+                      <a:headEnd type="none" w="med" len="med"/>
+                      <a:tailEnd type="none" w="med" len="med"/>
+                    </a:lnT>
+                    <a:lnB w="6350" cap="flat" cmpd="sng" algn="ctr">
+                      <a:solidFill>
+                        <a:srgbClr val="000000"/>
+                      </a:solidFill>
+                      <a:prstDash val="solid"/>
+                      <a:round/>
+                      <a:headEnd type="none" w="med" len="med"/>
+                      <a:tailEnd type="none" w="med" len="med"/>
+                    </a:lnB>
+                  </a:tcPr>
+                </a:tc>
+                <a:tc>
+                  <a:txBody>
+                    <a:bodyPr/>
+                    <a:lstStyle/>
+                    <a:p>
+                      <a:pPr algn="ctr" fontAlgn="b">
+                        <a:spcAft>
+                          <a:spcPts val="600"/>
+                        </a:spcAft>
+                      </a:pPr>
+                      <a:r>
+                        <a:rPr lang="ru-RU" sz="1600" b="0" i="0" u="none" strike="noStrike" dirty="0">
+                          <a:solidFill>
+                            <a:srgbClr val="000099"/>
+                          </a:solidFill>
+                          <a:effectLst/>
+                          <a:latin typeface="Calibri" panose="020F0502020204030204" pitchFamily="34" charset="0"/>
+                        </a:rPr>
+                        <a:t>5,000 – 15,000</a:t>
+                      </a:r>
+                    </a:p>
+                  </a:txBody>
+                  <a:tcPr marL="8059" marR="8059" marT="8059" marB="0" anchor="ctr">
+                    <a:lnL w="6350" cap="flat" cmpd="sng" algn="ctr">
+                      <a:solidFill>
+                        <a:srgbClr val="000000"/>
+                      </a:solidFill>
+                      <a:prstDash val="solid"/>
+                      <a:round/>
+                      <a:headEnd type="none" w="med" len="med"/>
+                      <a:tailEnd type="none" w="med" len="med"/>
+                    </a:lnL>
+                    <a:lnR w="6350" cap="flat" cmpd="sng" algn="ctr">
+                      <a:solidFill>
+                        <a:srgbClr val="000000"/>
+                      </a:solidFill>
+                      <a:prstDash val="solid"/>
+                      <a:round/>
+                      <a:headEnd type="none" w="med" len="med"/>
+                      <a:tailEnd type="none" w="med" len="med"/>
+                    </a:lnR>
+                    <a:lnT w="6350" cap="flat" cmpd="sng" algn="ctr">
+                      <a:solidFill>
+                        <a:srgbClr val="000000"/>
+                      </a:solidFill>
+                      <a:prstDash val="solid"/>
+                      <a:round/>
+                      <a:headEnd type="none" w="med" len="med"/>
+                      <a:tailEnd type="none" w="med" len="med"/>
+                    </a:lnT>
+                    <a:lnB w="6350" cap="flat" cmpd="sng" algn="ctr">
+                      <a:solidFill>
+                        <a:srgbClr val="000000"/>
+                      </a:solidFill>
+                      <a:prstDash val="solid"/>
+                      <a:round/>
+                      <a:headEnd type="none" w="med" len="med"/>
+                      <a:tailEnd type="none" w="med" len="med"/>
+                    </a:lnB>
+                  </a:tcPr>
+                </a:tc>
+                <a:tc>
+                  <a:txBody>
+                    <a:bodyPr/>
+                    <a:lstStyle/>
+                    <a:p>
+                      <a:pPr algn="ctr" fontAlgn="b">
+                        <a:spcAft>
+                          <a:spcPts val="600"/>
+                        </a:spcAft>
+                      </a:pPr>
+                      <a:r>
+                        <a:rPr lang="ru-RU" sz="1800" b="0" i="0" u="none" strike="noStrike">
+                          <a:solidFill>
+                            <a:srgbClr val="000099"/>
+                          </a:solidFill>
+                          <a:effectLst/>
+                          <a:latin typeface="Calibri" panose="020F0502020204030204" pitchFamily="34" charset="0"/>
+                        </a:rPr>
+                        <a:t>10–50 мс</a:t>
+                      </a:r>
+                    </a:p>
+                  </a:txBody>
+                  <a:tcPr marL="8059" marR="8059" marT="8059" marB="0" anchor="ctr">
+                    <a:lnL w="6350" cap="flat" cmpd="sng" algn="ctr">
+                      <a:solidFill>
+                        <a:srgbClr val="000000"/>
+                      </a:solidFill>
+                      <a:prstDash val="solid"/>
+                      <a:round/>
+                      <a:headEnd type="none" w="med" len="med"/>
+                      <a:tailEnd type="none" w="med" len="med"/>
+                    </a:lnL>
+                    <a:lnR w="6350" cap="flat" cmpd="sng" algn="ctr">
+                      <a:solidFill>
+                        <a:srgbClr val="000000"/>
+                      </a:solidFill>
+                      <a:prstDash val="solid"/>
+                      <a:round/>
+                      <a:headEnd type="none" w="med" len="med"/>
+                      <a:tailEnd type="none" w="med" len="med"/>
+                    </a:lnR>
+                    <a:lnT w="6350" cap="flat" cmpd="sng" algn="ctr">
+                      <a:solidFill>
+                        <a:srgbClr val="000000"/>
+                      </a:solidFill>
+                      <a:prstDash val="solid"/>
+                      <a:round/>
+                      <a:headEnd type="none" w="med" len="med"/>
+                      <a:tailEnd type="none" w="med" len="med"/>
+                    </a:lnT>
+                    <a:lnB w="6350" cap="flat" cmpd="sng" algn="ctr">
+                      <a:solidFill>
+                        <a:srgbClr val="000000"/>
+                      </a:solidFill>
+                      <a:prstDash val="solid"/>
+                      <a:round/>
+                      <a:headEnd type="none" w="med" len="med"/>
+                      <a:tailEnd type="none" w="med" len="med"/>
+                    </a:lnB>
+                  </a:tcPr>
+                </a:tc>
+                <a:tc>
+                  <a:txBody>
+                    <a:bodyPr/>
+                    <a:lstStyle/>
+                    <a:p>
+                      <a:pPr algn="ctr" fontAlgn="b">
+                        <a:spcAft>
+                          <a:spcPts val="600"/>
+                        </a:spcAft>
+                      </a:pPr>
+                      <a:r>
+                        <a:rPr lang="en-US" sz="1600" b="0" i="0" u="none" strike="noStrike" dirty="0">
+                          <a:solidFill>
+                            <a:srgbClr val="000099"/>
+                          </a:solidFill>
+                          <a:effectLst/>
+                          <a:latin typeface="Calibri" panose="020F0502020204030204" pitchFamily="34" charset="0"/>
+                        </a:rPr>
+                        <a:t>ACID, </a:t>
+                      </a:r>
+                      <a:r>
+                        <a:rPr lang="ru-RU" sz="1600" b="0" i="0" u="none" strike="noStrike" dirty="0">
+                          <a:solidFill>
+                            <a:srgbClr val="000099"/>
+                          </a:solidFill>
+                          <a:effectLst/>
+                          <a:latin typeface="Calibri" panose="020F0502020204030204" pitchFamily="34" charset="0"/>
+                        </a:rPr>
+                        <a:t>индексы, блокировки</a:t>
+                      </a:r>
+                    </a:p>
+                  </a:txBody>
+                  <a:tcPr marL="8059" marR="8059" marT="8059" marB="0" anchor="ctr">
+                    <a:lnL w="6350" cap="flat" cmpd="sng" algn="ctr">
+                      <a:solidFill>
+                        <a:srgbClr val="000000"/>
+                      </a:solidFill>
+                      <a:prstDash val="solid"/>
+                      <a:round/>
+                      <a:headEnd type="none" w="med" len="med"/>
+                      <a:tailEnd type="none" w="med" len="med"/>
+                    </a:lnL>
+                    <a:lnR w="6350" cap="flat" cmpd="sng" algn="ctr">
+                      <a:solidFill>
+                        <a:srgbClr val="000000"/>
+                      </a:solidFill>
+                      <a:prstDash val="solid"/>
+                      <a:round/>
+                      <a:headEnd type="none" w="med" len="med"/>
+                      <a:tailEnd type="none" w="med" len="med"/>
+                    </a:lnR>
+                    <a:lnT w="6350" cap="flat" cmpd="sng" algn="ctr">
+                      <a:solidFill>
+                        <a:srgbClr val="000000"/>
+                      </a:solidFill>
+                      <a:prstDash val="solid"/>
+                      <a:round/>
+                      <a:headEnd type="none" w="med" len="med"/>
+                      <a:tailEnd type="none" w="med" len="med"/>
+                    </a:lnT>
+                    <a:lnB w="6350" cap="flat" cmpd="sng" algn="ctr">
+                      <a:solidFill>
+                        <a:srgbClr val="000000"/>
+                      </a:solidFill>
+                      <a:prstDash val="solid"/>
+                      <a:round/>
+                      <a:headEnd type="none" w="med" len="med"/>
+                      <a:tailEnd type="none" w="med" len="med"/>
+                    </a:lnB>
+                  </a:tcPr>
+                </a:tc>
+                <a:extLst>
+                  <a:ext uri="{0D108BD9-81ED-4DB2-BD59-A6C34878D82A}">
+                    <a16:rowId xmlns:a16="http://schemas.microsoft.com/office/drawing/2014/main" val="2838093318"/>
+                  </a:ext>
+                </a:extLst>
+              </a:tr>
+              <a:tr h="355600">
+                <a:tc>
+                  <a:txBody>
+                    <a:bodyPr/>
+                    <a:lstStyle/>
+                    <a:p>
+                      <a:pPr algn="ctr" fontAlgn="b">
+                        <a:spcAft>
+                          <a:spcPts val="600"/>
+                        </a:spcAft>
+                      </a:pPr>
+                      <a:r>
+                        <a:rPr lang="en-US" sz="1800" b="0" i="0" u="none" strike="noStrike" dirty="0">
+                          <a:solidFill>
+                            <a:srgbClr val="000099"/>
+                          </a:solidFill>
+                          <a:effectLst/>
+                          <a:latin typeface="Calibri" panose="020F0502020204030204" pitchFamily="34" charset="0"/>
+                        </a:rPr>
+                        <a:t>MySQL</a:t>
+                      </a:r>
+                    </a:p>
+                  </a:txBody>
+                  <a:tcPr marL="8059" marR="8059" marT="8059" marB="0" anchor="ctr">
+                    <a:lnL w="6350" cap="flat" cmpd="sng" algn="ctr">
+                      <a:solidFill>
+                        <a:srgbClr val="000000"/>
+                      </a:solidFill>
+                      <a:prstDash val="solid"/>
+                      <a:round/>
+                      <a:headEnd type="none" w="med" len="med"/>
+                      <a:tailEnd type="none" w="med" len="med"/>
+                    </a:lnL>
+                    <a:lnR w="6350" cap="flat" cmpd="sng" algn="ctr">
+                      <a:solidFill>
+                        <a:srgbClr val="000000"/>
+                      </a:solidFill>
+                      <a:prstDash val="solid"/>
+                      <a:round/>
+                      <a:headEnd type="none" w="med" len="med"/>
+                      <a:tailEnd type="none" w="med" len="med"/>
+                    </a:lnR>
+                    <a:lnT w="6350" cap="flat" cmpd="sng" algn="ctr">
+                      <a:solidFill>
+                        <a:srgbClr val="000000"/>
+                      </a:solidFill>
+                      <a:prstDash val="solid"/>
+                      <a:round/>
+                      <a:headEnd type="none" w="med" len="med"/>
+                      <a:tailEnd type="none" w="med" len="med"/>
+                    </a:lnT>
+                    <a:lnB w="6350" cap="flat" cmpd="sng" algn="ctr">
+                      <a:solidFill>
+                        <a:srgbClr val="000000"/>
+                      </a:solidFill>
+                      <a:prstDash val="solid"/>
+                      <a:round/>
+                      <a:headEnd type="none" w="med" len="med"/>
+                      <a:tailEnd type="none" w="med" len="med"/>
+                    </a:lnB>
+                  </a:tcPr>
+                </a:tc>
+                <a:tc>
+                  <a:txBody>
+                    <a:bodyPr/>
+                    <a:lstStyle/>
+                    <a:p>
+                      <a:pPr algn="ctr" fontAlgn="b">
+                        <a:spcAft>
+                          <a:spcPts val="600"/>
+                        </a:spcAft>
+                      </a:pPr>
+                      <a:r>
+                        <a:rPr lang="ru-RU" sz="1600" b="0" i="0" u="none" strike="noStrike" dirty="0">
+                          <a:solidFill>
+                            <a:srgbClr val="000099"/>
+                          </a:solidFill>
+                          <a:effectLst/>
+                          <a:latin typeface="Calibri" panose="020F0502020204030204" pitchFamily="34" charset="0"/>
+                        </a:rPr>
+                        <a:t>10,000 – 20,000</a:t>
+                      </a:r>
+                    </a:p>
+                  </a:txBody>
+                  <a:tcPr marL="8059" marR="8059" marT="8059" marB="0" anchor="ctr">
+                    <a:lnL w="6350" cap="flat" cmpd="sng" algn="ctr">
+                      <a:solidFill>
+                        <a:srgbClr val="000000"/>
+                      </a:solidFill>
+                      <a:prstDash val="solid"/>
+                      <a:round/>
+                      <a:headEnd type="none" w="med" len="med"/>
+                      <a:tailEnd type="none" w="med" len="med"/>
+                    </a:lnL>
+                    <a:lnR w="6350" cap="flat" cmpd="sng" algn="ctr">
+                      <a:solidFill>
+                        <a:srgbClr val="000000"/>
+                      </a:solidFill>
+                      <a:prstDash val="solid"/>
+                      <a:round/>
+                      <a:headEnd type="none" w="med" len="med"/>
+                      <a:tailEnd type="none" w="med" len="med"/>
+                    </a:lnR>
+                    <a:lnT w="6350" cap="flat" cmpd="sng" algn="ctr">
+                      <a:solidFill>
+                        <a:srgbClr val="000000"/>
+                      </a:solidFill>
+                      <a:prstDash val="solid"/>
+                      <a:round/>
+                      <a:headEnd type="none" w="med" len="med"/>
+                      <a:tailEnd type="none" w="med" len="med"/>
+                    </a:lnT>
+                    <a:lnB w="6350" cap="flat" cmpd="sng" algn="ctr">
+                      <a:solidFill>
+                        <a:srgbClr val="000000"/>
+                      </a:solidFill>
+                      <a:prstDash val="solid"/>
+                      <a:round/>
+                      <a:headEnd type="none" w="med" len="med"/>
+                      <a:tailEnd type="none" w="med" len="med"/>
+                    </a:lnB>
+                  </a:tcPr>
+                </a:tc>
+                <a:tc>
+                  <a:txBody>
+                    <a:bodyPr/>
+                    <a:lstStyle/>
+                    <a:p>
+                      <a:pPr algn="ctr" fontAlgn="b">
+                        <a:spcAft>
+                          <a:spcPts val="600"/>
+                        </a:spcAft>
+                      </a:pPr>
+                      <a:r>
+                        <a:rPr lang="ru-RU" sz="1800" b="0" i="0" u="none" strike="noStrike" dirty="0">
+                          <a:solidFill>
+                            <a:srgbClr val="000099"/>
+                          </a:solidFill>
+                          <a:effectLst/>
+                          <a:latin typeface="Calibri" panose="020F0502020204030204" pitchFamily="34" charset="0"/>
+                        </a:rPr>
+                        <a:t>5–30 </a:t>
+                      </a:r>
+                      <a:r>
+                        <a:rPr lang="ru-RU" sz="1800" b="0" i="0" u="none" strike="noStrike" dirty="0" err="1">
+                          <a:solidFill>
+                            <a:srgbClr val="000099"/>
+                          </a:solidFill>
+                          <a:effectLst/>
+                          <a:latin typeface="Calibri" panose="020F0502020204030204" pitchFamily="34" charset="0"/>
+                        </a:rPr>
+                        <a:t>мс</a:t>
+                      </a:r>
+                      <a:endParaRPr lang="ru-RU" sz="1800" b="0" i="0" u="none" strike="noStrike" dirty="0">
+                        <a:solidFill>
+                          <a:srgbClr val="000099"/>
+                        </a:solidFill>
+                        <a:effectLst/>
+                        <a:latin typeface="Calibri" panose="020F0502020204030204" pitchFamily="34" charset="0"/>
+                      </a:endParaRPr>
+                    </a:p>
+                  </a:txBody>
+                  <a:tcPr marL="8059" marR="8059" marT="8059" marB="0" anchor="ctr">
+                    <a:lnL w="6350" cap="flat" cmpd="sng" algn="ctr">
+                      <a:solidFill>
+                        <a:srgbClr val="000000"/>
+                      </a:solidFill>
+                      <a:prstDash val="solid"/>
+                      <a:round/>
+                      <a:headEnd type="none" w="med" len="med"/>
+                      <a:tailEnd type="none" w="med" len="med"/>
+                    </a:lnL>
+                    <a:lnR w="6350" cap="flat" cmpd="sng" algn="ctr">
+                      <a:solidFill>
+                        <a:srgbClr val="000000"/>
+                      </a:solidFill>
+                      <a:prstDash val="solid"/>
+                      <a:round/>
+                      <a:headEnd type="none" w="med" len="med"/>
+                      <a:tailEnd type="none" w="med" len="med"/>
+                    </a:lnR>
+                    <a:lnT w="6350" cap="flat" cmpd="sng" algn="ctr">
+                      <a:solidFill>
+                        <a:srgbClr val="000000"/>
+                      </a:solidFill>
+                      <a:prstDash val="solid"/>
+                      <a:round/>
+                      <a:headEnd type="none" w="med" len="med"/>
+                      <a:tailEnd type="none" w="med" len="med"/>
+                    </a:lnT>
+                    <a:lnB w="6350" cap="flat" cmpd="sng" algn="ctr">
+                      <a:solidFill>
+                        <a:srgbClr val="000000"/>
+                      </a:solidFill>
+                      <a:prstDash val="solid"/>
+                      <a:round/>
+                      <a:headEnd type="none" w="med" len="med"/>
+                      <a:tailEnd type="none" w="med" len="med"/>
+                    </a:lnB>
+                  </a:tcPr>
+                </a:tc>
+                <a:tc>
+                  <a:txBody>
+                    <a:bodyPr/>
+                    <a:lstStyle/>
+                    <a:p>
+                      <a:pPr algn="ctr" fontAlgn="b">
+                        <a:spcAft>
+                          <a:spcPts val="600"/>
+                        </a:spcAft>
+                      </a:pPr>
+                      <a:r>
+                        <a:rPr lang="ru-RU" sz="1600" b="0" i="0" u="none" strike="noStrike" dirty="0">
+                          <a:solidFill>
+                            <a:srgbClr val="000099"/>
+                          </a:solidFill>
+                          <a:effectLst/>
+                          <a:latin typeface="Calibri" panose="020F0502020204030204" pitchFamily="34" charset="0"/>
+                        </a:rPr>
+                        <a:t>Быстрее на простых запросах</a:t>
+                      </a:r>
+                    </a:p>
+                  </a:txBody>
+                  <a:tcPr marL="8059" marR="8059" marT="8059" marB="0" anchor="ctr">
+                    <a:lnL w="6350" cap="flat" cmpd="sng" algn="ctr">
+                      <a:solidFill>
+                        <a:srgbClr val="000000"/>
+                      </a:solidFill>
+                      <a:prstDash val="solid"/>
+                      <a:round/>
+                      <a:headEnd type="none" w="med" len="med"/>
+                      <a:tailEnd type="none" w="med" len="med"/>
+                    </a:lnL>
+                    <a:lnR w="6350" cap="flat" cmpd="sng" algn="ctr">
+                      <a:solidFill>
+                        <a:srgbClr val="000000"/>
+                      </a:solidFill>
+                      <a:prstDash val="solid"/>
+                      <a:round/>
+                      <a:headEnd type="none" w="med" len="med"/>
+                      <a:tailEnd type="none" w="med" len="med"/>
+                    </a:lnR>
+                    <a:lnT w="6350" cap="flat" cmpd="sng" algn="ctr">
+                      <a:solidFill>
+                        <a:srgbClr val="000000"/>
+                      </a:solidFill>
+                      <a:prstDash val="solid"/>
+                      <a:round/>
+                      <a:headEnd type="none" w="med" len="med"/>
+                      <a:tailEnd type="none" w="med" len="med"/>
+                    </a:lnT>
+                    <a:lnB w="6350" cap="flat" cmpd="sng" algn="ctr">
+                      <a:solidFill>
+                        <a:srgbClr val="000000"/>
+                      </a:solidFill>
+                      <a:prstDash val="solid"/>
+                      <a:round/>
+                      <a:headEnd type="none" w="med" len="med"/>
+                      <a:tailEnd type="none" w="med" len="med"/>
+                    </a:lnB>
+                  </a:tcPr>
+                </a:tc>
+                <a:extLst>
+                  <a:ext uri="{0D108BD9-81ED-4DB2-BD59-A6C34878D82A}">
+                    <a16:rowId xmlns:a16="http://schemas.microsoft.com/office/drawing/2014/main" val="4278265353"/>
+                  </a:ext>
+                </a:extLst>
+              </a:tr>
+              <a:tr h="391886">
+                <a:tc>
+                  <a:txBody>
+                    <a:bodyPr/>
+                    <a:lstStyle/>
+                    <a:p>
+                      <a:pPr algn="ctr" fontAlgn="b">
+                        <a:spcAft>
+                          <a:spcPts val="600"/>
+                        </a:spcAft>
+                      </a:pPr>
+                      <a:r>
+                        <a:rPr lang="en-US" sz="1800" b="0" i="0" u="none" strike="noStrike" dirty="0">
+                          <a:solidFill>
+                            <a:srgbClr val="000099"/>
+                          </a:solidFill>
+                          <a:effectLst/>
+                          <a:latin typeface="Calibri" panose="020F0502020204030204" pitchFamily="34" charset="0"/>
+                        </a:rPr>
+                        <a:t>MS SQL</a:t>
+                      </a:r>
+                    </a:p>
+                  </a:txBody>
+                  <a:tcPr marL="8059" marR="8059" marT="8059" marB="0" anchor="ctr">
+                    <a:lnL w="6350" cap="flat" cmpd="sng" algn="ctr">
+                      <a:solidFill>
+                        <a:srgbClr val="000000"/>
+                      </a:solidFill>
+                      <a:prstDash val="solid"/>
+                      <a:round/>
+                      <a:headEnd type="none" w="med" len="med"/>
+                      <a:tailEnd type="none" w="med" len="med"/>
+                    </a:lnL>
+                    <a:lnR w="6350" cap="flat" cmpd="sng" algn="ctr">
+                      <a:solidFill>
+                        <a:srgbClr val="000000"/>
+                      </a:solidFill>
+                      <a:prstDash val="solid"/>
+                      <a:round/>
+                      <a:headEnd type="none" w="med" len="med"/>
+                      <a:tailEnd type="none" w="med" len="med"/>
+                    </a:lnR>
+                    <a:lnT w="6350" cap="flat" cmpd="sng" algn="ctr">
+                      <a:solidFill>
+                        <a:srgbClr val="000000"/>
+                      </a:solidFill>
+                      <a:prstDash val="solid"/>
+                      <a:round/>
+                      <a:headEnd type="none" w="med" len="med"/>
+                      <a:tailEnd type="none" w="med" len="med"/>
+                    </a:lnT>
+                    <a:lnB w="6350" cap="flat" cmpd="sng" algn="ctr">
+                      <a:solidFill>
+                        <a:srgbClr val="000000"/>
+                      </a:solidFill>
+                      <a:prstDash val="solid"/>
+                      <a:round/>
+                      <a:headEnd type="none" w="med" len="med"/>
+                      <a:tailEnd type="none" w="med" len="med"/>
+                    </a:lnB>
+                  </a:tcPr>
+                </a:tc>
+                <a:tc>
+                  <a:txBody>
+                    <a:bodyPr/>
+                    <a:lstStyle/>
+                    <a:p>
+                      <a:pPr algn="ctr" fontAlgn="b">
+                        <a:spcAft>
+                          <a:spcPts val="600"/>
+                        </a:spcAft>
+                      </a:pPr>
+                      <a:r>
+                        <a:rPr lang="ru-RU" sz="1600" b="0" i="0" u="none" strike="noStrike" dirty="0">
+                          <a:solidFill>
+                            <a:srgbClr val="000099"/>
+                          </a:solidFill>
+                          <a:effectLst/>
+                          <a:latin typeface="Calibri" panose="020F0502020204030204" pitchFamily="34" charset="0"/>
+                        </a:rPr>
+                        <a:t>8,000 – 18,000</a:t>
+                      </a:r>
+                    </a:p>
+                  </a:txBody>
+                  <a:tcPr marL="8059" marR="8059" marT="8059" marB="0" anchor="ctr">
+                    <a:lnL w="6350" cap="flat" cmpd="sng" algn="ctr">
+                      <a:solidFill>
+                        <a:srgbClr val="000000"/>
+                      </a:solidFill>
+                      <a:prstDash val="solid"/>
+                      <a:round/>
+                      <a:headEnd type="none" w="med" len="med"/>
+                      <a:tailEnd type="none" w="med" len="med"/>
+                    </a:lnL>
+                    <a:lnR w="6350" cap="flat" cmpd="sng" algn="ctr">
+                      <a:solidFill>
+                        <a:srgbClr val="000000"/>
+                      </a:solidFill>
+                      <a:prstDash val="solid"/>
+                      <a:round/>
+                      <a:headEnd type="none" w="med" len="med"/>
+                      <a:tailEnd type="none" w="med" len="med"/>
+                    </a:lnR>
+                    <a:lnT w="6350" cap="flat" cmpd="sng" algn="ctr">
+                      <a:solidFill>
+                        <a:srgbClr val="000000"/>
+                      </a:solidFill>
+                      <a:prstDash val="solid"/>
+                      <a:round/>
+                      <a:headEnd type="none" w="med" len="med"/>
+                      <a:tailEnd type="none" w="med" len="med"/>
+                    </a:lnT>
+                    <a:lnB w="6350" cap="flat" cmpd="sng" algn="ctr">
+                      <a:solidFill>
+                        <a:srgbClr val="000000"/>
+                      </a:solidFill>
+                      <a:prstDash val="solid"/>
+                      <a:round/>
+                      <a:headEnd type="none" w="med" len="med"/>
+                      <a:tailEnd type="none" w="med" len="med"/>
+                    </a:lnB>
+                  </a:tcPr>
+                </a:tc>
+                <a:tc>
+                  <a:txBody>
+                    <a:bodyPr/>
+                    <a:lstStyle/>
+                    <a:p>
+                      <a:pPr algn="ctr" fontAlgn="b">
+                        <a:spcAft>
+                          <a:spcPts val="600"/>
+                        </a:spcAft>
+                      </a:pPr>
+                      <a:r>
+                        <a:rPr lang="ru-RU" sz="1800" b="0" i="0" u="none" strike="noStrike" dirty="0">
+                          <a:solidFill>
+                            <a:srgbClr val="000099"/>
+                          </a:solidFill>
+                          <a:effectLst/>
+                          <a:latin typeface="Calibri" panose="020F0502020204030204" pitchFamily="34" charset="0"/>
+                        </a:rPr>
+                        <a:t>8–40 </a:t>
+                      </a:r>
+                      <a:r>
+                        <a:rPr lang="ru-RU" sz="1800" b="0" i="0" u="none" strike="noStrike" dirty="0" err="1">
+                          <a:solidFill>
+                            <a:srgbClr val="000099"/>
+                          </a:solidFill>
+                          <a:effectLst/>
+                          <a:latin typeface="Calibri" panose="020F0502020204030204" pitchFamily="34" charset="0"/>
+                        </a:rPr>
+                        <a:t>мс</a:t>
+                      </a:r>
+                      <a:endParaRPr lang="ru-RU" sz="1800" b="0" i="0" u="none" strike="noStrike" dirty="0">
+                        <a:solidFill>
+                          <a:srgbClr val="000099"/>
+                        </a:solidFill>
+                        <a:effectLst/>
+                        <a:latin typeface="Calibri" panose="020F0502020204030204" pitchFamily="34" charset="0"/>
+                      </a:endParaRPr>
+                    </a:p>
+                  </a:txBody>
+                  <a:tcPr marL="8059" marR="8059" marT="8059" marB="0" anchor="ctr">
+                    <a:lnL w="6350" cap="flat" cmpd="sng" algn="ctr">
+                      <a:solidFill>
+                        <a:srgbClr val="000000"/>
+                      </a:solidFill>
+                      <a:prstDash val="solid"/>
+                      <a:round/>
+                      <a:headEnd type="none" w="med" len="med"/>
+                      <a:tailEnd type="none" w="med" len="med"/>
+                    </a:lnL>
+                    <a:lnR w="6350" cap="flat" cmpd="sng" algn="ctr">
+                      <a:solidFill>
+                        <a:srgbClr val="000000"/>
+                      </a:solidFill>
+                      <a:prstDash val="solid"/>
+                      <a:round/>
+                      <a:headEnd type="none" w="med" len="med"/>
+                      <a:tailEnd type="none" w="med" len="med"/>
+                    </a:lnR>
+                    <a:lnT w="6350" cap="flat" cmpd="sng" algn="ctr">
+                      <a:solidFill>
+                        <a:srgbClr val="000000"/>
+                      </a:solidFill>
+                      <a:prstDash val="solid"/>
+                      <a:round/>
+                      <a:headEnd type="none" w="med" len="med"/>
+                      <a:tailEnd type="none" w="med" len="med"/>
+                    </a:lnT>
+                    <a:lnB w="6350" cap="flat" cmpd="sng" algn="ctr">
+                      <a:solidFill>
+                        <a:srgbClr val="000000"/>
+                      </a:solidFill>
+                      <a:prstDash val="solid"/>
+                      <a:round/>
+                      <a:headEnd type="none" w="med" len="med"/>
+                      <a:tailEnd type="none" w="med" len="med"/>
+                    </a:lnB>
+                  </a:tcPr>
+                </a:tc>
+                <a:tc>
+                  <a:txBody>
+                    <a:bodyPr/>
+                    <a:lstStyle/>
+                    <a:p>
+                      <a:pPr algn="ctr" fontAlgn="b">
+                        <a:spcAft>
+                          <a:spcPts val="600"/>
+                        </a:spcAft>
+                      </a:pPr>
+                      <a:r>
+                        <a:rPr lang="ru-RU" sz="1600" b="0" i="0" u="none" strike="noStrike" dirty="0">
+                          <a:solidFill>
+                            <a:srgbClr val="000099"/>
+                          </a:solidFill>
+                          <a:effectLst/>
+                          <a:latin typeface="Calibri" panose="020F0502020204030204" pitchFamily="34" charset="0"/>
+                        </a:rPr>
+                        <a:t>Оптимизирован под </a:t>
+                      </a:r>
+                      <a:r>
+                        <a:rPr lang="en-US" sz="1600" b="0" i="0" u="none" strike="noStrike" dirty="0">
+                          <a:solidFill>
+                            <a:srgbClr val="000099"/>
+                          </a:solidFill>
+                          <a:effectLst/>
+                          <a:latin typeface="Calibri" panose="020F0502020204030204" pitchFamily="34" charset="0"/>
+                        </a:rPr>
+                        <a:t>Windows</a:t>
+                      </a:r>
+                    </a:p>
+                  </a:txBody>
+                  <a:tcPr marL="8059" marR="8059" marT="8059" marB="0" anchor="ctr">
+                    <a:lnL w="6350" cap="flat" cmpd="sng" algn="ctr">
+                      <a:solidFill>
+                        <a:srgbClr val="000000"/>
+                      </a:solidFill>
+                      <a:prstDash val="solid"/>
+                      <a:round/>
+                      <a:headEnd type="none" w="med" len="med"/>
+                      <a:tailEnd type="none" w="med" len="med"/>
+                    </a:lnL>
+                    <a:lnR w="6350" cap="flat" cmpd="sng" algn="ctr">
+                      <a:solidFill>
+                        <a:srgbClr val="000000"/>
+                      </a:solidFill>
+                      <a:prstDash val="solid"/>
+                      <a:round/>
+                      <a:headEnd type="none" w="med" len="med"/>
+                      <a:tailEnd type="none" w="med" len="med"/>
+                    </a:lnR>
+                    <a:lnT w="6350" cap="flat" cmpd="sng" algn="ctr">
+                      <a:solidFill>
+                        <a:srgbClr val="000000"/>
+                      </a:solidFill>
+                      <a:prstDash val="solid"/>
+                      <a:round/>
+                      <a:headEnd type="none" w="med" len="med"/>
+                      <a:tailEnd type="none" w="med" len="med"/>
+                    </a:lnT>
+                    <a:lnB w="6350" cap="flat" cmpd="sng" algn="ctr">
+                      <a:solidFill>
+                        <a:srgbClr val="000000"/>
+                      </a:solidFill>
+                      <a:prstDash val="solid"/>
+                      <a:round/>
+                      <a:headEnd type="none" w="med" len="med"/>
+                      <a:tailEnd type="none" w="med" len="med"/>
+                    </a:lnB>
+                  </a:tcPr>
+                </a:tc>
+                <a:extLst>
+                  <a:ext uri="{0D108BD9-81ED-4DB2-BD59-A6C34878D82A}">
+                    <a16:rowId xmlns:a16="http://schemas.microsoft.com/office/drawing/2014/main" val="882731321"/>
+                  </a:ext>
+                </a:extLst>
+              </a:tr>
+              <a:tr h="323579">
+                <a:tc>
+                  <a:txBody>
+                    <a:bodyPr/>
+                    <a:lstStyle/>
+                    <a:p>
+                      <a:pPr algn="ctr" fontAlgn="b">
+                        <a:spcAft>
+                          <a:spcPts val="600"/>
+                        </a:spcAft>
+                      </a:pPr>
+                      <a:r>
+                        <a:rPr lang="en-US" sz="1800" b="0" i="0" u="none" strike="noStrike" dirty="0">
+                          <a:solidFill>
+                            <a:srgbClr val="7030A0"/>
+                          </a:solidFill>
+                          <a:effectLst/>
+                          <a:latin typeface="Calibri" panose="020F0502020204030204" pitchFamily="34" charset="0"/>
+                        </a:rPr>
+                        <a:t>MongoDB</a:t>
+                      </a:r>
+                    </a:p>
+                  </a:txBody>
+                  <a:tcPr marL="8059" marR="8059" marT="8059" marB="0" anchor="ctr">
+                    <a:lnL w="6350" cap="flat" cmpd="sng" algn="ctr">
+                      <a:solidFill>
+                        <a:srgbClr val="000000"/>
+                      </a:solidFill>
+                      <a:prstDash val="solid"/>
+                      <a:round/>
+                      <a:headEnd type="none" w="med" len="med"/>
+                      <a:tailEnd type="none" w="med" len="med"/>
+                    </a:lnL>
+                    <a:lnR w="6350" cap="flat" cmpd="sng" algn="ctr">
+                      <a:solidFill>
+                        <a:srgbClr val="000000"/>
+                      </a:solidFill>
+                      <a:prstDash val="solid"/>
+                      <a:round/>
+                      <a:headEnd type="none" w="med" len="med"/>
+                      <a:tailEnd type="none" w="med" len="med"/>
+                    </a:lnR>
+                    <a:lnT w="6350" cap="flat" cmpd="sng" algn="ctr">
+                      <a:solidFill>
+                        <a:srgbClr val="000000"/>
+                      </a:solidFill>
+                      <a:prstDash val="solid"/>
+                      <a:round/>
+                      <a:headEnd type="none" w="med" len="med"/>
+                      <a:tailEnd type="none" w="med" len="med"/>
+                    </a:lnT>
+                    <a:lnB w="6350" cap="flat" cmpd="sng" algn="ctr">
+                      <a:solidFill>
+                        <a:srgbClr val="000000"/>
+                      </a:solidFill>
+                      <a:prstDash val="solid"/>
+                      <a:round/>
+                      <a:headEnd type="none" w="med" len="med"/>
+                      <a:tailEnd type="none" w="med" len="med"/>
+                    </a:lnB>
+                  </a:tcPr>
+                </a:tc>
+                <a:tc>
+                  <a:txBody>
+                    <a:bodyPr/>
+                    <a:lstStyle/>
+                    <a:p>
+                      <a:pPr algn="ctr" fontAlgn="b">
+                        <a:spcAft>
+                          <a:spcPts val="600"/>
+                        </a:spcAft>
+                      </a:pPr>
+                      <a:r>
+                        <a:rPr lang="ru-RU" sz="1600" b="0" i="0" u="none" strike="noStrike" dirty="0">
+                          <a:solidFill>
+                            <a:srgbClr val="7030A0"/>
+                          </a:solidFill>
+                          <a:effectLst/>
+                          <a:latin typeface="Calibri" panose="020F0502020204030204" pitchFamily="34" charset="0"/>
+                        </a:rPr>
+                        <a:t>20,000 – 50,000</a:t>
+                      </a:r>
+                    </a:p>
+                  </a:txBody>
+                  <a:tcPr marL="8059" marR="8059" marT="8059" marB="0" anchor="ctr">
+                    <a:lnL w="6350" cap="flat" cmpd="sng" algn="ctr">
+                      <a:solidFill>
+                        <a:srgbClr val="000000"/>
+                      </a:solidFill>
+                      <a:prstDash val="solid"/>
+                      <a:round/>
+                      <a:headEnd type="none" w="med" len="med"/>
+                      <a:tailEnd type="none" w="med" len="med"/>
+                    </a:lnL>
+                    <a:lnR w="6350" cap="flat" cmpd="sng" algn="ctr">
+                      <a:solidFill>
+                        <a:srgbClr val="000000"/>
+                      </a:solidFill>
+                      <a:prstDash val="solid"/>
+                      <a:round/>
+                      <a:headEnd type="none" w="med" len="med"/>
+                      <a:tailEnd type="none" w="med" len="med"/>
+                    </a:lnR>
+                    <a:lnT w="6350" cap="flat" cmpd="sng" algn="ctr">
+                      <a:solidFill>
+                        <a:srgbClr val="000000"/>
+                      </a:solidFill>
+                      <a:prstDash val="solid"/>
+                      <a:round/>
+                      <a:headEnd type="none" w="med" len="med"/>
+                      <a:tailEnd type="none" w="med" len="med"/>
+                    </a:lnT>
+                    <a:lnB w="6350" cap="flat" cmpd="sng" algn="ctr">
+                      <a:solidFill>
+                        <a:srgbClr val="000000"/>
+                      </a:solidFill>
+                      <a:prstDash val="solid"/>
+                      <a:round/>
+                      <a:headEnd type="none" w="med" len="med"/>
+                      <a:tailEnd type="none" w="med" len="med"/>
+                    </a:lnB>
+                  </a:tcPr>
+                </a:tc>
+                <a:tc>
+                  <a:txBody>
+                    <a:bodyPr/>
+                    <a:lstStyle/>
+                    <a:p>
+                      <a:pPr algn="ctr" fontAlgn="b">
+                        <a:spcAft>
+                          <a:spcPts val="600"/>
+                        </a:spcAft>
+                      </a:pPr>
+                      <a:r>
+                        <a:rPr lang="ru-RU" sz="1800" b="0" i="0" u="none" strike="noStrike" dirty="0">
+                          <a:solidFill>
+                            <a:srgbClr val="7030A0"/>
+                          </a:solidFill>
+                          <a:effectLst/>
+                          <a:latin typeface="Calibri" panose="020F0502020204030204" pitchFamily="34" charset="0"/>
+                        </a:rPr>
+                        <a:t>2–10 </a:t>
+                      </a:r>
+                      <a:r>
+                        <a:rPr lang="ru-RU" sz="1800" b="0" i="0" u="none" strike="noStrike" dirty="0" err="1">
+                          <a:solidFill>
+                            <a:srgbClr val="7030A0"/>
+                          </a:solidFill>
+                          <a:effectLst/>
+                          <a:latin typeface="Calibri" panose="020F0502020204030204" pitchFamily="34" charset="0"/>
+                        </a:rPr>
+                        <a:t>мс</a:t>
+                      </a:r>
+                      <a:endParaRPr lang="ru-RU" sz="1800" b="0" i="0" u="none" strike="noStrike" dirty="0">
+                        <a:solidFill>
+                          <a:srgbClr val="7030A0"/>
+                        </a:solidFill>
+                        <a:effectLst/>
+                        <a:latin typeface="Calibri" panose="020F0502020204030204" pitchFamily="34" charset="0"/>
+                      </a:endParaRPr>
+                    </a:p>
+                  </a:txBody>
+                  <a:tcPr marL="8059" marR="8059" marT="8059" marB="0" anchor="ctr">
+                    <a:lnL w="6350" cap="flat" cmpd="sng" algn="ctr">
+                      <a:solidFill>
+                        <a:srgbClr val="000000"/>
+                      </a:solidFill>
+                      <a:prstDash val="solid"/>
+                      <a:round/>
+                      <a:headEnd type="none" w="med" len="med"/>
+                      <a:tailEnd type="none" w="med" len="med"/>
+                    </a:lnL>
+                    <a:lnR w="6350" cap="flat" cmpd="sng" algn="ctr">
+                      <a:solidFill>
+                        <a:srgbClr val="000000"/>
+                      </a:solidFill>
+                      <a:prstDash val="solid"/>
+                      <a:round/>
+                      <a:headEnd type="none" w="med" len="med"/>
+                      <a:tailEnd type="none" w="med" len="med"/>
+                    </a:lnR>
+                    <a:lnT w="6350" cap="flat" cmpd="sng" algn="ctr">
+                      <a:solidFill>
+                        <a:srgbClr val="000000"/>
+                      </a:solidFill>
+                      <a:prstDash val="solid"/>
+                      <a:round/>
+                      <a:headEnd type="none" w="med" len="med"/>
+                      <a:tailEnd type="none" w="med" len="med"/>
+                    </a:lnT>
+                    <a:lnB w="6350" cap="flat" cmpd="sng" algn="ctr">
+                      <a:solidFill>
+                        <a:srgbClr val="000000"/>
+                      </a:solidFill>
+                      <a:prstDash val="solid"/>
+                      <a:round/>
+                      <a:headEnd type="none" w="med" len="med"/>
+                      <a:tailEnd type="none" w="med" len="med"/>
+                    </a:lnB>
+                  </a:tcPr>
+                </a:tc>
+                <a:tc>
+                  <a:txBody>
+                    <a:bodyPr/>
+                    <a:lstStyle/>
+                    <a:p>
+                      <a:pPr algn="ctr" fontAlgn="b">
+                        <a:spcAft>
+                          <a:spcPts val="600"/>
+                        </a:spcAft>
+                      </a:pPr>
+                      <a:r>
+                        <a:rPr lang="en-US" sz="1600" b="0" i="0" u="none" strike="noStrike" dirty="0">
+                          <a:solidFill>
+                            <a:srgbClr val="7030A0"/>
+                          </a:solidFill>
+                          <a:effectLst/>
+                          <a:latin typeface="Calibri" panose="020F0502020204030204" pitchFamily="34" charset="0"/>
+                        </a:rPr>
+                        <a:t>NoSQL, </a:t>
+                      </a:r>
+                      <a:r>
+                        <a:rPr lang="ru-RU" sz="1600" b="0" i="0" u="none" strike="noStrike" dirty="0">
+                          <a:solidFill>
+                            <a:srgbClr val="7030A0"/>
+                          </a:solidFill>
+                          <a:effectLst/>
+                          <a:latin typeface="Calibri" panose="020F0502020204030204" pitchFamily="34" charset="0"/>
+                        </a:rPr>
+                        <a:t>без схемы</a:t>
+                      </a:r>
+                    </a:p>
+                  </a:txBody>
+                  <a:tcPr marL="8059" marR="8059" marT="8059" marB="0" anchor="ctr">
+                    <a:lnL w="6350" cap="flat" cmpd="sng" algn="ctr">
+                      <a:solidFill>
+                        <a:srgbClr val="000000"/>
+                      </a:solidFill>
+                      <a:prstDash val="solid"/>
+                      <a:round/>
+                      <a:headEnd type="none" w="med" len="med"/>
+                      <a:tailEnd type="none" w="med" len="med"/>
+                    </a:lnL>
+                    <a:lnR w="6350" cap="flat" cmpd="sng" algn="ctr">
+                      <a:solidFill>
+                        <a:srgbClr val="000000"/>
+                      </a:solidFill>
+                      <a:prstDash val="solid"/>
+                      <a:round/>
+                      <a:headEnd type="none" w="med" len="med"/>
+                      <a:tailEnd type="none" w="med" len="med"/>
+                    </a:lnR>
+                    <a:lnT w="6350" cap="flat" cmpd="sng" algn="ctr">
+                      <a:solidFill>
+                        <a:srgbClr val="000000"/>
+                      </a:solidFill>
+                      <a:prstDash val="solid"/>
+                      <a:round/>
+                      <a:headEnd type="none" w="med" len="med"/>
+                      <a:tailEnd type="none" w="med" len="med"/>
+                    </a:lnT>
+                    <a:lnB w="6350" cap="flat" cmpd="sng" algn="ctr">
+                      <a:solidFill>
+                        <a:srgbClr val="000000"/>
+                      </a:solidFill>
+                      <a:prstDash val="solid"/>
+                      <a:round/>
+                      <a:headEnd type="none" w="med" len="med"/>
+                      <a:tailEnd type="none" w="med" len="med"/>
+                    </a:lnB>
+                  </a:tcPr>
+                </a:tc>
+                <a:extLst>
+                  <a:ext uri="{0D108BD9-81ED-4DB2-BD59-A6C34878D82A}">
+                    <a16:rowId xmlns:a16="http://schemas.microsoft.com/office/drawing/2014/main" val="3944631487"/>
+                  </a:ext>
+                </a:extLst>
+              </a:tr>
+              <a:tr h="169231">
+                <a:tc>
+                  <a:txBody>
+                    <a:bodyPr/>
+                    <a:lstStyle/>
+                    <a:p>
+                      <a:pPr algn="ctr" fontAlgn="b">
+                        <a:spcAft>
+                          <a:spcPts val="600"/>
+                        </a:spcAft>
+                      </a:pPr>
+                      <a:r>
+                        <a:rPr lang="en-US" sz="1800" b="0" i="0" u="none" strike="noStrike" dirty="0">
+                          <a:solidFill>
+                            <a:srgbClr val="7030A0"/>
+                          </a:solidFill>
+                          <a:effectLst/>
+                          <a:latin typeface="Calibri" panose="020F0502020204030204" pitchFamily="34" charset="0"/>
+                        </a:rPr>
+                        <a:t>JSON </a:t>
+                      </a:r>
+                      <a:r>
+                        <a:rPr lang="ru-RU" sz="1800" b="0" i="0" u="none" strike="noStrike" dirty="0">
+                          <a:solidFill>
+                            <a:srgbClr val="7030A0"/>
+                          </a:solidFill>
+                          <a:effectLst/>
+                          <a:latin typeface="Calibri" panose="020F0502020204030204" pitchFamily="34" charset="0"/>
+                        </a:rPr>
+                        <a:t>файлы</a:t>
+                      </a:r>
+                    </a:p>
+                  </a:txBody>
+                  <a:tcPr marL="8059" marR="8059" marT="8059" marB="0" anchor="ctr">
+                    <a:lnL w="6350" cap="flat" cmpd="sng" algn="ctr">
+                      <a:solidFill>
+                        <a:srgbClr val="000000"/>
+                      </a:solidFill>
+                      <a:prstDash val="solid"/>
+                      <a:round/>
+                      <a:headEnd type="none" w="med" len="med"/>
+                      <a:tailEnd type="none" w="med" len="med"/>
+                    </a:lnL>
+                    <a:lnR w="6350" cap="flat" cmpd="sng" algn="ctr">
+                      <a:solidFill>
+                        <a:srgbClr val="000000"/>
+                      </a:solidFill>
+                      <a:prstDash val="solid"/>
+                      <a:round/>
+                      <a:headEnd type="none" w="med" len="med"/>
+                      <a:tailEnd type="none" w="med" len="med"/>
+                    </a:lnR>
+                    <a:lnT w="6350" cap="flat" cmpd="sng" algn="ctr">
+                      <a:solidFill>
+                        <a:srgbClr val="000000"/>
+                      </a:solidFill>
+                      <a:prstDash val="solid"/>
+                      <a:round/>
+                      <a:headEnd type="none" w="med" len="med"/>
+                      <a:tailEnd type="none" w="med" len="med"/>
+                    </a:lnT>
+                    <a:lnB w="6350" cap="flat" cmpd="sng" algn="ctr">
+                      <a:solidFill>
+                        <a:srgbClr val="000000"/>
+                      </a:solidFill>
+                      <a:prstDash val="solid"/>
+                      <a:round/>
+                      <a:headEnd type="none" w="med" len="med"/>
+                      <a:tailEnd type="none" w="med" len="med"/>
+                    </a:lnB>
+                  </a:tcPr>
+                </a:tc>
+                <a:tc>
+                  <a:txBody>
+                    <a:bodyPr/>
+                    <a:lstStyle/>
+                    <a:p>
+                      <a:pPr algn="ctr" fontAlgn="b">
+                        <a:spcAft>
+                          <a:spcPts val="600"/>
+                        </a:spcAft>
+                      </a:pPr>
+                      <a:r>
+                        <a:rPr lang="ru-RU" sz="1600" b="0" i="0" u="none" strike="noStrike" dirty="0">
+                          <a:solidFill>
+                            <a:srgbClr val="7030A0"/>
+                          </a:solidFill>
+                          <a:effectLst/>
+                          <a:latin typeface="Calibri" panose="020F0502020204030204" pitchFamily="34" charset="0"/>
+                        </a:rPr>
+                        <a:t>50,000 – 100,000</a:t>
+                      </a:r>
+                    </a:p>
+                  </a:txBody>
+                  <a:tcPr marL="8059" marR="8059" marT="8059" marB="0" anchor="ctr">
+                    <a:lnL w="6350" cap="flat" cmpd="sng" algn="ctr">
+                      <a:solidFill>
+                        <a:srgbClr val="000000"/>
+                      </a:solidFill>
+                      <a:prstDash val="solid"/>
+                      <a:round/>
+                      <a:headEnd type="none" w="med" len="med"/>
+                      <a:tailEnd type="none" w="med" len="med"/>
+                    </a:lnL>
+                    <a:lnR w="6350" cap="flat" cmpd="sng" algn="ctr">
+                      <a:solidFill>
+                        <a:srgbClr val="000000"/>
+                      </a:solidFill>
+                      <a:prstDash val="solid"/>
+                      <a:round/>
+                      <a:headEnd type="none" w="med" len="med"/>
+                      <a:tailEnd type="none" w="med" len="med"/>
+                    </a:lnR>
+                    <a:lnT w="6350" cap="flat" cmpd="sng" algn="ctr">
+                      <a:solidFill>
+                        <a:srgbClr val="000000"/>
+                      </a:solidFill>
+                      <a:prstDash val="solid"/>
+                      <a:round/>
+                      <a:headEnd type="none" w="med" len="med"/>
+                      <a:tailEnd type="none" w="med" len="med"/>
+                    </a:lnT>
+                    <a:lnB w="6350" cap="flat" cmpd="sng" algn="ctr">
+                      <a:solidFill>
+                        <a:srgbClr val="000000"/>
+                      </a:solidFill>
+                      <a:prstDash val="solid"/>
+                      <a:round/>
+                      <a:headEnd type="none" w="med" len="med"/>
+                      <a:tailEnd type="none" w="med" len="med"/>
+                    </a:lnB>
+                  </a:tcPr>
+                </a:tc>
+                <a:tc>
+                  <a:txBody>
+                    <a:bodyPr/>
+                    <a:lstStyle/>
+                    <a:p>
+                      <a:pPr algn="ctr" fontAlgn="b">
+                        <a:spcAft>
+                          <a:spcPts val="600"/>
+                        </a:spcAft>
+                      </a:pPr>
+                      <a:r>
+                        <a:rPr lang="ru-RU" sz="1800" b="0" i="0" u="none" strike="noStrike" dirty="0">
+                          <a:solidFill>
+                            <a:srgbClr val="7030A0"/>
+                          </a:solidFill>
+                          <a:effectLst/>
+                          <a:latin typeface="Calibri" panose="020F0502020204030204" pitchFamily="34" charset="0"/>
+                        </a:rPr>
+                        <a:t>1–5 </a:t>
+                      </a:r>
+                      <a:r>
+                        <a:rPr lang="ru-RU" sz="1800" b="0" i="0" u="none" strike="noStrike" dirty="0" err="1">
+                          <a:solidFill>
+                            <a:srgbClr val="7030A0"/>
+                          </a:solidFill>
+                          <a:effectLst/>
+                          <a:latin typeface="Calibri" panose="020F0502020204030204" pitchFamily="34" charset="0"/>
+                        </a:rPr>
+                        <a:t>мс</a:t>
+                      </a:r>
+                      <a:endParaRPr lang="ru-RU" sz="1800" b="0" i="0" u="none" strike="noStrike" dirty="0">
+                        <a:solidFill>
+                          <a:srgbClr val="7030A0"/>
+                        </a:solidFill>
+                        <a:effectLst/>
+                        <a:latin typeface="Calibri" panose="020F0502020204030204" pitchFamily="34" charset="0"/>
+                      </a:endParaRPr>
+                    </a:p>
+                  </a:txBody>
+                  <a:tcPr marL="8059" marR="8059" marT="8059" marB="0" anchor="ctr">
+                    <a:lnL w="6350" cap="flat" cmpd="sng" algn="ctr">
+                      <a:solidFill>
+                        <a:srgbClr val="000000"/>
+                      </a:solidFill>
+                      <a:prstDash val="solid"/>
+                      <a:round/>
+                      <a:headEnd type="none" w="med" len="med"/>
+                      <a:tailEnd type="none" w="med" len="med"/>
+                    </a:lnL>
+                    <a:lnR w="6350" cap="flat" cmpd="sng" algn="ctr">
+                      <a:solidFill>
+                        <a:srgbClr val="000000"/>
+                      </a:solidFill>
+                      <a:prstDash val="solid"/>
+                      <a:round/>
+                      <a:headEnd type="none" w="med" len="med"/>
+                      <a:tailEnd type="none" w="med" len="med"/>
+                    </a:lnR>
+                    <a:lnT w="6350" cap="flat" cmpd="sng" algn="ctr">
+                      <a:solidFill>
+                        <a:srgbClr val="000000"/>
+                      </a:solidFill>
+                      <a:prstDash val="solid"/>
+                      <a:round/>
+                      <a:headEnd type="none" w="med" len="med"/>
+                      <a:tailEnd type="none" w="med" len="med"/>
+                    </a:lnT>
+                    <a:lnB w="6350" cap="flat" cmpd="sng" algn="ctr">
+                      <a:solidFill>
+                        <a:srgbClr val="000000"/>
+                      </a:solidFill>
+                      <a:prstDash val="solid"/>
+                      <a:round/>
+                      <a:headEnd type="none" w="med" len="med"/>
+                      <a:tailEnd type="none" w="med" len="med"/>
+                    </a:lnB>
+                  </a:tcPr>
+                </a:tc>
+                <a:tc>
+                  <a:txBody>
+                    <a:bodyPr/>
+                    <a:lstStyle/>
+                    <a:p>
+                      <a:pPr algn="ctr" fontAlgn="b">
+                        <a:spcAft>
+                          <a:spcPts val="600"/>
+                        </a:spcAft>
+                      </a:pPr>
+                      <a:r>
+                        <a:rPr lang="ru-RU" sz="1600" b="0" i="0" u="none" strike="noStrike" dirty="0">
+                          <a:solidFill>
+                            <a:srgbClr val="7030A0"/>
+                          </a:solidFill>
+                          <a:effectLst/>
+                          <a:latin typeface="Calibri" panose="020F0502020204030204" pitchFamily="34" charset="0"/>
+                        </a:rPr>
+                        <a:t>Без гарантий, риск потери данных</a:t>
+                      </a:r>
+                    </a:p>
+                  </a:txBody>
+                  <a:tcPr marL="8059" marR="8059" marT="8059" marB="0" anchor="ctr">
+                    <a:lnL w="6350" cap="flat" cmpd="sng" algn="ctr">
+                      <a:solidFill>
+                        <a:srgbClr val="000000"/>
+                      </a:solidFill>
+                      <a:prstDash val="solid"/>
+                      <a:round/>
+                      <a:headEnd type="none" w="med" len="med"/>
+                      <a:tailEnd type="none" w="med" len="med"/>
+                    </a:lnL>
+                    <a:lnR w="6350" cap="flat" cmpd="sng" algn="ctr">
+                      <a:solidFill>
+                        <a:srgbClr val="000000"/>
+                      </a:solidFill>
+                      <a:prstDash val="solid"/>
+                      <a:round/>
+                      <a:headEnd type="none" w="med" len="med"/>
+                      <a:tailEnd type="none" w="med" len="med"/>
+                    </a:lnR>
+                    <a:lnT w="6350" cap="flat" cmpd="sng" algn="ctr">
+                      <a:solidFill>
+                        <a:srgbClr val="000000"/>
+                      </a:solidFill>
+                      <a:prstDash val="solid"/>
+                      <a:round/>
+                      <a:headEnd type="none" w="med" len="med"/>
+                      <a:tailEnd type="none" w="med" len="med"/>
+                    </a:lnT>
+                    <a:lnB w="6350" cap="flat" cmpd="sng" algn="ctr">
+                      <a:solidFill>
+                        <a:srgbClr val="000000"/>
+                      </a:solidFill>
+                      <a:prstDash val="solid"/>
+                      <a:round/>
+                      <a:headEnd type="none" w="med" len="med"/>
+                      <a:tailEnd type="none" w="med" len="med"/>
+                    </a:lnB>
+                  </a:tcPr>
+                </a:tc>
+                <a:extLst>
+                  <a:ext uri="{0D108BD9-81ED-4DB2-BD59-A6C34878D82A}">
+                    <a16:rowId xmlns:a16="http://schemas.microsoft.com/office/drawing/2014/main" val="3068158464"/>
+                  </a:ext>
+                </a:extLst>
+              </a:tr>
+              <a:tr h="317510">
+                <a:tc>
+                  <a:txBody>
+                    <a:bodyPr/>
+                    <a:lstStyle/>
+                    <a:p>
+                      <a:pPr algn="ctr" fontAlgn="b">
+                        <a:spcAft>
+                          <a:spcPts val="600"/>
+                        </a:spcAft>
+                      </a:pPr>
+                      <a:r>
+                        <a:rPr lang="en-US" sz="1800" b="0" i="0" u="none" strike="noStrike" dirty="0">
+                          <a:solidFill>
+                            <a:srgbClr val="993300"/>
+                          </a:solidFill>
+                          <a:effectLst/>
+                          <a:latin typeface="Calibri" panose="020F0502020204030204" pitchFamily="34" charset="0"/>
+                        </a:rPr>
+                        <a:t>Redis</a:t>
+                      </a:r>
+                    </a:p>
+                  </a:txBody>
+                  <a:tcPr marL="8059" marR="8059" marT="8059" marB="0" anchor="ctr">
+                    <a:lnL w="6350" cap="flat" cmpd="sng" algn="ctr">
+                      <a:solidFill>
+                        <a:srgbClr val="000000"/>
+                      </a:solidFill>
+                      <a:prstDash val="solid"/>
+                      <a:round/>
+                      <a:headEnd type="none" w="med" len="med"/>
+                      <a:tailEnd type="none" w="med" len="med"/>
+                    </a:lnL>
+                    <a:lnR w="6350" cap="flat" cmpd="sng" algn="ctr">
+                      <a:solidFill>
+                        <a:srgbClr val="000000"/>
+                      </a:solidFill>
+                      <a:prstDash val="solid"/>
+                      <a:round/>
+                      <a:headEnd type="none" w="med" len="med"/>
+                      <a:tailEnd type="none" w="med" len="med"/>
+                    </a:lnR>
+                    <a:lnT w="6350" cap="flat" cmpd="sng" algn="ctr">
+                      <a:solidFill>
+                        <a:srgbClr val="000000"/>
+                      </a:solidFill>
+                      <a:prstDash val="solid"/>
+                      <a:round/>
+                      <a:headEnd type="none" w="med" len="med"/>
+                      <a:tailEnd type="none" w="med" len="med"/>
+                    </a:lnT>
+                    <a:lnB w="6350" cap="flat" cmpd="sng" algn="ctr">
+                      <a:solidFill>
+                        <a:srgbClr val="000000"/>
+                      </a:solidFill>
+                      <a:prstDash val="solid"/>
+                      <a:round/>
+                      <a:headEnd type="none" w="med" len="med"/>
+                      <a:tailEnd type="none" w="med" len="med"/>
+                    </a:lnB>
+                  </a:tcPr>
+                </a:tc>
+                <a:tc>
+                  <a:txBody>
+                    <a:bodyPr/>
+                    <a:lstStyle/>
+                    <a:p>
+                      <a:pPr algn="ctr" fontAlgn="b">
+                        <a:spcAft>
+                          <a:spcPts val="600"/>
+                        </a:spcAft>
+                      </a:pPr>
+                      <a:r>
+                        <a:rPr lang="ru-RU" sz="1600" b="0" i="0" u="none" strike="noStrike" dirty="0">
+                          <a:solidFill>
+                            <a:srgbClr val="993300"/>
+                          </a:solidFill>
+                          <a:effectLst/>
+                          <a:latin typeface="Calibri" panose="020F0502020204030204" pitchFamily="34" charset="0"/>
+                        </a:rPr>
+                        <a:t>100,000 – 1,000,000+</a:t>
+                      </a:r>
+                    </a:p>
+                  </a:txBody>
+                  <a:tcPr marL="8059" marR="8059" marT="8059" marB="0" anchor="ctr">
+                    <a:lnL w="6350" cap="flat" cmpd="sng" algn="ctr">
+                      <a:solidFill>
+                        <a:srgbClr val="000000"/>
+                      </a:solidFill>
+                      <a:prstDash val="solid"/>
+                      <a:round/>
+                      <a:headEnd type="none" w="med" len="med"/>
+                      <a:tailEnd type="none" w="med" len="med"/>
+                    </a:lnL>
+                    <a:lnR w="6350" cap="flat" cmpd="sng" algn="ctr">
+                      <a:solidFill>
+                        <a:srgbClr val="000000"/>
+                      </a:solidFill>
+                      <a:prstDash val="solid"/>
+                      <a:round/>
+                      <a:headEnd type="none" w="med" len="med"/>
+                      <a:tailEnd type="none" w="med" len="med"/>
+                    </a:lnR>
+                    <a:lnT w="6350" cap="flat" cmpd="sng" algn="ctr">
+                      <a:solidFill>
+                        <a:srgbClr val="000000"/>
+                      </a:solidFill>
+                      <a:prstDash val="solid"/>
+                      <a:round/>
+                      <a:headEnd type="none" w="med" len="med"/>
+                      <a:tailEnd type="none" w="med" len="med"/>
+                    </a:lnT>
+                    <a:lnB w="6350" cap="flat" cmpd="sng" algn="ctr">
+                      <a:solidFill>
+                        <a:srgbClr val="000000"/>
+                      </a:solidFill>
+                      <a:prstDash val="solid"/>
+                      <a:round/>
+                      <a:headEnd type="none" w="med" len="med"/>
+                      <a:tailEnd type="none" w="med" len="med"/>
+                    </a:lnB>
+                  </a:tcPr>
+                </a:tc>
+                <a:tc>
+                  <a:txBody>
+                    <a:bodyPr/>
+                    <a:lstStyle/>
+                    <a:p>
+                      <a:pPr algn="ctr" fontAlgn="b">
+                        <a:spcAft>
+                          <a:spcPts val="600"/>
+                        </a:spcAft>
+                      </a:pPr>
+                      <a:r>
+                        <a:rPr lang="ru-RU" sz="1800" b="0" i="0" u="none" strike="noStrike" dirty="0">
+                          <a:solidFill>
+                            <a:srgbClr val="993300"/>
+                          </a:solidFill>
+                          <a:effectLst/>
+                          <a:latin typeface="Calibri" panose="020F0502020204030204" pitchFamily="34" charset="0"/>
+                        </a:rPr>
+                        <a:t>0.1–1 </a:t>
+                      </a:r>
+                      <a:r>
+                        <a:rPr lang="ru-RU" sz="1800" b="0" i="0" u="none" strike="noStrike" dirty="0" err="1">
+                          <a:solidFill>
+                            <a:srgbClr val="993300"/>
+                          </a:solidFill>
+                          <a:effectLst/>
+                          <a:latin typeface="Calibri" panose="020F0502020204030204" pitchFamily="34" charset="0"/>
+                        </a:rPr>
+                        <a:t>мс</a:t>
+                      </a:r>
+                      <a:endParaRPr lang="ru-RU" sz="1800" b="0" i="0" u="none" strike="noStrike" dirty="0">
+                        <a:solidFill>
+                          <a:srgbClr val="993300"/>
+                        </a:solidFill>
+                        <a:effectLst/>
+                        <a:latin typeface="Calibri" panose="020F0502020204030204" pitchFamily="34" charset="0"/>
+                      </a:endParaRPr>
+                    </a:p>
+                  </a:txBody>
+                  <a:tcPr marL="8059" marR="8059" marT="8059" marB="0" anchor="ctr">
+                    <a:lnL w="6350" cap="flat" cmpd="sng" algn="ctr">
+                      <a:solidFill>
+                        <a:srgbClr val="000000"/>
+                      </a:solidFill>
+                      <a:prstDash val="solid"/>
+                      <a:round/>
+                      <a:headEnd type="none" w="med" len="med"/>
+                      <a:tailEnd type="none" w="med" len="med"/>
+                    </a:lnL>
+                    <a:lnR w="6350" cap="flat" cmpd="sng" algn="ctr">
+                      <a:solidFill>
+                        <a:srgbClr val="000000"/>
+                      </a:solidFill>
+                      <a:prstDash val="solid"/>
+                      <a:round/>
+                      <a:headEnd type="none" w="med" len="med"/>
+                      <a:tailEnd type="none" w="med" len="med"/>
+                    </a:lnR>
+                    <a:lnT w="6350" cap="flat" cmpd="sng" algn="ctr">
+                      <a:solidFill>
+                        <a:srgbClr val="000000"/>
+                      </a:solidFill>
+                      <a:prstDash val="solid"/>
+                      <a:round/>
+                      <a:headEnd type="none" w="med" len="med"/>
+                      <a:tailEnd type="none" w="med" len="med"/>
+                    </a:lnT>
+                    <a:lnB w="6350" cap="flat" cmpd="sng" algn="ctr">
+                      <a:solidFill>
+                        <a:srgbClr val="000000"/>
+                      </a:solidFill>
+                      <a:prstDash val="solid"/>
+                      <a:round/>
+                      <a:headEnd type="none" w="med" len="med"/>
+                      <a:tailEnd type="none" w="med" len="med"/>
+                    </a:lnB>
+                  </a:tcPr>
+                </a:tc>
+                <a:tc>
+                  <a:txBody>
+                    <a:bodyPr/>
+                    <a:lstStyle/>
+                    <a:p>
+                      <a:pPr algn="ctr" fontAlgn="b">
+                        <a:spcAft>
+                          <a:spcPts val="600"/>
+                        </a:spcAft>
+                      </a:pPr>
+                      <a:r>
+                        <a:rPr lang="ru-RU" sz="1600" b="0" i="0" u="none" strike="noStrike" dirty="0" err="1">
+                          <a:solidFill>
+                            <a:srgbClr val="993300"/>
+                          </a:solidFill>
+                          <a:effectLst/>
+                          <a:latin typeface="Calibri" panose="020F0502020204030204" pitchFamily="34" charset="0"/>
+                        </a:rPr>
+                        <a:t>In-memory</a:t>
+                      </a:r>
+                      <a:r>
+                        <a:rPr lang="ru-RU" sz="1600" b="0" i="0" u="none" strike="noStrike" dirty="0">
+                          <a:solidFill>
+                            <a:srgbClr val="993300"/>
+                          </a:solidFill>
+                          <a:effectLst/>
+                          <a:latin typeface="Calibri" panose="020F0502020204030204" pitchFamily="34" charset="0"/>
+                        </a:rPr>
+                        <a:t>, поддержка структур данных, высокая производительность, не ACID</a:t>
+                      </a:r>
+                    </a:p>
+                  </a:txBody>
+                  <a:tcPr marL="8059" marR="8059" marT="8059" marB="0" anchor="ctr">
+                    <a:lnL w="6350" cap="flat" cmpd="sng" algn="ctr">
+                      <a:solidFill>
+                        <a:srgbClr val="000000"/>
+                      </a:solidFill>
+                      <a:prstDash val="solid"/>
+                      <a:round/>
+                      <a:headEnd type="none" w="med" len="med"/>
+                      <a:tailEnd type="none" w="med" len="med"/>
+                    </a:lnL>
+                    <a:lnR w="6350" cap="flat" cmpd="sng" algn="ctr">
+                      <a:solidFill>
+                        <a:srgbClr val="000000"/>
+                      </a:solidFill>
+                      <a:prstDash val="solid"/>
+                      <a:round/>
+                      <a:headEnd type="none" w="med" len="med"/>
+                      <a:tailEnd type="none" w="med" len="med"/>
+                    </a:lnR>
+                    <a:lnT w="6350" cap="flat" cmpd="sng" algn="ctr">
+                      <a:solidFill>
+                        <a:srgbClr val="000000"/>
+                      </a:solidFill>
+                      <a:prstDash val="solid"/>
+                      <a:round/>
+                      <a:headEnd type="none" w="med" len="med"/>
+                      <a:tailEnd type="none" w="med" len="med"/>
+                    </a:lnT>
+                    <a:lnB w="6350" cap="flat" cmpd="sng" algn="ctr">
+                      <a:solidFill>
+                        <a:srgbClr val="000000"/>
+                      </a:solidFill>
+                      <a:prstDash val="solid"/>
+                      <a:round/>
+                      <a:headEnd type="none" w="med" len="med"/>
+                      <a:tailEnd type="none" w="med" len="med"/>
+                    </a:lnB>
+                  </a:tcPr>
+                </a:tc>
+                <a:extLst>
+                  <a:ext uri="{0D108BD9-81ED-4DB2-BD59-A6C34878D82A}">
+                    <a16:rowId xmlns:a16="http://schemas.microsoft.com/office/drawing/2014/main" val="2768534049"/>
+                  </a:ext>
+                </a:extLst>
+              </a:tr>
+            </a:tbl>
+          </a:graphicData>
+        </a:graphic>
+      </p:graphicFrame>
+      <p:sp>
+        <p:nvSpPr>
+          <p:cNvPr id="10" name="Прямоугольник 9">
+            <a:extLst>
+              <a:ext uri="{FF2B5EF4-FFF2-40B4-BE49-F238E27FC236}">
+                <a16:creationId xmlns:a16="http://schemas.microsoft.com/office/drawing/2014/main" id="{B54D90D7-C716-4611-8C20-74567D1A2C1F}"/>
+              </a:ext>
+            </a:extLst>
+          </p:cNvPr>
+          <p:cNvSpPr/>
+          <p:nvPr/>
+        </p:nvSpPr>
+        <p:spPr>
+          <a:xfrm>
+            <a:off x="882863" y="0"/>
+            <a:ext cx="6957353" cy="584775"/>
+          </a:xfrm>
+          <a:prstGeom prst="rect">
+            <a:avLst/>
+          </a:prstGeom>
+          <a:noFill/>
+        </p:spPr>
+        <p:txBody>
+          <a:bodyPr wrap="none" lIns="91440" tIns="45720" rIns="91440" bIns="45720">
+            <a:spAutoFit/>
+          </a:bodyPr>
+          <a:lstStyle/>
+          <a:p>
+            <a:pPr algn="ctr"/>
+            <a:r>
+              <a:rPr lang="ru-RU" sz="3200" dirty="0">
+                <a:ln w="0"/>
+                <a:effectLst>
+                  <a:outerShdw blurRad="38100" dist="19050" dir="2700000" algn="tl" rotWithShape="0">
+                    <a:schemeClr val="dk1">
+                      <a:alpha val="40000"/>
+                    </a:schemeClr>
+                  </a:outerShdw>
+                </a:effectLst>
+              </a:rPr>
+              <a:t>Пропускная способность хранилищ</a:t>
+            </a:r>
+            <a:endParaRPr lang="ru-RU" sz="3200" b="0" cap="none" spc="0" dirty="0">
+              <a:ln w="0"/>
+              <a:solidFill>
+                <a:schemeClr val="tx1"/>
+              </a:solidFill>
+              <a:effectLst>
+                <a:outerShdw blurRad="38100" dist="19050" dir="2700000" algn="tl" rotWithShape="0">
+                  <a:schemeClr val="dk1">
+                    <a:alpha val="40000"/>
+                  </a:schemeClr>
+                </a:outerShdw>
+              </a:effectLst>
+            </a:endParaRPr>
+          </a:p>
+        </p:txBody>
+      </p:sp>
+    </p:spTree>
+    <p:extLst>
+      <p:ext uri="{BB962C8B-B14F-4D97-AF65-F5344CB8AC3E}">
+        <p14:creationId xmlns:p14="http://schemas.microsoft.com/office/powerpoint/2010/main" val="3439126726"/>
       </p:ext>
     </p:extLst>
   </p:cSld>
